--- a/slides/07-automations.pptx
+++ b/slides/07-automations.pptx
@@ -2210,145 +2210,9 @@
           <a:chExt cx="0" cy="0"/>
         </a:xfrm>
       </p:grpSpPr>
-      <p:sp>
-        <p:nvSpPr>
-          <p:cNvPr id="2" name="Text 0"/>
-          <p:cNvSpPr/>
-          <p:nvPr/>
-        </p:nvSpPr>
-        <p:spPr>
-          <a:xfrm>
-            <a:off x="5968901" y="0"/>
-            <a:ext cx="3174950" cy="5143500"/>
-          </a:xfrm>
-          <a:prstGeom prst="rect">
-            <a:avLst/>
-          </a:prstGeom>
-          <a:solidFill>
-            <a:srgbClr val="1A7F37"/>
-          </a:solidFill>
-          <a:ln/>
-        </p:spPr>
-        <p:txBody>
-          <a:bodyPr wrap="square" rtlCol="0" anchor="ctr"/>
-          <a:lstStyle/>
-          <a:p>
-            <a:pPr indent="0" marL="0">
-              <a:buNone/>
-            </a:pPr>
-            <a:endParaRPr lang="en-US" dirty="0"/>
-          </a:p>
-        </p:txBody>
-      </p:sp>
-      <p:sp>
-        <p:nvSpPr>
-          <p:cNvPr id="3" name="Text 1"/>
-          <p:cNvSpPr/>
-          <p:nvPr/>
-        </p:nvSpPr>
-        <p:spPr>
-          <a:xfrm>
-            <a:off x="5939692" y="1269950"/>
-            <a:ext cx="2979319" cy="2159050"/>
-          </a:xfrm>
-          <a:prstGeom prst="rect">
-            <a:avLst/>
-          </a:prstGeom>
-          <a:noFill/>
-          <a:ln/>
-        </p:spPr>
-        <p:txBody>
-          <a:bodyPr wrap="square" lIns="0" tIns="0" rIns="0" bIns="0" rtlCol="0" anchor="t"/>
-          <a:lstStyle/>
-          <a:p>
-            <a:pPr algn="ctr" indent="0" marL="0">
-              <a:lnSpc>
-                <a:spcPts val="17000"/>
-              </a:lnSpc>
-              <a:buNone/>
-            </a:pPr>
-            <a:r>
-              <a:rPr lang="en-US" sz="15000" b="1" dirty="0">
-                <a:solidFill>
-                  <a:srgbClr val="2DA44E"/>
-                </a:solidFill>
-                <a:latin typeface="Arial" pitchFamily="34" charset="0"/>
-                <a:ea typeface="Arial" pitchFamily="34" charset="-122"/>
-                <a:cs typeface="Arial" pitchFamily="34" charset="-120"/>
-              </a:rPr>
-              <a:t>07</a:t>
-            </a:r>
-            <a:endParaRPr lang="en-US" sz="15000" dirty="0"/>
-          </a:p>
-        </p:txBody>
-      </p:sp>
-      <p:sp>
-        <p:nvSpPr>
-          <p:cNvPr id="4" name="Text 2"/>
-          <p:cNvSpPr/>
-          <p:nvPr/>
-        </p:nvSpPr>
-        <p:spPr>
-          <a:xfrm>
-            <a:off x="6069330" y="3682901"/>
-            <a:ext cx="2720340" cy="431899"/>
-          </a:xfrm>
-          <a:prstGeom prst="rect">
-            <a:avLst/>
-          </a:prstGeom>
-          <a:noFill/>
-          <a:ln/>
-        </p:spPr>
-        <p:txBody>
-          <a:bodyPr wrap="square" lIns="0" tIns="0" rIns="0" bIns="0" rtlCol="0" anchor="t"/>
-          <a:lstStyle/>
-          <a:p>
-            <a:pPr algn="ctr" indent="0" marL="0">
-              <a:lnSpc>
-                <a:spcPts val="1700"/>
-              </a:lnSpc>
-              <a:buNone/>
-            </a:pPr>
-            <a:r>
-              <a:rPr lang="en-US" sz="1350" dirty="0">
-                <a:solidFill>
-                  <a:srgbClr val="FFFFFF"/>
-                </a:solidFill>
-                <a:latin typeface="Arial" pitchFamily="34" charset="0"/>
-                <a:ea typeface="Arial" pitchFamily="34" charset="-122"/>
-                <a:cs typeface="Arial" pitchFamily="34" charset="-120"/>
-              </a:rPr>
-              <a:t>GITHUB COPILOT APP</a:t>
-            </a:r>
-            <a:endParaRPr lang="en-US" sz="1350" dirty="0"/>
-          </a:p>
-          <a:p>
-            <a:pPr algn="ctr" indent="0" marL="0">
-              <a:lnSpc>
-                <a:spcPts val="1700"/>
-              </a:lnSpc>
-              <a:buNone/>
-            </a:pPr>
-            <a:r>
-              <a:rPr lang="en-US" sz="1350" dirty="0">
-                <a:solidFill>
-                  <a:srgbClr val="FFFFFF"/>
-                </a:solidFill>
-                <a:latin typeface="Arial" pitchFamily="34" charset="0"/>
-                <a:ea typeface="Arial" pitchFamily="34" charset="-122"/>
-                <a:cs typeface="Arial" pitchFamily="34" charset="-120"/>
-              </a:rPr>
-              <a:t>FOR BEGINNERS</a:t>
-            </a:r>
-            <a:endParaRPr lang="en-US" sz="1350" dirty="0"/>
-          </a:p>
-        </p:txBody>
-      </p:sp>
       <p:pic>
         <p:nvPicPr>
-          <p:cNvPr id="5" name="Image 0" descr="/Users/danwahlin/.copilot/session-state/56a7a0da-def8-48d4-b5e8-0ac3878cb8dd/files/slides-build/icons/FaGithub-FFFFFF.png">
-            <a:hlinkClick r:id="rId2" tooltip="https://github.com/github/copilot-app-for-beginners/tree/main/07-automations"/>
-          </p:cNvPr>
+          <p:cNvPr id="2" name="Image 0" descr="/Users/danwahlin/.copilot/session-state/56a7a0da-def8-48d4-b5e8-0ac3878cb8dd/files/slides-build/img/grad-title.jpg">    </p:cNvPr>
           <p:cNvPicPr>
             <a:picLocks noChangeAspect="1"/>
           </p:cNvPicPr>
@@ -2362,6 +2226,32 @@
         </p:blipFill>
         <p:spPr>
           <a:xfrm>
+            <a:off x="0" y="0"/>
+            <a:ext cx="9144000" cy="5143500"/>
+          </a:xfrm>
+          <a:prstGeom prst="rect">
+            <a:avLst/>
+          </a:prstGeom>
+        </p:spPr>
+      </p:pic>
+      <p:pic>
+        <p:nvPicPr>
+          <p:cNvPr id="3" name="Image 1" descr="/Users/danwahlin/.copilot/session-state/56a7a0da-def8-48d4-b5e8-0ac3878cb8dd/files/slides-build/icons/FaGithub-1F2328.png">
+            <a:hlinkClick r:id="rId3" tooltip="https://github.com/github/copilot-app-for-beginners/tree/main/07-automations"/>
+          </p:cNvPr>
+          <p:cNvPicPr>
+            <a:picLocks noChangeAspect="1"/>
+          </p:cNvPicPr>
+          <p:nvPr/>
+        </p:nvPicPr>
+        <p:blipFill>
+          <a:blip r:embed="rId2"/>
+          <a:stretch>
+            <a:fillRect/>
+          </a:stretch>
+        </p:blipFill>
+        <p:spPr>
+          <a:xfrm>
             <a:off x="8635901" y="203150"/>
             <a:ext cx="304800" cy="304800"/>
           </a:xfrm>
@@ -2372,14 +2262,14 @@
       </p:pic>
       <p:sp>
         <p:nvSpPr>
-          <p:cNvPr id="6" name="Text 3"/>
-          <p:cNvSpPr/>
-          <p:nvPr/>
-        </p:nvSpPr>
-        <p:spPr>
-          <a:xfrm>
-            <a:off x="609600" y="1533525"/>
-            <a:ext cx="5052060" cy="209550"/>
+          <p:cNvPr id="4" name="Text 0"/>
+          <p:cNvSpPr/>
+          <p:nvPr/>
+        </p:nvSpPr>
+        <p:spPr>
+          <a:xfrm>
+            <a:off x="1015901" y="1293912"/>
+            <a:ext cx="6088279" cy="209550"/>
           </a:xfrm>
           <a:prstGeom prst="rect">
             <a:avLst/>
@@ -2411,14 +2301,14 @@
       </p:sp>
       <p:sp>
         <p:nvSpPr>
-          <p:cNvPr id="7" name="Text 4"/>
-          <p:cNvSpPr/>
-          <p:nvPr/>
-        </p:nvSpPr>
-        <p:spPr>
-          <a:xfrm>
-            <a:off x="609600" y="1844576"/>
-            <a:ext cx="5052060" cy="584150"/>
+          <p:cNvPr id="5" name="Text 1"/>
+          <p:cNvSpPr/>
+          <p:nvPr/>
+        </p:nvSpPr>
+        <p:spPr>
+          <a:xfrm>
+            <a:off x="1015901" y="1604963"/>
+            <a:ext cx="6088279" cy="609600"/>
           </a:xfrm>
           <a:prstGeom prst="rect">
             <a:avLst/>
@@ -2432,7 +2322,7 @@
           <a:p>
             <a:pPr algn="l" indent="0" marL="0">
               <a:lnSpc>
-                <a:spcPts val="4600"/>
+                <a:spcPts val="4800"/>
               </a:lnSpc>
               <a:spcBef>
                 <a:spcPts val="800"/>
@@ -2440,7 +2330,7 @@
               <a:buNone/>
             </a:pPr>
             <a:r>
-              <a:rPr lang="en-US" sz="4000" b="1" dirty="0">
+              <a:rPr lang="en-US" sz="4200" b="1" dirty="0">
                 <a:solidFill>
                   <a:srgbClr val="1F2328"/>
                 </a:solidFill>
@@ -2450,19 +2340,19 @@
               </a:rPr>
               <a:t>Automations</a:t>
             </a:r>
-            <a:endParaRPr lang="en-US" sz="4000" dirty="0"/>
-          </a:p>
-        </p:txBody>
-      </p:sp>
-      <p:sp>
-        <p:nvSpPr>
-          <p:cNvPr id="8" name="Text 5"/>
-          <p:cNvSpPr/>
-          <p:nvPr/>
-        </p:nvSpPr>
-        <p:spPr>
-          <a:xfrm>
-            <a:off x="609600" y="2657326"/>
+            <a:endParaRPr lang="en-US" sz="4200" dirty="0"/>
+          </a:p>
+        </p:txBody>
+      </p:sp>
+      <p:sp>
+        <p:nvSpPr>
+          <p:cNvPr id="6" name="Text 2"/>
+          <p:cNvSpPr/>
+          <p:nvPr/>
+        </p:nvSpPr>
+        <p:spPr>
+          <a:xfrm>
+            <a:off x="1015901" y="2443163"/>
             <a:ext cx="609600" cy="63401"/>
           </a:xfrm>
           <a:prstGeom prst="roundRect">
@@ -2488,14 +2378,14 @@
       </p:sp>
       <p:sp>
         <p:nvSpPr>
-          <p:cNvPr id="9" name="Text 6"/>
-          <p:cNvSpPr/>
-          <p:nvPr/>
-        </p:nvSpPr>
-        <p:spPr>
-          <a:xfrm>
-            <a:off x="609600" y="2949327"/>
-            <a:ext cx="5052060" cy="660499"/>
+          <p:cNvPr id="7" name="Text 3"/>
+          <p:cNvSpPr/>
+          <p:nvPr/>
+        </p:nvSpPr>
+        <p:spPr>
+          <a:xfrm>
+            <a:off x="1015901" y="2735163"/>
+            <a:ext cx="6088279" cy="660499"/>
           </a:xfrm>
           <a:prstGeom prst="rect">
             <a:avLst/>
@@ -2530,21 +2420,21 @@
       </p:sp>
       <p:pic>
         <p:nvPicPr>
-          <p:cNvPr id="10" name="Image 1" descr="/Users/danwahlin/.copilot/session-state/56a7a0da-def8-48d4-b5e8-0ac3878cb8dd/files/slides-build/icons/FaGithub-0969DA.png">    </p:cNvPr>
+          <p:cNvPr id="8" name="Image 2" descr="/Users/danwahlin/.copilot/session-state/56a7a0da-def8-48d4-b5e8-0ac3878cb8dd/files/slides-build/icons/FaGithub-0969DA.png">    </p:cNvPr>
           <p:cNvPicPr>
             <a:picLocks noChangeAspect="1"/>
           </p:cNvPicPr>
           <p:nvPr/>
         </p:nvPicPr>
         <p:blipFill>
-          <a:blip r:embed="rId3"/>
+          <a:blip r:embed="rId4"/>
           <a:stretch>
             <a:fillRect/>
           </a:stretch>
         </p:blipFill>
         <p:spPr>
           <a:xfrm>
-            <a:off x="609600" y="4354562"/>
+            <a:off x="1015901" y="3660725"/>
             <a:ext cx="177701" cy="177701"/>
           </a:xfrm>
           <a:prstGeom prst="rect">
@@ -2554,13 +2444,13 @@
       </p:pic>
       <p:sp>
         <p:nvSpPr>
-          <p:cNvPr id="11" name="Text 7"/>
-          <p:cNvSpPr/>
-          <p:nvPr/>
-        </p:nvSpPr>
-        <p:spPr>
-          <a:xfrm>
-            <a:off x="876151" y="4343400"/>
+          <p:cNvPr id="9" name="Text 4"/>
+          <p:cNvSpPr/>
+          <p:nvPr/>
+        </p:nvSpPr>
+        <p:spPr>
+          <a:xfrm>
+            <a:off x="1282452" y="3649563"/>
             <a:ext cx="3373252" cy="200025"/>
           </a:xfrm>
           <a:prstGeom prst="rect">
@@ -2584,7 +2474,7 @@
                 <a:latin typeface="Arial" pitchFamily="34" charset="0"/>
                 <a:ea typeface="Arial" pitchFamily="34" charset="-122"/>
                 <a:cs typeface="Arial" pitchFamily="34" charset="-120"/>
-                <a:hlinkClick r:id="rId4" invalidUrl="" action="" tgtFrame="" tooltip="https://github.com/github/copilot-app-for-beginners/tree/main/07-automations" history="1" highlightClick="0" endSnd="0">
+                <a:hlinkClick r:id="rId5" invalidUrl="" action="" tgtFrame="" tooltip="https://github.com/github/copilot-app-for-beginners/tree/main/07-automations" history="1" highlightClick="0" endSnd="0">
                   <a:extLst>
                     <a:ext uri="{A12FA001-AC4F-418D-AE19-62706E023703}">
                       <ahyp:hlinkClr xmlns:ahyp="http://schemas.microsoft.com/office/drawing/2018/hyperlinkcolor" val="tx"/>
@@ -2630,112 +2520,9 @@
           <a:chExt cx="0" cy="0"/>
         </a:xfrm>
       </p:grpSpPr>
-      <p:sp>
-        <p:nvSpPr>
-          <p:cNvPr id="2" name="Text 0"/>
-          <p:cNvSpPr/>
-          <p:nvPr/>
-        </p:nvSpPr>
-        <p:spPr>
-          <a:xfrm>
-            <a:off x="0" y="0"/>
-            <a:ext cx="9144000" cy="76200"/>
-          </a:xfrm>
-          <a:prstGeom prst="rect">
-            <a:avLst/>
-          </a:prstGeom>
-          <a:solidFill>
-            <a:srgbClr val="8250DF"/>
-          </a:solidFill>
-          <a:ln/>
-        </p:spPr>
-        <p:txBody>
-          <a:bodyPr wrap="square" rtlCol="0" anchor="ctr"/>
-          <a:lstStyle/>
-          <a:p>
-            <a:pPr indent="0" marL="0">
-              <a:buNone/>
-            </a:pPr>
-            <a:endParaRPr lang="en-US" dirty="0"/>
-          </a:p>
-        </p:txBody>
-      </p:sp>
-      <p:sp>
-        <p:nvSpPr>
-          <p:cNvPr id="3" name="Text 1"/>
-          <p:cNvSpPr/>
-          <p:nvPr/>
-        </p:nvSpPr>
-        <p:spPr>
-          <a:xfrm>
-            <a:off x="7340501" y="177701"/>
-            <a:ext cx="1168301" cy="279350"/>
-          </a:xfrm>
-          <a:prstGeom prst="roundRect">
-            <a:avLst>
-              <a:gd name="adj" fmla="val 22731"/>
-            </a:avLst>
-          </a:prstGeom>
-          <a:solidFill>
-            <a:srgbClr val="1A7F37"/>
-          </a:solidFill>
-          <a:ln/>
-        </p:spPr>
-        <p:txBody>
-          <a:bodyPr wrap="square" rtlCol="0" anchor="ctr"/>
-          <a:lstStyle/>
-          <a:p>
-            <a:pPr indent="0" marL="0">
-              <a:buNone/>
-            </a:pPr>
-            <a:endParaRPr lang="en-US" dirty="0"/>
-          </a:p>
-        </p:txBody>
-      </p:sp>
-      <p:sp>
-        <p:nvSpPr>
-          <p:cNvPr id="4" name="Text 2"/>
-          <p:cNvSpPr/>
-          <p:nvPr/>
-        </p:nvSpPr>
-        <p:spPr>
-          <a:xfrm>
-            <a:off x="7461041" y="231577"/>
-            <a:ext cx="927071" cy="171450"/>
-          </a:xfrm>
-          <a:prstGeom prst="rect">
-            <a:avLst/>
-          </a:prstGeom>
-          <a:noFill/>
-          <a:ln/>
-        </p:spPr>
-        <p:txBody>
-          <a:bodyPr wrap="square" lIns="0" tIns="0" rIns="0" bIns="0" rtlCol="0" anchor="t"/>
-          <a:lstStyle/>
-          <a:p>
-            <a:pPr algn="ctr" indent="0" marL="0">
-              <a:buNone/>
-            </a:pPr>
-            <a:r>
-              <a:rPr lang="en-US" sz="1150" b="1" dirty="0">
-                <a:solidFill>
-                  <a:srgbClr val="FFFFFF"/>
-                </a:solidFill>
-                <a:latin typeface="Arial" pitchFamily="34" charset="0"/>
-                <a:ea typeface="Arial" pitchFamily="34" charset="-122"/>
-                <a:cs typeface="Arial" pitchFamily="34" charset="-120"/>
-              </a:rPr>
-              <a:t>CHAPTER 07</a:t>
-            </a:r>
-            <a:endParaRPr lang="en-US" sz="1150" dirty="0"/>
-          </a:p>
-        </p:txBody>
-      </p:sp>
       <p:pic>
         <p:nvPicPr>
-          <p:cNvPr id="5" name="Image 0" descr="/Users/danwahlin/.copilot/session-state/56a7a0da-def8-48d4-b5e8-0ac3878cb8dd/files/slides-build/icons/FaGithub-1F2328.png">
-            <a:hlinkClick r:id="rId2" tooltip="https://github.com/github/copilot-app-for-beginners/tree/main/07-automations"/>
-          </p:cNvPr>
+          <p:cNvPr id="2" name="Image 0" descr="/Users/danwahlin/.copilot/session-state/56a7a0da-def8-48d4-b5e8-0ac3878cb8dd/files/slides-build/img/grad-corner.png">    </p:cNvPr>
           <p:cNvPicPr>
             <a:picLocks noChangeAspect="1"/>
           </p:cNvPicPr>
@@ -2749,6 +2536,103 @@
         </p:blipFill>
         <p:spPr>
           <a:xfrm>
+            <a:off x="6349901" y="0"/>
+            <a:ext cx="2793950" cy="1308050"/>
+          </a:xfrm>
+          <a:prstGeom prst="rect">
+            <a:avLst/>
+          </a:prstGeom>
+        </p:spPr>
+      </p:pic>
+      <p:sp>
+        <p:nvSpPr>
+          <p:cNvPr id="3" name="Text 0"/>
+          <p:cNvSpPr/>
+          <p:nvPr/>
+        </p:nvSpPr>
+        <p:spPr>
+          <a:xfrm>
+            <a:off x="7340501" y="177701"/>
+            <a:ext cx="1168301" cy="279350"/>
+          </a:xfrm>
+          <a:prstGeom prst="roundRect">
+            <a:avLst>
+              <a:gd name="adj" fmla="val 22731"/>
+            </a:avLst>
+          </a:prstGeom>
+          <a:solidFill>
+            <a:srgbClr val="1A7F37"/>
+          </a:solidFill>
+          <a:ln/>
+        </p:spPr>
+        <p:txBody>
+          <a:bodyPr wrap="square" rtlCol="0" anchor="ctr"/>
+          <a:lstStyle/>
+          <a:p>
+            <a:pPr indent="0" marL="0">
+              <a:buNone/>
+            </a:pPr>
+            <a:endParaRPr lang="en-US" dirty="0"/>
+          </a:p>
+        </p:txBody>
+      </p:sp>
+      <p:sp>
+        <p:nvSpPr>
+          <p:cNvPr id="4" name="Text 1"/>
+          <p:cNvSpPr/>
+          <p:nvPr/>
+        </p:nvSpPr>
+        <p:spPr>
+          <a:xfrm>
+            <a:off x="7461041" y="231577"/>
+            <a:ext cx="927071" cy="171450"/>
+          </a:xfrm>
+          <a:prstGeom prst="rect">
+            <a:avLst/>
+          </a:prstGeom>
+          <a:noFill/>
+          <a:ln/>
+        </p:spPr>
+        <p:txBody>
+          <a:bodyPr wrap="square" lIns="0" tIns="0" rIns="0" bIns="0" rtlCol="0" anchor="t"/>
+          <a:lstStyle/>
+          <a:p>
+            <a:pPr algn="ctr" indent="0" marL="0">
+              <a:buNone/>
+            </a:pPr>
+            <a:r>
+              <a:rPr lang="en-US" sz="1150" b="1" dirty="0">
+                <a:solidFill>
+                  <a:srgbClr val="FFFFFF"/>
+                </a:solidFill>
+                <a:latin typeface="Arial" pitchFamily="34" charset="0"/>
+                <a:ea typeface="Arial" pitchFamily="34" charset="-122"/>
+                <a:cs typeface="Arial" pitchFamily="34" charset="-120"/>
+              </a:rPr>
+              <a:t>CHAPTER 07</a:t>
+            </a:r>
+            <a:endParaRPr lang="en-US" sz="1150" dirty="0"/>
+          </a:p>
+        </p:txBody>
+      </p:sp>
+      <p:pic>
+        <p:nvPicPr>
+          <p:cNvPr id="5" name="Image 1" descr="/Users/danwahlin/.copilot/session-state/56a7a0da-def8-48d4-b5e8-0ac3878cb8dd/files/slides-build/icons/FaGithub-1F2328.png">
+            <a:hlinkClick r:id="rId3" tooltip="https://github.com/github/copilot-app-for-beginners/tree/main/07-automations"/>
+          </p:cNvPr>
+          <p:cNvPicPr>
+            <a:picLocks noChangeAspect="1"/>
+          </p:cNvPicPr>
+          <p:nvPr/>
+        </p:nvPicPr>
+        <p:blipFill>
+          <a:blip r:embed="rId2"/>
+          <a:stretch>
+            <a:fillRect/>
+          </a:stretch>
+        </p:blipFill>
+        <p:spPr>
+          <a:xfrm>
             <a:off x="8610600" y="165050"/>
             <a:ext cx="304800" cy="304800"/>
           </a:xfrm>
@@ -2759,7 +2643,7 @@
       </p:pic>
       <p:sp>
         <p:nvSpPr>
-          <p:cNvPr id="6" name="Text 3"/>
+          <p:cNvPr id="6" name="Text 2"/>
           <p:cNvSpPr/>
           <p:nvPr/>
         </p:nvSpPr>
@@ -2798,7 +2682,7 @@
       </p:sp>
       <p:sp>
         <p:nvSpPr>
-          <p:cNvPr id="7" name="Text 4"/>
+          <p:cNvPr id="7" name="Text 3"/>
           <p:cNvSpPr/>
           <p:nvPr/>
         </p:nvSpPr>
@@ -2843,7 +2727,7 @@
       </p:sp>
       <p:sp>
         <p:nvSpPr>
-          <p:cNvPr id="8" name="Text 5"/>
+          <p:cNvPr id="8" name="Text 4"/>
           <p:cNvSpPr/>
           <p:nvPr/>
         </p:nvSpPr>
@@ -2886,14 +2770,14 @@
       </p:sp>
       <p:pic>
         <p:nvPicPr>
-          <p:cNvPr id="9" name="Image 1" descr="/Users/danwahlin/.copilot/session-state/56a7a0da-def8-48d4-b5e8-0ac3878cb8dd/files/slides-build/img/07-triggers-crop.png">    </p:cNvPr>
+          <p:cNvPr id="9" name="Image 2" descr="/Users/danwahlin/.copilot/session-state/56a7a0da-def8-48d4-b5e8-0ac3878cb8dd/files/slides-build/img/07-triggers-crop.png">    </p:cNvPr>
           <p:cNvPicPr>
             <a:picLocks noChangeAspect="1"/>
           </p:cNvPicPr>
           <p:nvPr/>
         </p:nvPicPr>
         <p:blipFill>
-          <a:blip r:embed="rId3"/>
+          <a:blip r:embed="rId4"/>
           <a:stretch>
             <a:fillRect/>
           </a:stretch>
@@ -2910,7 +2794,7 @@
       </p:pic>
       <p:sp>
         <p:nvSpPr>
-          <p:cNvPr id="10" name="Text 6"/>
+          <p:cNvPr id="10" name="Text 5"/>
           <p:cNvSpPr/>
           <p:nvPr/>
         </p:nvSpPr>
@@ -2946,7 +2830,7 @@
       </p:sp>
       <p:sp>
         <p:nvSpPr>
-          <p:cNvPr id="11" name="Text 7"/>
+          <p:cNvPr id="11" name="Text 6"/>
           <p:cNvSpPr/>
           <p:nvPr/>
         </p:nvSpPr>
@@ -2985,7 +2869,7 @@
       </p:sp>
       <p:sp>
         <p:nvSpPr>
-          <p:cNvPr id="12" name="Text 8"/>
+          <p:cNvPr id="12" name="Text 7"/>
           <p:cNvSpPr/>
           <p:nvPr/>
         </p:nvSpPr>
@@ -3021,7 +2905,7 @@
       </p:sp>
       <p:sp>
         <p:nvSpPr>
-          <p:cNvPr id="13" name="Text 9"/>
+          <p:cNvPr id="13" name="Text 8"/>
           <p:cNvSpPr/>
           <p:nvPr/>
         </p:nvSpPr>
@@ -3060,7 +2944,7 @@
       </p:sp>
       <p:sp>
         <p:nvSpPr>
-          <p:cNvPr id="14" name="Text 10"/>
+          <p:cNvPr id="14" name="Text 9"/>
           <p:cNvSpPr/>
           <p:nvPr/>
         </p:nvSpPr>
@@ -3092,7 +2976,7 @@
       </p:sp>
       <p:sp>
         <p:nvSpPr>
-          <p:cNvPr id="15" name="Text 11"/>
+          <p:cNvPr id="15" name="Text 10"/>
           <p:cNvSpPr/>
           <p:nvPr/>
         </p:nvSpPr>
@@ -3131,7 +3015,7 @@
       </p:sp>
       <p:sp>
         <p:nvSpPr>
-          <p:cNvPr id="16" name="Text 12"/>
+          <p:cNvPr id="16" name="Text 11"/>
           <p:cNvSpPr/>
           <p:nvPr/>
         </p:nvSpPr>
@@ -3173,7 +3057,7 @@
       </p:sp>
       <p:sp>
         <p:nvSpPr>
-          <p:cNvPr id="17" name="Text 13"/>
+          <p:cNvPr id="17" name="Text 12"/>
           <p:cNvSpPr/>
           <p:nvPr/>
         </p:nvSpPr>
@@ -3300,7 +3184,7 @@
       </p:sp>
       <p:sp>
         <p:nvSpPr>
-          <p:cNvPr id="18" name="Text 14"/>
+          <p:cNvPr id="18" name="Text 13"/>
           <p:cNvSpPr/>
           <p:nvPr/>
         </p:nvSpPr>
@@ -3332,7 +3216,7 @@
       </p:sp>
       <p:sp>
         <p:nvSpPr>
-          <p:cNvPr id="19" name="Text 15"/>
+          <p:cNvPr id="19" name="Text 14"/>
           <p:cNvSpPr/>
           <p:nvPr/>
         </p:nvSpPr>
@@ -3371,7 +3255,7 @@
       </p:sp>
       <p:sp>
         <p:nvSpPr>
-          <p:cNvPr id="20" name="Text 16"/>
+          <p:cNvPr id="20" name="Text 15"/>
           <p:cNvSpPr/>
           <p:nvPr/>
         </p:nvSpPr>
@@ -3413,7 +3297,7 @@
       </p:sp>
       <p:sp>
         <p:nvSpPr>
-          <p:cNvPr id="21" name="Text 17"/>
+          <p:cNvPr id="21" name="Text 16"/>
           <p:cNvSpPr/>
           <p:nvPr/>
         </p:nvSpPr>
@@ -3455,7 +3339,7 @@
       </p:sp>
       <p:sp>
         <p:nvSpPr>
-          <p:cNvPr id="22" name="Text 18"/>
+          <p:cNvPr id="22" name="Text 17"/>
           <p:cNvSpPr/>
           <p:nvPr/>
         </p:nvSpPr>
@@ -3487,7 +3371,7 @@
       </p:sp>
       <p:sp>
         <p:nvSpPr>
-          <p:cNvPr id="23" name="Text 19"/>
+          <p:cNvPr id="23" name="Text 18"/>
           <p:cNvSpPr/>
           <p:nvPr/>
         </p:nvSpPr>
@@ -3526,7 +3410,7 @@
       </p:sp>
       <p:sp>
         <p:nvSpPr>
-          <p:cNvPr id="24" name="Text 20"/>
+          <p:cNvPr id="24" name="Text 19"/>
           <p:cNvSpPr/>
           <p:nvPr/>
         </p:nvSpPr>
@@ -3568,7 +3452,7 @@
       </p:sp>
       <p:sp>
         <p:nvSpPr>
-          <p:cNvPr id="25" name="Text 21"/>
+          <p:cNvPr id="25" name="Text 20"/>
           <p:cNvSpPr/>
           <p:nvPr/>
         </p:nvSpPr>
@@ -3776,82 +3660,9 @@
           </a:p>
         </p:txBody>
       </p:sp>
-      <p:sp>
-        <p:nvSpPr>
-          <p:cNvPr id="5" name="Text 3"/>
-          <p:cNvSpPr/>
-          <p:nvPr/>
-        </p:nvSpPr>
-        <p:spPr>
-          <a:xfrm>
-            <a:off x="7340501" y="177701"/>
-            <a:ext cx="1168301" cy="279350"/>
-          </a:xfrm>
-          <a:prstGeom prst="roundRect">
-            <a:avLst>
-              <a:gd name="adj" fmla="val 22731"/>
-            </a:avLst>
-          </a:prstGeom>
-          <a:solidFill>
-            <a:srgbClr val="1A7F37"/>
-          </a:solidFill>
-          <a:ln/>
-        </p:spPr>
-        <p:txBody>
-          <a:bodyPr wrap="square" rtlCol="0" anchor="ctr"/>
-          <a:lstStyle/>
-          <a:p>
-            <a:pPr indent="0" marL="0">
-              <a:buNone/>
-            </a:pPr>
-            <a:endParaRPr lang="en-US" dirty="0"/>
-          </a:p>
-        </p:txBody>
-      </p:sp>
-      <p:sp>
-        <p:nvSpPr>
-          <p:cNvPr id="6" name="Text 4"/>
-          <p:cNvSpPr/>
-          <p:nvPr/>
-        </p:nvSpPr>
-        <p:spPr>
-          <a:xfrm>
-            <a:off x="7461041" y="231577"/>
-            <a:ext cx="927071" cy="171450"/>
-          </a:xfrm>
-          <a:prstGeom prst="rect">
-            <a:avLst/>
-          </a:prstGeom>
-          <a:noFill/>
-          <a:ln/>
-        </p:spPr>
-        <p:txBody>
-          <a:bodyPr wrap="square" lIns="0" tIns="0" rIns="0" bIns="0" rtlCol="0" anchor="t"/>
-          <a:lstStyle/>
-          <a:p>
-            <a:pPr algn="ctr" indent="0" marL="0">
-              <a:buNone/>
-            </a:pPr>
-            <a:r>
-              <a:rPr lang="en-US" sz="1150" b="1" dirty="0">
-                <a:solidFill>
-                  <a:srgbClr val="FFFFFF"/>
-                </a:solidFill>
-                <a:latin typeface="Arial" pitchFamily="34" charset="0"/>
-                <a:ea typeface="Arial" pitchFamily="34" charset="-122"/>
-                <a:cs typeface="Arial" pitchFamily="34" charset="-120"/>
-              </a:rPr>
-              <a:t>CHAPTER 07</a:t>
-            </a:r>
-            <a:endParaRPr lang="en-US" sz="1150" dirty="0"/>
-          </a:p>
-        </p:txBody>
-      </p:sp>
       <p:pic>
         <p:nvPicPr>
-          <p:cNvPr id="7" name="Image 0" descr="/Users/danwahlin/.copilot/session-state/56a7a0da-def8-48d4-b5e8-0ac3878cb8dd/files/slides-build/icons/FaGithub-1F2328.png">
-            <a:hlinkClick r:id="rId2" tooltip="https://github.com/github/copilot-app-for-beginners/tree/main/07-automations"/>
-          </p:cNvPr>
+          <p:cNvPr id="5" name="Image 0" descr="/Users/danwahlin/.copilot/session-state/56a7a0da-def8-48d4-b5e8-0ac3878cb8dd/files/slides-build/img/grad-corner.png">    </p:cNvPr>
           <p:cNvPicPr>
             <a:picLocks noChangeAspect="1"/>
           </p:cNvPicPr>
@@ -3865,6 +3676,103 @@
         </p:blipFill>
         <p:spPr>
           <a:xfrm>
+            <a:off x="6349901" y="0"/>
+            <a:ext cx="2793950" cy="1308050"/>
+          </a:xfrm>
+          <a:prstGeom prst="rect">
+            <a:avLst/>
+          </a:prstGeom>
+        </p:spPr>
+      </p:pic>
+      <p:sp>
+        <p:nvSpPr>
+          <p:cNvPr id="6" name="Text 3"/>
+          <p:cNvSpPr/>
+          <p:nvPr/>
+        </p:nvSpPr>
+        <p:spPr>
+          <a:xfrm>
+            <a:off x="7340501" y="177701"/>
+            <a:ext cx="1168301" cy="279350"/>
+          </a:xfrm>
+          <a:prstGeom prst="roundRect">
+            <a:avLst>
+              <a:gd name="adj" fmla="val 22731"/>
+            </a:avLst>
+          </a:prstGeom>
+          <a:solidFill>
+            <a:srgbClr val="1A7F37"/>
+          </a:solidFill>
+          <a:ln/>
+        </p:spPr>
+        <p:txBody>
+          <a:bodyPr wrap="square" rtlCol="0" anchor="ctr"/>
+          <a:lstStyle/>
+          <a:p>
+            <a:pPr indent="0" marL="0">
+              <a:buNone/>
+            </a:pPr>
+            <a:endParaRPr lang="en-US" dirty="0"/>
+          </a:p>
+        </p:txBody>
+      </p:sp>
+      <p:sp>
+        <p:nvSpPr>
+          <p:cNvPr id="7" name="Text 4"/>
+          <p:cNvSpPr/>
+          <p:nvPr/>
+        </p:nvSpPr>
+        <p:spPr>
+          <a:xfrm>
+            <a:off x="7461041" y="231577"/>
+            <a:ext cx="927071" cy="171450"/>
+          </a:xfrm>
+          <a:prstGeom prst="rect">
+            <a:avLst/>
+          </a:prstGeom>
+          <a:noFill/>
+          <a:ln/>
+        </p:spPr>
+        <p:txBody>
+          <a:bodyPr wrap="square" lIns="0" tIns="0" rIns="0" bIns="0" rtlCol="0" anchor="t"/>
+          <a:lstStyle/>
+          <a:p>
+            <a:pPr algn="ctr" indent="0" marL="0">
+              <a:buNone/>
+            </a:pPr>
+            <a:r>
+              <a:rPr lang="en-US" sz="1150" b="1" dirty="0">
+                <a:solidFill>
+                  <a:srgbClr val="FFFFFF"/>
+                </a:solidFill>
+                <a:latin typeface="Arial" pitchFamily="34" charset="0"/>
+                <a:ea typeface="Arial" pitchFamily="34" charset="-122"/>
+                <a:cs typeface="Arial" pitchFamily="34" charset="-120"/>
+              </a:rPr>
+              <a:t>CHAPTER 07</a:t>
+            </a:r>
+            <a:endParaRPr lang="en-US" sz="1150" dirty="0"/>
+          </a:p>
+        </p:txBody>
+      </p:sp>
+      <p:pic>
+        <p:nvPicPr>
+          <p:cNvPr id="8" name="Image 1" descr="/Users/danwahlin/.copilot/session-state/56a7a0da-def8-48d4-b5e8-0ac3878cb8dd/files/slides-build/icons/FaGithub-1F2328.png">
+            <a:hlinkClick r:id="rId3" tooltip="https://github.com/github/copilot-app-for-beginners/tree/main/07-automations"/>
+          </p:cNvPr>
+          <p:cNvPicPr>
+            <a:picLocks noChangeAspect="1"/>
+          </p:cNvPicPr>
+          <p:nvPr/>
+        </p:nvPicPr>
+        <p:blipFill>
+          <a:blip r:embed="rId2"/>
+          <a:stretch>
+            <a:fillRect/>
+          </a:stretch>
+        </p:blipFill>
+        <p:spPr>
+          <a:xfrm>
             <a:off x="8610600" y="165050"/>
             <a:ext cx="304800" cy="304800"/>
           </a:xfrm>
@@ -3875,7 +3783,7 @@
       </p:pic>
       <p:sp>
         <p:nvSpPr>
-          <p:cNvPr id="8" name="Text 5"/>
+          <p:cNvPr id="9" name="Text 5"/>
           <p:cNvSpPr/>
           <p:nvPr/>
         </p:nvSpPr>
@@ -3914,7 +3822,7 @@
       </p:sp>
       <p:sp>
         <p:nvSpPr>
-          <p:cNvPr id="9" name="Text 6"/>
+          <p:cNvPr id="10" name="Text 6"/>
           <p:cNvSpPr/>
           <p:nvPr/>
         </p:nvSpPr>
@@ -3959,7 +3867,7 @@
       </p:sp>
       <p:sp>
         <p:nvSpPr>
-          <p:cNvPr id="10" name="Text 7"/>
+          <p:cNvPr id="11" name="Text 7"/>
           <p:cNvSpPr/>
           <p:nvPr/>
         </p:nvSpPr>
@@ -3991,7 +3899,7 @@
       </p:sp>
       <p:sp>
         <p:nvSpPr>
-          <p:cNvPr id="11" name="Text 8"/>
+          <p:cNvPr id="12" name="Text 8"/>
           <p:cNvSpPr/>
           <p:nvPr/>
         </p:nvSpPr>
@@ -4063,112 +3971,9 @@
           <a:chExt cx="0" cy="0"/>
         </a:xfrm>
       </p:grpSpPr>
-      <p:sp>
-        <p:nvSpPr>
-          <p:cNvPr id="2" name="Text 0"/>
-          <p:cNvSpPr/>
-          <p:nvPr/>
-        </p:nvSpPr>
-        <p:spPr>
-          <a:xfrm>
-            <a:off x="0" y="0"/>
-            <a:ext cx="9144000" cy="76200"/>
-          </a:xfrm>
-          <a:prstGeom prst="rect">
-            <a:avLst/>
-          </a:prstGeom>
-          <a:solidFill>
-            <a:srgbClr val="1A7F37"/>
-          </a:solidFill>
-          <a:ln/>
-        </p:spPr>
-        <p:txBody>
-          <a:bodyPr wrap="square" rtlCol="0" anchor="ctr"/>
-          <a:lstStyle/>
-          <a:p>
-            <a:pPr indent="0" marL="0">
-              <a:buNone/>
-            </a:pPr>
-            <a:endParaRPr lang="en-US" dirty="0"/>
-          </a:p>
-        </p:txBody>
-      </p:sp>
-      <p:sp>
-        <p:nvSpPr>
-          <p:cNvPr id="3" name="Text 1"/>
-          <p:cNvSpPr/>
-          <p:nvPr/>
-        </p:nvSpPr>
-        <p:spPr>
-          <a:xfrm>
-            <a:off x="7340501" y="177701"/>
-            <a:ext cx="1168301" cy="279350"/>
-          </a:xfrm>
-          <a:prstGeom prst="roundRect">
-            <a:avLst>
-              <a:gd name="adj" fmla="val 22731"/>
-            </a:avLst>
-          </a:prstGeom>
-          <a:solidFill>
-            <a:srgbClr val="1A7F37"/>
-          </a:solidFill>
-          <a:ln/>
-        </p:spPr>
-        <p:txBody>
-          <a:bodyPr wrap="square" rtlCol="0" anchor="ctr"/>
-          <a:lstStyle/>
-          <a:p>
-            <a:pPr indent="0" marL="0">
-              <a:buNone/>
-            </a:pPr>
-            <a:endParaRPr lang="en-US" dirty="0"/>
-          </a:p>
-        </p:txBody>
-      </p:sp>
-      <p:sp>
-        <p:nvSpPr>
-          <p:cNvPr id="4" name="Text 2"/>
-          <p:cNvSpPr/>
-          <p:nvPr/>
-        </p:nvSpPr>
-        <p:spPr>
-          <a:xfrm>
-            <a:off x="7461041" y="231577"/>
-            <a:ext cx="927071" cy="171450"/>
-          </a:xfrm>
-          <a:prstGeom prst="rect">
-            <a:avLst/>
-          </a:prstGeom>
-          <a:noFill/>
-          <a:ln/>
-        </p:spPr>
-        <p:txBody>
-          <a:bodyPr wrap="square" lIns="0" tIns="0" rIns="0" bIns="0" rtlCol="0" anchor="t"/>
-          <a:lstStyle/>
-          <a:p>
-            <a:pPr algn="ctr" indent="0" marL="0">
-              <a:buNone/>
-            </a:pPr>
-            <a:r>
-              <a:rPr lang="en-US" sz="1150" b="1" dirty="0">
-                <a:solidFill>
-                  <a:srgbClr val="FFFFFF"/>
-                </a:solidFill>
-                <a:latin typeface="Arial" pitchFamily="34" charset="0"/>
-                <a:ea typeface="Arial" pitchFamily="34" charset="-122"/>
-                <a:cs typeface="Arial" pitchFamily="34" charset="-120"/>
-              </a:rPr>
-              <a:t>CHAPTER 07</a:t>
-            </a:r>
-            <a:endParaRPr lang="en-US" sz="1150" dirty="0"/>
-          </a:p>
-        </p:txBody>
-      </p:sp>
       <p:pic>
         <p:nvPicPr>
-          <p:cNvPr id="5" name="Image 0" descr="/Users/danwahlin/.copilot/session-state/56a7a0da-def8-48d4-b5e8-0ac3878cb8dd/files/slides-build/icons/FaGithub-1F2328.png">
-            <a:hlinkClick r:id="rId2" tooltip="https://github.com/github/copilot-app-for-beginners/tree/main/07-automations"/>
-          </p:cNvPr>
+          <p:cNvPr id="2" name="Image 0" descr="/Users/danwahlin/.copilot/session-state/56a7a0da-def8-48d4-b5e8-0ac3878cb8dd/files/slides-build/img/grad-corner.png">    </p:cNvPr>
           <p:cNvPicPr>
             <a:picLocks noChangeAspect="1"/>
           </p:cNvPicPr>
@@ -4182,6 +3987,103 @@
         </p:blipFill>
         <p:spPr>
           <a:xfrm>
+            <a:off x="6349901" y="0"/>
+            <a:ext cx="2793950" cy="1308050"/>
+          </a:xfrm>
+          <a:prstGeom prst="rect">
+            <a:avLst/>
+          </a:prstGeom>
+        </p:spPr>
+      </p:pic>
+      <p:sp>
+        <p:nvSpPr>
+          <p:cNvPr id="3" name="Text 0"/>
+          <p:cNvSpPr/>
+          <p:nvPr/>
+        </p:nvSpPr>
+        <p:spPr>
+          <a:xfrm>
+            <a:off x="7340501" y="177701"/>
+            <a:ext cx="1168301" cy="279350"/>
+          </a:xfrm>
+          <a:prstGeom prst="roundRect">
+            <a:avLst>
+              <a:gd name="adj" fmla="val 22731"/>
+            </a:avLst>
+          </a:prstGeom>
+          <a:solidFill>
+            <a:srgbClr val="1A7F37"/>
+          </a:solidFill>
+          <a:ln/>
+        </p:spPr>
+        <p:txBody>
+          <a:bodyPr wrap="square" rtlCol="0" anchor="ctr"/>
+          <a:lstStyle/>
+          <a:p>
+            <a:pPr indent="0" marL="0">
+              <a:buNone/>
+            </a:pPr>
+            <a:endParaRPr lang="en-US" dirty="0"/>
+          </a:p>
+        </p:txBody>
+      </p:sp>
+      <p:sp>
+        <p:nvSpPr>
+          <p:cNvPr id="4" name="Text 1"/>
+          <p:cNvSpPr/>
+          <p:nvPr/>
+        </p:nvSpPr>
+        <p:spPr>
+          <a:xfrm>
+            <a:off x="7461041" y="231577"/>
+            <a:ext cx="927071" cy="171450"/>
+          </a:xfrm>
+          <a:prstGeom prst="rect">
+            <a:avLst/>
+          </a:prstGeom>
+          <a:noFill/>
+          <a:ln/>
+        </p:spPr>
+        <p:txBody>
+          <a:bodyPr wrap="square" lIns="0" tIns="0" rIns="0" bIns="0" rtlCol="0" anchor="t"/>
+          <a:lstStyle/>
+          <a:p>
+            <a:pPr algn="ctr" indent="0" marL="0">
+              <a:buNone/>
+            </a:pPr>
+            <a:r>
+              <a:rPr lang="en-US" sz="1150" b="1" dirty="0">
+                <a:solidFill>
+                  <a:srgbClr val="FFFFFF"/>
+                </a:solidFill>
+                <a:latin typeface="Arial" pitchFamily="34" charset="0"/>
+                <a:ea typeface="Arial" pitchFamily="34" charset="-122"/>
+                <a:cs typeface="Arial" pitchFamily="34" charset="-120"/>
+              </a:rPr>
+              <a:t>CHAPTER 07</a:t>
+            </a:r>
+            <a:endParaRPr lang="en-US" sz="1150" dirty="0"/>
+          </a:p>
+        </p:txBody>
+      </p:sp>
+      <p:pic>
+        <p:nvPicPr>
+          <p:cNvPr id="5" name="Image 1" descr="/Users/danwahlin/.copilot/session-state/56a7a0da-def8-48d4-b5e8-0ac3878cb8dd/files/slides-build/icons/FaGithub-1F2328.png">
+            <a:hlinkClick r:id="rId3" tooltip="https://github.com/github/copilot-app-for-beginners/tree/main/07-automations"/>
+          </p:cNvPr>
+          <p:cNvPicPr>
+            <a:picLocks noChangeAspect="1"/>
+          </p:cNvPicPr>
+          <p:nvPr/>
+        </p:nvPicPr>
+        <p:blipFill>
+          <a:blip r:embed="rId2"/>
+          <a:stretch>
+            <a:fillRect/>
+          </a:stretch>
+        </p:blipFill>
+        <p:spPr>
+          <a:xfrm>
             <a:off x="8610600" y="165050"/>
             <a:ext cx="304800" cy="304800"/>
           </a:xfrm>
@@ -4192,7 +4094,7 @@
       </p:pic>
       <p:sp>
         <p:nvSpPr>
-          <p:cNvPr id="6" name="Text 3"/>
+          <p:cNvPr id="6" name="Text 2"/>
           <p:cNvSpPr/>
           <p:nvPr/>
         </p:nvSpPr>
@@ -4231,7 +4133,7 @@
       </p:sp>
       <p:sp>
         <p:nvSpPr>
-          <p:cNvPr id="7" name="Text 4"/>
+          <p:cNvPr id="7" name="Text 3"/>
           <p:cNvSpPr/>
           <p:nvPr/>
         </p:nvSpPr>
@@ -4276,7 +4178,7 @@
       </p:sp>
       <p:sp>
         <p:nvSpPr>
-          <p:cNvPr id="8" name="Text 5"/>
+          <p:cNvPr id="8" name="Text 4"/>
           <p:cNvSpPr/>
           <p:nvPr/>
         </p:nvSpPr>
@@ -4321,7 +4223,7 @@
       </p:sp>
       <p:sp>
         <p:nvSpPr>
-          <p:cNvPr id="9" name="Text 6"/>
+          <p:cNvPr id="9" name="Text 5"/>
           <p:cNvSpPr/>
           <p:nvPr/>
         </p:nvSpPr>
@@ -4357,7 +4259,7 @@
       </p:sp>
       <p:sp>
         <p:nvSpPr>
-          <p:cNvPr id="10" name="Shape 7"/>
+          <p:cNvPr id="10" name="Shape 6"/>
           <p:cNvSpPr/>
           <p:nvPr/>
         </p:nvSpPr>
@@ -4380,7 +4282,7 @@
       </p:sp>
       <p:sp>
         <p:nvSpPr>
-          <p:cNvPr id="11" name="Text 8"/>
+          <p:cNvPr id="11" name="Text 7"/>
           <p:cNvSpPr/>
           <p:nvPr/>
         </p:nvSpPr>
@@ -4412,7 +4314,7 @@
       </p:sp>
       <p:sp>
         <p:nvSpPr>
-          <p:cNvPr id="12" name="Text 9"/>
+          <p:cNvPr id="12" name="Text 8"/>
           <p:cNvSpPr/>
           <p:nvPr/>
         </p:nvSpPr>
@@ -4451,7 +4353,7 @@
       </p:sp>
       <p:sp>
         <p:nvSpPr>
-          <p:cNvPr id="13" name="Text 10"/>
+          <p:cNvPr id="13" name="Text 9"/>
           <p:cNvSpPr/>
           <p:nvPr/>
         </p:nvSpPr>
@@ -4493,7 +4395,7 @@
       </p:sp>
       <p:sp>
         <p:nvSpPr>
-          <p:cNvPr id="14" name="Text 11"/>
+          <p:cNvPr id="14" name="Text 10"/>
           <p:cNvSpPr/>
           <p:nvPr/>
         </p:nvSpPr>
@@ -4535,7 +4437,7 @@
       </p:sp>
       <p:sp>
         <p:nvSpPr>
-          <p:cNvPr id="15" name="Shape 12"/>
+          <p:cNvPr id="15" name="Shape 11"/>
           <p:cNvSpPr/>
           <p:nvPr/>
         </p:nvSpPr>
@@ -4558,7 +4460,7 @@
       </p:sp>
       <p:sp>
         <p:nvSpPr>
-          <p:cNvPr id="16" name="Text 13"/>
+          <p:cNvPr id="16" name="Text 12"/>
           <p:cNvSpPr/>
           <p:nvPr/>
         </p:nvSpPr>
@@ -4590,7 +4492,7 @@
       </p:sp>
       <p:sp>
         <p:nvSpPr>
-          <p:cNvPr id="17" name="Text 14"/>
+          <p:cNvPr id="17" name="Text 13"/>
           <p:cNvSpPr/>
           <p:nvPr/>
         </p:nvSpPr>
@@ -4629,7 +4531,7 @@
       </p:sp>
       <p:sp>
         <p:nvSpPr>
-          <p:cNvPr id="18" name="Text 15"/>
+          <p:cNvPr id="18" name="Text 14"/>
           <p:cNvSpPr/>
           <p:nvPr/>
         </p:nvSpPr>
@@ -4671,7 +4573,7 @@
       </p:sp>
       <p:sp>
         <p:nvSpPr>
-          <p:cNvPr id="19" name="Text 16"/>
+          <p:cNvPr id="19" name="Text 15"/>
           <p:cNvSpPr/>
           <p:nvPr/>
         </p:nvSpPr>
@@ -4713,7 +4615,7 @@
       </p:sp>
       <p:sp>
         <p:nvSpPr>
-          <p:cNvPr id="20" name="Shape 17"/>
+          <p:cNvPr id="20" name="Shape 16"/>
           <p:cNvSpPr/>
           <p:nvPr/>
         </p:nvSpPr>
@@ -4736,7 +4638,7 @@
       </p:sp>
       <p:sp>
         <p:nvSpPr>
-          <p:cNvPr id="21" name="Text 18"/>
+          <p:cNvPr id="21" name="Text 17"/>
           <p:cNvSpPr/>
           <p:nvPr/>
         </p:nvSpPr>
@@ -4768,7 +4670,7 @@
       </p:sp>
       <p:sp>
         <p:nvSpPr>
-          <p:cNvPr id="22" name="Text 19"/>
+          <p:cNvPr id="22" name="Text 18"/>
           <p:cNvSpPr/>
           <p:nvPr/>
         </p:nvSpPr>
@@ -4807,7 +4709,7 @@
       </p:sp>
       <p:sp>
         <p:nvSpPr>
-          <p:cNvPr id="23" name="Text 20"/>
+          <p:cNvPr id="23" name="Text 19"/>
           <p:cNvSpPr/>
           <p:nvPr/>
         </p:nvSpPr>
@@ -4849,7 +4751,7 @@
       </p:sp>
       <p:sp>
         <p:nvSpPr>
-          <p:cNvPr id="24" name="Text 21"/>
+          <p:cNvPr id="24" name="Text 20"/>
           <p:cNvSpPr/>
           <p:nvPr/>
         </p:nvSpPr>
@@ -4891,7 +4793,7 @@
       </p:sp>
       <p:sp>
         <p:nvSpPr>
-          <p:cNvPr id="25" name="Text 22"/>
+          <p:cNvPr id="25" name="Text 21"/>
           <p:cNvSpPr/>
           <p:nvPr/>
         </p:nvSpPr>
@@ -4923,7 +4825,7 @@
       </p:sp>
       <p:sp>
         <p:nvSpPr>
-          <p:cNvPr id="26" name="Text 23"/>
+          <p:cNvPr id="26" name="Text 22"/>
           <p:cNvSpPr/>
           <p:nvPr/>
         </p:nvSpPr>
@@ -4962,7 +4864,7 @@
       </p:sp>
       <p:sp>
         <p:nvSpPr>
-          <p:cNvPr id="27" name="Text 24"/>
+          <p:cNvPr id="27" name="Text 23"/>
           <p:cNvSpPr/>
           <p:nvPr/>
         </p:nvSpPr>
@@ -5004,7 +4906,7 @@
       </p:sp>
       <p:sp>
         <p:nvSpPr>
-          <p:cNvPr id="28" name="Text 25"/>
+          <p:cNvPr id="28" name="Text 24"/>
           <p:cNvSpPr/>
           <p:nvPr/>
         </p:nvSpPr>
@@ -5046,7 +4948,7 @@
       </p:sp>
       <p:sp>
         <p:nvSpPr>
-          <p:cNvPr id="29" name="Text 26"/>
+          <p:cNvPr id="29" name="Text 25"/>
           <p:cNvSpPr/>
           <p:nvPr/>
         </p:nvSpPr>
@@ -5082,14 +4984,14 @@
       </p:sp>
       <p:pic>
         <p:nvPicPr>
-          <p:cNvPr id="30" name="Image 1" descr="/Users/danwahlin/.copilot/session-state/56a7a0da-def8-48d4-b5e8-0ac3878cb8dd/files/slides-build/icons/GoAlert-CF222E.png">    </p:cNvPr>
+          <p:cNvPr id="30" name="Image 2" descr="/Users/danwahlin/.copilot/session-state/56a7a0da-def8-48d4-b5e8-0ac3878cb8dd/files/slides-build/icons/GoAlert-CF222E.png">    </p:cNvPr>
           <p:cNvPicPr>
             <a:picLocks noChangeAspect="1"/>
           </p:cNvPicPr>
           <p:nvPr/>
         </p:nvPicPr>
         <p:blipFill>
-          <a:blip r:embed="rId3"/>
+          <a:blip r:embed="rId4"/>
           <a:stretch>
             <a:fillRect/>
           </a:stretch>
@@ -5106,7 +5008,7 @@
       </p:pic>
       <p:sp>
         <p:nvSpPr>
-          <p:cNvPr id="31" name="Text 27"/>
+          <p:cNvPr id="31" name="Text 26"/>
           <p:cNvSpPr/>
           <p:nvPr/>
         </p:nvSpPr>
@@ -5212,112 +5114,9 @@
           <a:chExt cx="0" cy="0"/>
         </a:xfrm>
       </p:grpSpPr>
-      <p:sp>
-        <p:nvSpPr>
-          <p:cNvPr id="2" name="Text 0"/>
-          <p:cNvSpPr/>
-          <p:nvPr/>
-        </p:nvSpPr>
-        <p:spPr>
-          <a:xfrm>
-            <a:off x="0" y="0"/>
-            <a:ext cx="9144000" cy="76200"/>
-          </a:xfrm>
-          <a:prstGeom prst="rect">
-            <a:avLst/>
-          </a:prstGeom>
-          <a:solidFill>
-            <a:srgbClr val="1A7F37"/>
-          </a:solidFill>
-          <a:ln/>
-        </p:spPr>
-        <p:txBody>
-          <a:bodyPr wrap="square" rtlCol="0" anchor="ctr"/>
-          <a:lstStyle/>
-          <a:p>
-            <a:pPr indent="0" marL="0">
-              <a:buNone/>
-            </a:pPr>
-            <a:endParaRPr lang="en-US" dirty="0"/>
-          </a:p>
-        </p:txBody>
-      </p:sp>
-      <p:sp>
-        <p:nvSpPr>
-          <p:cNvPr id="3" name="Text 1"/>
-          <p:cNvSpPr/>
-          <p:nvPr/>
-        </p:nvSpPr>
-        <p:spPr>
-          <a:xfrm>
-            <a:off x="7340501" y="177701"/>
-            <a:ext cx="1168301" cy="279350"/>
-          </a:xfrm>
-          <a:prstGeom prst="roundRect">
-            <a:avLst>
-              <a:gd name="adj" fmla="val 22731"/>
-            </a:avLst>
-          </a:prstGeom>
-          <a:solidFill>
-            <a:srgbClr val="1A7F37"/>
-          </a:solidFill>
-          <a:ln/>
-        </p:spPr>
-        <p:txBody>
-          <a:bodyPr wrap="square" rtlCol="0" anchor="ctr"/>
-          <a:lstStyle/>
-          <a:p>
-            <a:pPr indent="0" marL="0">
-              <a:buNone/>
-            </a:pPr>
-            <a:endParaRPr lang="en-US" dirty="0"/>
-          </a:p>
-        </p:txBody>
-      </p:sp>
-      <p:sp>
-        <p:nvSpPr>
-          <p:cNvPr id="4" name="Text 2"/>
-          <p:cNvSpPr/>
-          <p:nvPr/>
-        </p:nvSpPr>
-        <p:spPr>
-          <a:xfrm>
-            <a:off x="7461041" y="231577"/>
-            <a:ext cx="927071" cy="171450"/>
-          </a:xfrm>
-          <a:prstGeom prst="rect">
-            <a:avLst/>
-          </a:prstGeom>
-          <a:noFill/>
-          <a:ln/>
-        </p:spPr>
-        <p:txBody>
-          <a:bodyPr wrap="square" lIns="0" tIns="0" rIns="0" bIns="0" rtlCol="0" anchor="t"/>
-          <a:lstStyle/>
-          <a:p>
-            <a:pPr algn="ctr" indent="0" marL="0">
-              <a:buNone/>
-            </a:pPr>
-            <a:r>
-              <a:rPr lang="en-US" sz="1150" b="1" dirty="0">
-                <a:solidFill>
-                  <a:srgbClr val="FFFFFF"/>
-                </a:solidFill>
-                <a:latin typeface="Arial" pitchFamily="34" charset="0"/>
-                <a:ea typeface="Arial" pitchFamily="34" charset="-122"/>
-                <a:cs typeface="Arial" pitchFamily="34" charset="-120"/>
-              </a:rPr>
-              <a:t>CHAPTER 07</a:t>
-            </a:r>
-            <a:endParaRPr lang="en-US" sz="1150" dirty="0"/>
-          </a:p>
-        </p:txBody>
-      </p:sp>
       <p:pic>
         <p:nvPicPr>
-          <p:cNvPr id="5" name="Image 0" descr="/Users/danwahlin/.copilot/session-state/56a7a0da-def8-48d4-b5e8-0ac3878cb8dd/files/slides-build/icons/FaGithub-1F2328.png">
-            <a:hlinkClick r:id="rId2" tooltip="https://github.com/github/copilot-app-for-beginners/tree/main/07-automations"/>
-          </p:cNvPr>
+          <p:cNvPr id="2" name="Image 0" descr="/Users/danwahlin/.copilot/session-state/56a7a0da-def8-48d4-b5e8-0ac3878cb8dd/files/slides-build/img/grad-corner.png">    </p:cNvPr>
           <p:cNvPicPr>
             <a:picLocks noChangeAspect="1"/>
           </p:cNvPicPr>
@@ -5331,6 +5130,103 @@
         </p:blipFill>
         <p:spPr>
           <a:xfrm>
+            <a:off x="6349901" y="0"/>
+            <a:ext cx="2793950" cy="1308050"/>
+          </a:xfrm>
+          <a:prstGeom prst="rect">
+            <a:avLst/>
+          </a:prstGeom>
+        </p:spPr>
+      </p:pic>
+      <p:sp>
+        <p:nvSpPr>
+          <p:cNvPr id="3" name="Text 0"/>
+          <p:cNvSpPr/>
+          <p:nvPr/>
+        </p:nvSpPr>
+        <p:spPr>
+          <a:xfrm>
+            <a:off x="7340501" y="177701"/>
+            <a:ext cx="1168301" cy="279350"/>
+          </a:xfrm>
+          <a:prstGeom prst="roundRect">
+            <a:avLst>
+              <a:gd name="adj" fmla="val 22731"/>
+            </a:avLst>
+          </a:prstGeom>
+          <a:solidFill>
+            <a:srgbClr val="1A7F37"/>
+          </a:solidFill>
+          <a:ln/>
+        </p:spPr>
+        <p:txBody>
+          <a:bodyPr wrap="square" rtlCol="0" anchor="ctr"/>
+          <a:lstStyle/>
+          <a:p>
+            <a:pPr indent="0" marL="0">
+              <a:buNone/>
+            </a:pPr>
+            <a:endParaRPr lang="en-US" dirty="0"/>
+          </a:p>
+        </p:txBody>
+      </p:sp>
+      <p:sp>
+        <p:nvSpPr>
+          <p:cNvPr id="4" name="Text 1"/>
+          <p:cNvSpPr/>
+          <p:nvPr/>
+        </p:nvSpPr>
+        <p:spPr>
+          <a:xfrm>
+            <a:off x="7461041" y="231577"/>
+            <a:ext cx="927071" cy="171450"/>
+          </a:xfrm>
+          <a:prstGeom prst="rect">
+            <a:avLst/>
+          </a:prstGeom>
+          <a:noFill/>
+          <a:ln/>
+        </p:spPr>
+        <p:txBody>
+          <a:bodyPr wrap="square" lIns="0" tIns="0" rIns="0" bIns="0" rtlCol="0" anchor="t"/>
+          <a:lstStyle/>
+          <a:p>
+            <a:pPr algn="ctr" indent="0" marL="0">
+              <a:buNone/>
+            </a:pPr>
+            <a:r>
+              <a:rPr lang="en-US" sz="1150" b="1" dirty="0">
+                <a:solidFill>
+                  <a:srgbClr val="FFFFFF"/>
+                </a:solidFill>
+                <a:latin typeface="Arial" pitchFamily="34" charset="0"/>
+                <a:ea typeface="Arial" pitchFamily="34" charset="-122"/>
+                <a:cs typeface="Arial" pitchFamily="34" charset="-120"/>
+              </a:rPr>
+              <a:t>CHAPTER 07</a:t>
+            </a:r>
+            <a:endParaRPr lang="en-US" sz="1150" dirty="0"/>
+          </a:p>
+        </p:txBody>
+      </p:sp>
+      <p:pic>
+        <p:nvPicPr>
+          <p:cNvPr id="5" name="Image 1" descr="/Users/danwahlin/.copilot/session-state/56a7a0da-def8-48d4-b5e8-0ac3878cb8dd/files/slides-build/icons/FaGithub-1F2328.png">
+            <a:hlinkClick r:id="rId3" tooltip="https://github.com/github/copilot-app-for-beginners/tree/main/07-automations"/>
+          </p:cNvPr>
+          <p:cNvPicPr>
+            <a:picLocks noChangeAspect="1"/>
+          </p:cNvPicPr>
+          <p:nvPr/>
+        </p:nvPicPr>
+        <p:blipFill>
+          <a:blip r:embed="rId2"/>
+          <a:stretch>
+            <a:fillRect/>
+          </a:stretch>
+        </p:blipFill>
+        <p:spPr>
+          <a:xfrm>
             <a:off x="8610600" y="165050"/>
             <a:ext cx="304800" cy="304800"/>
           </a:xfrm>
@@ -5341,7 +5237,7 @@
       </p:pic>
       <p:sp>
         <p:nvSpPr>
-          <p:cNvPr id="6" name="Text 3"/>
+          <p:cNvPr id="6" name="Text 2"/>
           <p:cNvSpPr/>
           <p:nvPr/>
         </p:nvSpPr>
@@ -5380,7 +5276,7 @@
       </p:sp>
       <p:sp>
         <p:nvSpPr>
-          <p:cNvPr id="7" name="Text 4"/>
+          <p:cNvPr id="7" name="Text 3"/>
           <p:cNvSpPr/>
           <p:nvPr/>
         </p:nvSpPr>
@@ -5425,7 +5321,7 @@
       </p:sp>
       <p:sp>
         <p:nvSpPr>
-          <p:cNvPr id="8" name="Text 5"/>
+          <p:cNvPr id="8" name="Text 4"/>
           <p:cNvSpPr/>
           <p:nvPr/>
         </p:nvSpPr>
@@ -5470,7 +5366,7 @@
       </p:sp>
       <p:sp>
         <p:nvSpPr>
-          <p:cNvPr id="9" name="Text 6"/>
+          <p:cNvPr id="9" name="Text 5"/>
           <p:cNvSpPr/>
           <p:nvPr/>
         </p:nvSpPr>
@@ -5513,14 +5409,14 @@
       </p:sp>
       <p:pic>
         <p:nvPicPr>
-          <p:cNvPr id="10" name="Image 1" descr="/Users/danwahlin/.copilot/session-state/56a7a0da-def8-48d4-b5e8-0ac3878cb8dd/files/slides-build/img/07-local-vs-cloud-automations.jpg">    </p:cNvPr>
+          <p:cNvPr id="10" name="Image 2" descr="/Users/danwahlin/.copilot/session-state/56a7a0da-def8-48d4-b5e8-0ac3878cb8dd/files/slides-build/img/07-local-vs-cloud-automations.jpg">    </p:cNvPr>
           <p:cNvPicPr>
             <a:picLocks noChangeAspect="1"/>
           </p:cNvPicPr>
           <p:nvPr/>
         </p:nvPicPr>
         <p:blipFill>
-          <a:blip r:embed="rId3"/>
+          <a:blip r:embed="rId4"/>
           <a:stretch>
             <a:fillRect/>
           </a:stretch>
@@ -5537,7 +5433,7 @@
       </p:pic>
       <p:sp>
         <p:nvSpPr>
-          <p:cNvPr id="11" name="Text 7"/>
+          <p:cNvPr id="11" name="Text 6"/>
           <p:cNvSpPr/>
           <p:nvPr/>
         </p:nvSpPr>
@@ -5573,7 +5469,7 @@
       </p:sp>
       <p:sp>
         <p:nvSpPr>
-          <p:cNvPr id="12" name="Text 8"/>
+          <p:cNvPr id="12" name="Text 7"/>
           <p:cNvSpPr/>
           <p:nvPr/>
         </p:nvSpPr>
@@ -5605,14 +5501,14 @@
       </p:sp>
       <p:pic>
         <p:nvPicPr>
-          <p:cNvPr id="13" name="Image 2" descr="/Users/danwahlin/.copilot/session-state/56a7a0da-def8-48d4-b5e8-0ac3878cb8dd/files/slides-build/icons/GoShieldCheck-BC4C00.png">    </p:cNvPr>
+          <p:cNvPr id="13" name="Image 3" descr="/Users/danwahlin/.copilot/session-state/56a7a0da-def8-48d4-b5e8-0ac3878cb8dd/files/slides-build/icons/GoShieldCheck-BC4C00.png">    </p:cNvPr>
           <p:cNvPicPr>
             <a:picLocks noChangeAspect="1"/>
           </p:cNvPicPr>
           <p:nvPr/>
         </p:nvPicPr>
         <p:blipFill>
-          <a:blip r:embed="rId4"/>
+          <a:blip r:embed="rId5"/>
           <a:stretch>
             <a:fillRect/>
           </a:stretch>
@@ -5629,7 +5525,7 @@
       </p:pic>
       <p:sp>
         <p:nvSpPr>
-          <p:cNvPr id="14" name="Text 9"/>
+          <p:cNvPr id="14" name="Text 8"/>
           <p:cNvSpPr/>
           <p:nvPr/>
         </p:nvSpPr>
@@ -5671,7 +5567,7 @@
       </p:sp>
       <p:sp>
         <p:nvSpPr>
-          <p:cNvPr id="15" name="Text 10"/>
+          <p:cNvPr id="15" name="Text 9"/>
           <p:cNvSpPr/>
           <p:nvPr/>
         </p:nvSpPr>
@@ -5703,7 +5599,7 @@
       </p:sp>
       <p:sp>
         <p:nvSpPr>
-          <p:cNvPr id="16" name="Text 11"/>
+          <p:cNvPr id="16" name="Text 10"/>
           <p:cNvSpPr/>
           <p:nvPr/>
         </p:nvSpPr>
@@ -5745,7 +5641,7 @@
       </p:sp>
       <p:sp>
         <p:nvSpPr>
-          <p:cNvPr id="17" name="Text 12"/>
+          <p:cNvPr id="17" name="Text 11"/>
           <p:cNvSpPr/>
           <p:nvPr/>
         </p:nvSpPr>
@@ -5777,7 +5673,7 @@
       </p:sp>
       <p:sp>
         <p:nvSpPr>
-          <p:cNvPr id="18" name="Text 13"/>
+          <p:cNvPr id="18" name="Text 12"/>
           <p:cNvSpPr/>
           <p:nvPr/>
         </p:nvSpPr>
@@ -5819,7 +5715,7 @@
       </p:sp>
       <p:sp>
         <p:nvSpPr>
-          <p:cNvPr id="19" name="Text 14"/>
+          <p:cNvPr id="19" name="Text 13"/>
           <p:cNvSpPr/>
           <p:nvPr/>
         </p:nvSpPr>
@@ -5851,7 +5747,7 @@
       </p:sp>
       <p:sp>
         <p:nvSpPr>
-          <p:cNvPr id="20" name="Text 15"/>
+          <p:cNvPr id="20" name="Text 14"/>
           <p:cNvSpPr/>
           <p:nvPr/>
         </p:nvSpPr>
@@ -5893,7 +5789,7 @@
       </p:sp>
       <p:sp>
         <p:nvSpPr>
-          <p:cNvPr id="21" name="Text 16"/>
+          <p:cNvPr id="21" name="Text 15"/>
           <p:cNvSpPr/>
           <p:nvPr/>
         </p:nvSpPr>
@@ -5929,14 +5825,14 @@
       </p:sp>
       <p:pic>
         <p:nvPicPr>
-          <p:cNvPr id="22" name="Image 3" descr="/Users/danwahlin/.copilot/session-state/56a7a0da-def8-48d4-b5e8-0ac3878cb8dd/files/slides-build/icons/GoLock-1A7F37.png">    </p:cNvPr>
+          <p:cNvPr id="22" name="Image 4" descr="/Users/danwahlin/.copilot/session-state/56a7a0da-def8-48d4-b5e8-0ac3878cb8dd/files/slides-build/icons/GoLock-1A7F37.png">    </p:cNvPr>
           <p:cNvPicPr>
             <a:picLocks noChangeAspect="1"/>
           </p:cNvPicPr>
           <p:nvPr/>
         </p:nvPicPr>
         <p:blipFill>
-          <a:blip r:embed="rId5"/>
+          <a:blip r:embed="rId6"/>
           <a:stretch>
             <a:fillRect/>
           </a:stretch>
@@ -5953,7 +5849,7 @@
       </p:pic>
       <p:sp>
         <p:nvSpPr>
-          <p:cNvPr id="23" name="Text 17"/>
+          <p:cNvPr id="23" name="Text 16"/>
           <p:cNvSpPr/>
           <p:nvPr/>
         </p:nvSpPr>
@@ -5995,7 +5891,7 @@
       </p:sp>
       <p:sp>
         <p:nvSpPr>
-          <p:cNvPr id="24" name="Text 18"/>
+          <p:cNvPr id="24" name="Text 17"/>
           <p:cNvSpPr/>
           <p:nvPr/>
         </p:nvSpPr>
@@ -6038,14 +5934,14 @@
       </p:sp>
       <p:pic>
         <p:nvPicPr>
-          <p:cNvPr id="25" name="Image 4" descr="/Users/danwahlin/.copilot/session-state/56a7a0da-def8-48d4-b5e8-0ac3878cb8dd/files/slides-build/img/07-cloud-tools-crop.png">    </p:cNvPr>
+          <p:cNvPr id="25" name="Image 5" descr="/Users/danwahlin/.copilot/session-state/56a7a0da-def8-48d4-b5e8-0ac3878cb8dd/files/slides-build/img/07-cloud-tools-crop.png">    </p:cNvPr>
           <p:cNvPicPr>
             <a:picLocks noChangeAspect="1"/>
           </p:cNvPicPr>
           <p:nvPr/>
         </p:nvPicPr>
         <p:blipFill>
-          <a:blip r:embed="rId6"/>
+          <a:blip r:embed="rId7"/>
           <a:stretch>
             <a:fillRect/>
           </a:stretch>
@@ -6092,112 +5988,9 @@
           <a:chExt cx="0" cy="0"/>
         </a:xfrm>
       </p:grpSpPr>
-      <p:sp>
-        <p:nvSpPr>
-          <p:cNvPr id="2" name="Text 0"/>
-          <p:cNvSpPr/>
-          <p:nvPr/>
-        </p:nvSpPr>
-        <p:spPr>
-          <a:xfrm>
-            <a:off x="0" y="0"/>
-            <a:ext cx="9144000" cy="76200"/>
-          </a:xfrm>
-          <a:prstGeom prst="rect">
-            <a:avLst/>
-          </a:prstGeom>
-          <a:solidFill>
-            <a:srgbClr val="BC4C00"/>
-          </a:solidFill>
-          <a:ln/>
-        </p:spPr>
-        <p:txBody>
-          <a:bodyPr wrap="square" rtlCol="0" anchor="ctr"/>
-          <a:lstStyle/>
-          <a:p>
-            <a:pPr indent="0" marL="0">
-              <a:buNone/>
-            </a:pPr>
-            <a:endParaRPr lang="en-US" dirty="0"/>
-          </a:p>
-        </p:txBody>
-      </p:sp>
-      <p:sp>
-        <p:nvSpPr>
-          <p:cNvPr id="3" name="Text 1"/>
-          <p:cNvSpPr/>
-          <p:nvPr/>
-        </p:nvSpPr>
-        <p:spPr>
-          <a:xfrm>
-            <a:off x="7340501" y="177701"/>
-            <a:ext cx="1168301" cy="279350"/>
-          </a:xfrm>
-          <a:prstGeom prst="roundRect">
-            <a:avLst>
-              <a:gd name="adj" fmla="val 22731"/>
-            </a:avLst>
-          </a:prstGeom>
-          <a:solidFill>
-            <a:srgbClr val="1A7F37"/>
-          </a:solidFill>
-          <a:ln/>
-        </p:spPr>
-        <p:txBody>
-          <a:bodyPr wrap="square" rtlCol="0" anchor="ctr"/>
-          <a:lstStyle/>
-          <a:p>
-            <a:pPr indent="0" marL="0">
-              <a:buNone/>
-            </a:pPr>
-            <a:endParaRPr lang="en-US" dirty="0"/>
-          </a:p>
-        </p:txBody>
-      </p:sp>
-      <p:sp>
-        <p:nvSpPr>
-          <p:cNvPr id="4" name="Text 2"/>
-          <p:cNvSpPr/>
-          <p:nvPr/>
-        </p:nvSpPr>
-        <p:spPr>
-          <a:xfrm>
-            <a:off x="7461041" y="231577"/>
-            <a:ext cx="927071" cy="171450"/>
-          </a:xfrm>
-          <a:prstGeom prst="rect">
-            <a:avLst/>
-          </a:prstGeom>
-          <a:noFill/>
-          <a:ln/>
-        </p:spPr>
-        <p:txBody>
-          <a:bodyPr wrap="square" lIns="0" tIns="0" rIns="0" bIns="0" rtlCol="0" anchor="t"/>
-          <a:lstStyle/>
-          <a:p>
-            <a:pPr algn="ctr" indent="0" marL="0">
-              <a:buNone/>
-            </a:pPr>
-            <a:r>
-              <a:rPr lang="en-US" sz="1150" b="1" dirty="0">
-                <a:solidFill>
-                  <a:srgbClr val="FFFFFF"/>
-                </a:solidFill>
-                <a:latin typeface="Arial" pitchFamily="34" charset="0"/>
-                <a:ea typeface="Arial" pitchFamily="34" charset="-122"/>
-                <a:cs typeface="Arial" pitchFamily="34" charset="-120"/>
-              </a:rPr>
-              <a:t>CHAPTER 07</a:t>
-            </a:r>
-            <a:endParaRPr lang="en-US" sz="1150" dirty="0"/>
-          </a:p>
-        </p:txBody>
-      </p:sp>
       <p:pic>
         <p:nvPicPr>
-          <p:cNvPr id="5" name="Image 0" descr="/Users/danwahlin/.copilot/session-state/56a7a0da-def8-48d4-b5e8-0ac3878cb8dd/files/slides-build/icons/FaGithub-1F2328.png">
-            <a:hlinkClick r:id="rId2" tooltip="https://github.com/github/copilot-app-for-beginners/tree/main/07-automations"/>
-          </p:cNvPr>
+          <p:cNvPr id="2" name="Image 0" descr="/Users/danwahlin/.copilot/session-state/56a7a0da-def8-48d4-b5e8-0ac3878cb8dd/files/slides-build/img/grad-corner.png">    </p:cNvPr>
           <p:cNvPicPr>
             <a:picLocks noChangeAspect="1"/>
           </p:cNvPicPr>
@@ -6211,6 +6004,103 @@
         </p:blipFill>
         <p:spPr>
           <a:xfrm>
+            <a:off x="6349901" y="0"/>
+            <a:ext cx="2793950" cy="1308050"/>
+          </a:xfrm>
+          <a:prstGeom prst="rect">
+            <a:avLst/>
+          </a:prstGeom>
+        </p:spPr>
+      </p:pic>
+      <p:sp>
+        <p:nvSpPr>
+          <p:cNvPr id="3" name="Text 0"/>
+          <p:cNvSpPr/>
+          <p:nvPr/>
+        </p:nvSpPr>
+        <p:spPr>
+          <a:xfrm>
+            <a:off x="7340501" y="177701"/>
+            <a:ext cx="1168301" cy="279350"/>
+          </a:xfrm>
+          <a:prstGeom prst="roundRect">
+            <a:avLst>
+              <a:gd name="adj" fmla="val 22731"/>
+            </a:avLst>
+          </a:prstGeom>
+          <a:solidFill>
+            <a:srgbClr val="1A7F37"/>
+          </a:solidFill>
+          <a:ln/>
+        </p:spPr>
+        <p:txBody>
+          <a:bodyPr wrap="square" rtlCol="0" anchor="ctr"/>
+          <a:lstStyle/>
+          <a:p>
+            <a:pPr indent="0" marL="0">
+              <a:buNone/>
+            </a:pPr>
+            <a:endParaRPr lang="en-US" dirty="0"/>
+          </a:p>
+        </p:txBody>
+      </p:sp>
+      <p:sp>
+        <p:nvSpPr>
+          <p:cNvPr id="4" name="Text 1"/>
+          <p:cNvSpPr/>
+          <p:nvPr/>
+        </p:nvSpPr>
+        <p:spPr>
+          <a:xfrm>
+            <a:off x="7461041" y="231577"/>
+            <a:ext cx="927071" cy="171450"/>
+          </a:xfrm>
+          <a:prstGeom prst="rect">
+            <a:avLst/>
+          </a:prstGeom>
+          <a:noFill/>
+          <a:ln/>
+        </p:spPr>
+        <p:txBody>
+          <a:bodyPr wrap="square" lIns="0" tIns="0" rIns="0" bIns="0" rtlCol="0" anchor="t"/>
+          <a:lstStyle/>
+          <a:p>
+            <a:pPr algn="ctr" indent="0" marL="0">
+              <a:buNone/>
+            </a:pPr>
+            <a:r>
+              <a:rPr lang="en-US" sz="1150" b="1" dirty="0">
+                <a:solidFill>
+                  <a:srgbClr val="FFFFFF"/>
+                </a:solidFill>
+                <a:latin typeface="Arial" pitchFamily="34" charset="0"/>
+                <a:ea typeface="Arial" pitchFamily="34" charset="-122"/>
+                <a:cs typeface="Arial" pitchFamily="34" charset="-120"/>
+              </a:rPr>
+              <a:t>CHAPTER 07</a:t>
+            </a:r>
+            <a:endParaRPr lang="en-US" sz="1150" dirty="0"/>
+          </a:p>
+        </p:txBody>
+      </p:sp>
+      <p:pic>
+        <p:nvPicPr>
+          <p:cNvPr id="5" name="Image 1" descr="/Users/danwahlin/.copilot/session-state/56a7a0da-def8-48d4-b5e8-0ac3878cb8dd/files/slides-build/icons/FaGithub-1F2328.png">
+            <a:hlinkClick r:id="rId3" tooltip="https://github.com/github/copilot-app-for-beginners/tree/main/07-automations"/>
+          </p:cNvPr>
+          <p:cNvPicPr>
+            <a:picLocks noChangeAspect="1"/>
+          </p:cNvPicPr>
+          <p:nvPr/>
+        </p:nvPicPr>
+        <p:blipFill>
+          <a:blip r:embed="rId2"/>
+          <a:stretch>
+            <a:fillRect/>
+          </a:stretch>
+        </p:blipFill>
+        <p:spPr>
+          <a:xfrm>
             <a:off x="8610600" y="165050"/>
             <a:ext cx="304800" cy="304800"/>
           </a:xfrm>
@@ -6221,7 +6111,7 @@
       </p:pic>
       <p:sp>
         <p:nvSpPr>
-          <p:cNvPr id="6" name="Text 3"/>
+          <p:cNvPr id="6" name="Text 2"/>
           <p:cNvSpPr/>
           <p:nvPr/>
         </p:nvSpPr>
@@ -6260,7 +6150,7 @@
       </p:sp>
       <p:sp>
         <p:nvSpPr>
-          <p:cNvPr id="7" name="Text 4"/>
+          <p:cNvPr id="7" name="Text 3"/>
           <p:cNvSpPr/>
           <p:nvPr/>
         </p:nvSpPr>
@@ -6305,7 +6195,7 @@
       </p:sp>
       <p:sp>
         <p:nvSpPr>
-          <p:cNvPr id="8" name="Text 5"/>
+          <p:cNvPr id="8" name="Text 4"/>
           <p:cNvSpPr/>
           <p:nvPr/>
         </p:nvSpPr>
@@ -6341,7 +6231,7 @@
       </p:sp>
       <p:sp>
         <p:nvSpPr>
-          <p:cNvPr id="9" name="Shape 6"/>
+          <p:cNvPr id="9" name="Shape 5"/>
           <p:cNvSpPr/>
           <p:nvPr/>
         </p:nvSpPr>
@@ -6364,7 +6254,7 @@
       </p:sp>
       <p:sp>
         <p:nvSpPr>
-          <p:cNvPr id="10" name="Text 7"/>
+          <p:cNvPr id="10" name="Text 6"/>
           <p:cNvSpPr/>
           <p:nvPr/>
         </p:nvSpPr>
@@ -6396,7 +6286,7 @@
       </p:sp>
       <p:sp>
         <p:nvSpPr>
-          <p:cNvPr id="11" name="Text 8"/>
+          <p:cNvPr id="11" name="Text 7"/>
           <p:cNvSpPr/>
           <p:nvPr/>
         </p:nvSpPr>
@@ -6435,7 +6325,7 @@
       </p:sp>
       <p:sp>
         <p:nvSpPr>
-          <p:cNvPr id="12" name="Text 9"/>
+          <p:cNvPr id="12" name="Text 8"/>
           <p:cNvSpPr/>
           <p:nvPr/>
         </p:nvSpPr>
@@ -6477,7 +6367,7 @@
       </p:sp>
       <p:sp>
         <p:nvSpPr>
-          <p:cNvPr id="13" name="Text 10"/>
+          <p:cNvPr id="13" name="Text 9"/>
           <p:cNvSpPr/>
           <p:nvPr/>
         </p:nvSpPr>
@@ -6519,7 +6409,7 @@
       </p:sp>
       <p:sp>
         <p:nvSpPr>
-          <p:cNvPr id="14" name="Shape 11"/>
+          <p:cNvPr id="14" name="Shape 10"/>
           <p:cNvSpPr/>
           <p:nvPr/>
         </p:nvSpPr>
@@ -6542,7 +6432,7 @@
       </p:sp>
       <p:sp>
         <p:nvSpPr>
-          <p:cNvPr id="15" name="Text 12"/>
+          <p:cNvPr id="15" name="Text 11"/>
           <p:cNvSpPr/>
           <p:nvPr/>
         </p:nvSpPr>
@@ -6574,7 +6464,7 @@
       </p:sp>
       <p:sp>
         <p:nvSpPr>
-          <p:cNvPr id="16" name="Text 13"/>
+          <p:cNvPr id="16" name="Text 12"/>
           <p:cNvSpPr/>
           <p:nvPr/>
         </p:nvSpPr>
@@ -6613,7 +6503,7 @@
       </p:sp>
       <p:sp>
         <p:nvSpPr>
-          <p:cNvPr id="17" name="Text 14"/>
+          <p:cNvPr id="17" name="Text 13"/>
           <p:cNvSpPr/>
           <p:nvPr/>
         </p:nvSpPr>
@@ -6655,7 +6545,7 @@
       </p:sp>
       <p:sp>
         <p:nvSpPr>
-          <p:cNvPr id="18" name="Text 15"/>
+          <p:cNvPr id="18" name="Text 14"/>
           <p:cNvSpPr/>
           <p:nvPr/>
         </p:nvSpPr>
@@ -6697,7 +6587,7 @@
       </p:sp>
       <p:sp>
         <p:nvSpPr>
-          <p:cNvPr id="19" name="Shape 16"/>
+          <p:cNvPr id="19" name="Shape 15"/>
           <p:cNvSpPr/>
           <p:nvPr/>
         </p:nvSpPr>
@@ -6720,7 +6610,7 @@
       </p:sp>
       <p:sp>
         <p:nvSpPr>
-          <p:cNvPr id="20" name="Text 17"/>
+          <p:cNvPr id="20" name="Text 16"/>
           <p:cNvSpPr/>
           <p:nvPr/>
         </p:nvSpPr>
@@ -6752,7 +6642,7 @@
       </p:sp>
       <p:sp>
         <p:nvSpPr>
-          <p:cNvPr id="21" name="Text 18"/>
+          <p:cNvPr id="21" name="Text 17"/>
           <p:cNvSpPr/>
           <p:nvPr/>
         </p:nvSpPr>
@@ -6791,7 +6681,7 @@
       </p:sp>
       <p:sp>
         <p:nvSpPr>
-          <p:cNvPr id="22" name="Text 19"/>
+          <p:cNvPr id="22" name="Text 18"/>
           <p:cNvSpPr/>
           <p:nvPr/>
         </p:nvSpPr>
@@ -6833,7 +6723,7 @@
       </p:sp>
       <p:sp>
         <p:nvSpPr>
-          <p:cNvPr id="23" name="Text 20"/>
+          <p:cNvPr id="23" name="Text 19"/>
           <p:cNvSpPr/>
           <p:nvPr/>
         </p:nvSpPr>
@@ -6875,7 +6765,7 @@
       </p:sp>
       <p:sp>
         <p:nvSpPr>
-          <p:cNvPr id="24" name="Text 21"/>
+          <p:cNvPr id="24" name="Text 20"/>
           <p:cNvSpPr/>
           <p:nvPr/>
         </p:nvSpPr>
@@ -6907,7 +6797,7 @@
       </p:sp>
       <p:sp>
         <p:nvSpPr>
-          <p:cNvPr id="25" name="Text 22"/>
+          <p:cNvPr id="25" name="Text 21"/>
           <p:cNvSpPr/>
           <p:nvPr/>
         </p:nvSpPr>
@@ -6946,7 +6836,7 @@
       </p:sp>
       <p:sp>
         <p:nvSpPr>
-          <p:cNvPr id="26" name="Text 23"/>
+          <p:cNvPr id="26" name="Text 22"/>
           <p:cNvSpPr/>
           <p:nvPr/>
         </p:nvSpPr>
@@ -6988,7 +6878,7 @@
       </p:sp>
       <p:sp>
         <p:nvSpPr>
-          <p:cNvPr id="27" name="Text 24"/>
+          <p:cNvPr id="27" name="Text 23"/>
           <p:cNvSpPr/>
           <p:nvPr/>
         </p:nvSpPr>
@@ -7030,7 +6920,7 @@
       </p:sp>
       <p:sp>
         <p:nvSpPr>
-          <p:cNvPr id="28" name="Text 25"/>
+          <p:cNvPr id="28" name="Text 24"/>
           <p:cNvSpPr/>
           <p:nvPr/>
         </p:nvSpPr>
@@ -7066,7 +6956,7 @@
       </p:sp>
       <p:sp>
         <p:nvSpPr>
-          <p:cNvPr id="29" name="Text 26"/>
+          <p:cNvPr id="29" name="Text 25"/>
           <p:cNvSpPr/>
           <p:nvPr/>
         </p:nvSpPr>
@@ -7098,14 +6988,14 @@
       </p:sp>
       <p:pic>
         <p:nvPicPr>
-          <p:cNvPr id="30" name="Image 1" descr="/Users/danwahlin/.copilot/session-state/56a7a0da-def8-48d4-b5e8-0ac3878cb8dd/files/slides-build/icons/GoGoal-BC4C00.png">    </p:cNvPr>
+          <p:cNvPr id="30" name="Image 2" descr="/Users/danwahlin/.copilot/session-state/56a7a0da-def8-48d4-b5e8-0ac3878cb8dd/files/slides-build/icons/GoGoal-BC4C00.png">    </p:cNvPr>
           <p:cNvPicPr>
             <a:picLocks noChangeAspect="1"/>
           </p:cNvPicPr>
           <p:nvPr/>
         </p:nvPicPr>
         <p:blipFill>
-          <a:blip r:embed="rId3"/>
+          <a:blip r:embed="rId4"/>
           <a:stretch>
             <a:fillRect/>
           </a:stretch>
@@ -7122,7 +7012,7 @@
       </p:pic>
       <p:sp>
         <p:nvSpPr>
-          <p:cNvPr id="31" name="Text 27"/>
+          <p:cNvPr id="31" name="Text 26"/>
           <p:cNvSpPr/>
           <p:nvPr/>
         </p:nvSpPr>
@@ -7164,7 +7054,7 @@
       </p:sp>
       <p:sp>
         <p:nvSpPr>
-          <p:cNvPr id="32" name="Text 28"/>
+          <p:cNvPr id="32" name="Text 27"/>
           <p:cNvSpPr/>
           <p:nvPr/>
         </p:nvSpPr>
@@ -7236,112 +7126,9 @@
           <a:chExt cx="0" cy="0"/>
         </a:xfrm>
       </p:grpSpPr>
-      <p:sp>
-        <p:nvSpPr>
-          <p:cNvPr id="2" name="Text 0"/>
-          <p:cNvSpPr/>
-          <p:nvPr/>
-        </p:nvSpPr>
-        <p:spPr>
-          <a:xfrm>
-            <a:off x="0" y="0"/>
-            <a:ext cx="9144000" cy="76200"/>
-          </a:xfrm>
-          <a:prstGeom prst="rect">
-            <a:avLst/>
-          </a:prstGeom>
-          <a:solidFill>
-            <a:srgbClr val="1A7F37"/>
-          </a:solidFill>
-          <a:ln/>
-        </p:spPr>
-        <p:txBody>
-          <a:bodyPr wrap="square" rtlCol="0" anchor="ctr"/>
-          <a:lstStyle/>
-          <a:p>
-            <a:pPr indent="0" marL="0">
-              <a:buNone/>
-            </a:pPr>
-            <a:endParaRPr lang="en-US" dirty="0"/>
-          </a:p>
-        </p:txBody>
-      </p:sp>
-      <p:sp>
-        <p:nvSpPr>
-          <p:cNvPr id="3" name="Text 1"/>
-          <p:cNvSpPr/>
-          <p:nvPr/>
-        </p:nvSpPr>
-        <p:spPr>
-          <a:xfrm>
-            <a:off x="7340501" y="177701"/>
-            <a:ext cx="1168301" cy="279350"/>
-          </a:xfrm>
-          <a:prstGeom prst="roundRect">
-            <a:avLst>
-              <a:gd name="adj" fmla="val 22731"/>
-            </a:avLst>
-          </a:prstGeom>
-          <a:solidFill>
-            <a:srgbClr val="1A7F37"/>
-          </a:solidFill>
-          <a:ln/>
-        </p:spPr>
-        <p:txBody>
-          <a:bodyPr wrap="square" rtlCol="0" anchor="ctr"/>
-          <a:lstStyle/>
-          <a:p>
-            <a:pPr indent="0" marL="0">
-              <a:buNone/>
-            </a:pPr>
-            <a:endParaRPr lang="en-US" dirty="0"/>
-          </a:p>
-        </p:txBody>
-      </p:sp>
-      <p:sp>
-        <p:nvSpPr>
-          <p:cNvPr id="4" name="Text 2"/>
-          <p:cNvSpPr/>
-          <p:nvPr/>
-        </p:nvSpPr>
-        <p:spPr>
-          <a:xfrm>
-            <a:off x="7461041" y="231577"/>
-            <a:ext cx="927071" cy="171450"/>
-          </a:xfrm>
-          <a:prstGeom prst="rect">
-            <a:avLst/>
-          </a:prstGeom>
-          <a:noFill/>
-          <a:ln/>
-        </p:spPr>
-        <p:txBody>
-          <a:bodyPr wrap="square" lIns="0" tIns="0" rIns="0" bIns="0" rtlCol="0" anchor="t"/>
-          <a:lstStyle/>
-          <a:p>
-            <a:pPr algn="ctr" indent="0" marL="0">
-              <a:buNone/>
-            </a:pPr>
-            <a:r>
-              <a:rPr lang="en-US" sz="1150" b="1" dirty="0">
-                <a:solidFill>
-                  <a:srgbClr val="FFFFFF"/>
-                </a:solidFill>
-                <a:latin typeface="Arial" pitchFamily="34" charset="0"/>
-                <a:ea typeface="Arial" pitchFamily="34" charset="-122"/>
-                <a:cs typeface="Arial" pitchFamily="34" charset="-120"/>
-              </a:rPr>
-              <a:t>CHAPTER 07</a:t>
-            </a:r>
-            <a:endParaRPr lang="en-US" sz="1150" dirty="0"/>
-          </a:p>
-        </p:txBody>
-      </p:sp>
       <p:pic>
         <p:nvPicPr>
-          <p:cNvPr id="5" name="Image 0" descr="/Users/danwahlin/.copilot/session-state/56a7a0da-def8-48d4-b5e8-0ac3878cb8dd/files/slides-build/icons/FaGithub-1F2328.png">
-            <a:hlinkClick r:id="rId2" tooltip="https://github.com/github/copilot-app-for-beginners/tree/main/07-automations"/>
-          </p:cNvPr>
+          <p:cNvPr id="2" name="Image 0" descr="/Users/danwahlin/.copilot/session-state/56a7a0da-def8-48d4-b5e8-0ac3878cb8dd/files/slides-build/img/grad-corner.png">    </p:cNvPr>
           <p:cNvPicPr>
             <a:picLocks noChangeAspect="1"/>
           </p:cNvPicPr>
@@ -7355,6 +7142,103 @@
         </p:blipFill>
         <p:spPr>
           <a:xfrm>
+            <a:off x="6349901" y="0"/>
+            <a:ext cx="2793950" cy="1308050"/>
+          </a:xfrm>
+          <a:prstGeom prst="rect">
+            <a:avLst/>
+          </a:prstGeom>
+        </p:spPr>
+      </p:pic>
+      <p:sp>
+        <p:nvSpPr>
+          <p:cNvPr id="3" name="Text 0"/>
+          <p:cNvSpPr/>
+          <p:nvPr/>
+        </p:nvSpPr>
+        <p:spPr>
+          <a:xfrm>
+            <a:off x="7340501" y="177701"/>
+            <a:ext cx="1168301" cy="279350"/>
+          </a:xfrm>
+          <a:prstGeom prst="roundRect">
+            <a:avLst>
+              <a:gd name="adj" fmla="val 22731"/>
+            </a:avLst>
+          </a:prstGeom>
+          <a:solidFill>
+            <a:srgbClr val="1A7F37"/>
+          </a:solidFill>
+          <a:ln/>
+        </p:spPr>
+        <p:txBody>
+          <a:bodyPr wrap="square" rtlCol="0" anchor="ctr"/>
+          <a:lstStyle/>
+          <a:p>
+            <a:pPr indent="0" marL="0">
+              <a:buNone/>
+            </a:pPr>
+            <a:endParaRPr lang="en-US" dirty="0"/>
+          </a:p>
+        </p:txBody>
+      </p:sp>
+      <p:sp>
+        <p:nvSpPr>
+          <p:cNvPr id="4" name="Text 1"/>
+          <p:cNvSpPr/>
+          <p:nvPr/>
+        </p:nvSpPr>
+        <p:spPr>
+          <a:xfrm>
+            <a:off x="7461041" y="231577"/>
+            <a:ext cx="927071" cy="171450"/>
+          </a:xfrm>
+          <a:prstGeom prst="rect">
+            <a:avLst/>
+          </a:prstGeom>
+          <a:noFill/>
+          <a:ln/>
+        </p:spPr>
+        <p:txBody>
+          <a:bodyPr wrap="square" lIns="0" tIns="0" rIns="0" bIns="0" rtlCol="0" anchor="t"/>
+          <a:lstStyle/>
+          <a:p>
+            <a:pPr algn="ctr" indent="0" marL="0">
+              <a:buNone/>
+            </a:pPr>
+            <a:r>
+              <a:rPr lang="en-US" sz="1150" b="1" dirty="0">
+                <a:solidFill>
+                  <a:srgbClr val="FFFFFF"/>
+                </a:solidFill>
+                <a:latin typeface="Arial" pitchFamily="34" charset="0"/>
+                <a:ea typeface="Arial" pitchFamily="34" charset="-122"/>
+                <a:cs typeface="Arial" pitchFamily="34" charset="-120"/>
+              </a:rPr>
+              <a:t>CHAPTER 07</a:t>
+            </a:r>
+            <a:endParaRPr lang="en-US" sz="1150" dirty="0"/>
+          </a:p>
+        </p:txBody>
+      </p:sp>
+      <p:pic>
+        <p:nvPicPr>
+          <p:cNvPr id="5" name="Image 1" descr="/Users/danwahlin/.copilot/session-state/56a7a0da-def8-48d4-b5e8-0ac3878cb8dd/files/slides-build/icons/FaGithub-1F2328.png">
+            <a:hlinkClick r:id="rId3" tooltip="https://github.com/github/copilot-app-for-beginners/tree/main/07-automations"/>
+          </p:cNvPr>
+          <p:cNvPicPr>
+            <a:picLocks noChangeAspect="1"/>
+          </p:cNvPicPr>
+          <p:nvPr/>
+        </p:nvPicPr>
+        <p:blipFill>
+          <a:blip r:embed="rId2"/>
+          <a:stretch>
+            <a:fillRect/>
+          </a:stretch>
+        </p:blipFill>
+        <p:spPr>
+          <a:xfrm>
             <a:off x="8610600" y="165050"/>
             <a:ext cx="304800" cy="304800"/>
           </a:xfrm>
@@ -7365,7 +7249,7 @@
       </p:pic>
       <p:sp>
         <p:nvSpPr>
-          <p:cNvPr id="6" name="Text 3"/>
+          <p:cNvPr id="6" name="Text 2"/>
           <p:cNvSpPr/>
           <p:nvPr/>
         </p:nvSpPr>
@@ -7404,7 +7288,7 @@
       </p:sp>
       <p:sp>
         <p:nvSpPr>
-          <p:cNvPr id="7" name="Text 4"/>
+          <p:cNvPr id="7" name="Text 3"/>
           <p:cNvSpPr/>
           <p:nvPr/>
         </p:nvSpPr>
@@ -7449,7 +7333,7 @@
       </p:sp>
       <p:sp>
         <p:nvSpPr>
-          <p:cNvPr id="8" name="Text 5"/>
+          <p:cNvPr id="8" name="Text 4"/>
           <p:cNvSpPr/>
           <p:nvPr/>
         </p:nvSpPr>
@@ -7494,7 +7378,7 @@
       </p:sp>
       <p:sp>
         <p:nvSpPr>
-          <p:cNvPr id="9" name="Text 6"/>
+          <p:cNvPr id="9" name="Text 5"/>
           <p:cNvSpPr/>
           <p:nvPr/>
         </p:nvSpPr>
@@ -7530,7 +7414,7 @@
       </p:sp>
       <p:sp>
         <p:nvSpPr>
-          <p:cNvPr id="10" name="Text 7"/>
+          <p:cNvPr id="10" name="Text 6"/>
           <p:cNvSpPr/>
           <p:nvPr/>
         </p:nvSpPr>
@@ -7562,14 +7446,14 @@
       </p:sp>
       <p:pic>
         <p:nvPicPr>
-          <p:cNvPr id="11" name="Image 1" descr="/Users/danwahlin/.copilot/session-state/56a7a0da-def8-48d4-b5e8-0ac3878cb8dd/files/slides-build/icons/GoChecklist-1A7F37.png">    </p:cNvPr>
+          <p:cNvPr id="11" name="Image 2" descr="/Users/danwahlin/.copilot/session-state/56a7a0da-def8-48d4-b5e8-0ac3878cb8dd/files/slides-build/icons/GoChecklist-1A7F37.png">    </p:cNvPr>
           <p:cNvPicPr>
             <a:picLocks noChangeAspect="1"/>
           </p:cNvPicPr>
           <p:nvPr/>
         </p:nvPicPr>
         <p:blipFill>
-          <a:blip r:embed="rId3"/>
+          <a:blip r:embed="rId4"/>
           <a:stretch>
             <a:fillRect/>
           </a:stretch>
@@ -7586,7 +7470,7 @@
       </p:pic>
       <p:sp>
         <p:nvSpPr>
-          <p:cNvPr id="12" name="Text 8"/>
+          <p:cNvPr id="12" name="Text 7"/>
           <p:cNvSpPr/>
           <p:nvPr/>
         </p:nvSpPr>
@@ -7628,7 +7512,7 @@
       </p:sp>
       <p:sp>
         <p:nvSpPr>
-          <p:cNvPr id="13" name="Text 9"/>
+          <p:cNvPr id="13" name="Text 8"/>
           <p:cNvSpPr/>
           <p:nvPr/>
         </p:nvSpPr>
@@ -7664,7 +7548,7 @@
       </p:sp>
       <p:sp>
         <p:nvSpPr>
-          <p:cNvPr id="14" name="Text 10"/>
+          <p:cNvPr id="14" name="Text 9"/>
           <p:cNvSpPr/>
           <p:nvPr/>
         </p:nvSpPr>
@@ -7696,14 +7580,14 @@
       </p:sp>
       <p:pic>
         <p:nvPicPr>
-          <p:cNvPr id="15" name="Image 2" descr="/Users/danwahlin/.copilot/session-state/56a7a0da-def8-48d4-b5e8-0ac3878cb8dd/files/slides-build/icons/GoGitPullRequest-1A7F37.png">    </p:cNvPr>
+          <p:cNvPr id="15" name="Image 3" descr="/Users/danwahlin/.copilot/session-state/56a7a0da-def8-48d4-b5e8-0ac3878cb8dd/files/slides-build/icons/GoGitPullRequest-1A7F37.png">    </p:cNvPr>
           <p:cNvPicPr>
             <a:picLocks noChangeAspect="1"/>
           </p:cNvPicPr>
           <p:nvPr/>
         </p:nvPicPr>
         <p:blipFill>
-          <a:blip r:embed="rId4"/>
+          <a:blip r:embed="rId5"/>
           <a:stretch>
             <a:fillRect/>
           </a:stretch>
@@ -7720,7 +7604,7 @@
       </p:pic>
       <p:sp>
         <p:nvSpPr>
-          <p:cNvPr id="16" name="Text 11"/>
+          <p:cNvPr id="16" name="Text 10"/>
           <p:cNvSpPr/>
           <p:nvPr/>
         </p:nvSpPr>
@@ -7762,7 +7646,7 @@
       </p:sp>
       <p:sp>
         <p:nvSpPr>
-          <p:cNvPr id="17" name="Text 12"/>
+          <p:cNvPr id="17" name="Text 11"/>
           <p:cNvSpPr/>
           <p:nvPr/>
         </p:nvSpPr>
@@ -7798,7 +7682,7 @@
       </p:sp>
       <p:sp>
         <p:nvSpPr>
-          <p:cNvPr id="18" name="Text 13"/>
+          <p:cNvPr id="18" name="Text 12"/>
           <p:cNvSpPr/>
           <p:nvPr/>
         </p:nvSpPr>
@@ -7830,14 +7714,14 @@
       </p:sp>
       <p:pic>
         <p:nvPicPr>
-          <p:cNvPr id="19" name="Image 3" descr="/Users/danwahlin/.copilot/session-state/56a7a0da-def8-48d4-b5e8-0ac3878cb8dd/files/slides-build/icons/GoGitMerge-1A7F37.png">    </p:cNvPr>
+          <p:cNvPr id="19" name="Image 4" descr="/Users/danwahlin/.copilot/session-state/56a7a0da-def8-48d4-b5e8-0ac3878cb8dd/files/slides-build/icons/GoGitMerge-1A7F37.png">    </p:cNvPr>
           <p:cNvPicPr>
             <a:picLocks noChangeAspect="1"/>
           </p:cNvPicPr>
           <p:nvPr/>
         </p:nvPicPr>
         <p:blipFill>
-          <a:blip r:embed="rId5"/>
+          <a:blip r:embed="rId6"/>
           <a:stretch>
             <a:fillRect/>
           </a:stretch>
@@ -7854,7 +7738,7 @@
       </p:pic>
       <p:sp>
         <p:nvSpPr>
-          <p:cNvPr id="20" name="Text 14"/>
+          <p:cNvPr id="20" name="Text 13"/>
           <p:cNvSpPr/>
           <p:nvPr/>
         </p:nvSpPr>
@@ -7896,7 +7780,7 @@
       </p:sp>
       <p:sp>
         <p:nvSpPr>
-          <p:cNvPr id="21" name="Text 15"/>
+          <p:cNvPr id="21" name="Text 14"/>
           <p:cNvSpPr/>
           <p:nvPr/>
         </p:nvSpPr>
@@ -7938,7 +7822,7 @@
       </p:sp>
       <p:sp>
         <p:nvSpPr>
-          <p:cNvPr id="22" name="Text 16"/>
+          <p:cNvPr id="22" name="Text 15"/>
           <p:cNvSpPr/>
           <p:nvPr/>
         </p:nvSpPr>
@@ -7988,7 +7872,7 @@
                 <a:latin typeface="Arial" pitchFamily="34" charset="0"/>
                 <a:ea typeface="Arial" pitchFamily="34" charset="-122"/>
                 <a:cs typeface="Arial" pitchFamily="34" charset="-120"/>
-                <a:hlinkClick r:id="rId6" invalidUrl="" action="" tgtFrame="" tooltip="https://github.com/github/copilot-app-for-beginners" history="1" highlightClick="0" endSnd="0">
+                <a:hlinkClick r:id="rId7" invalidUrl="" action="" tgtFrame="" tooltip="https://github.com/github/copilot-app-for-beginners" history="1" highlightClick="0" endSnd="0">
                   <a:extLst>
                     <a:ext uri="{A12FA001-AC4F-418D-AE19-62706E023703}">
                       <ahyp:hlinkClr xmlns:ahyp="http://schemas.microsoft.com/office/drawing/2018/hyperlinkcolor" val="tx"/>
@@ -8034,112 +7918,9 @@
           <a:chExt cx="0" cy="0"/>
         </a:xfrm>
       </p:grpSpPr>
-      <p:sp>
-        <p:nvSpPr>
-          <p:cNvPr id="2" name="Text 0"/>
-          <p:cNvSpPr/>
-          <p:nvPr/>
-        </p:nvSpPr>
-        <p:spPr>
-          <a:xfrm>
-            <a:off x="0" y="0"/>
-            <a:ext cx="9144000" cy="76200"/>
-          </a:xfrm>
-          <a:prstGeom prst="rect">
-            <a:avLst/>
-          </a:prstGeom>
-          <a:solidFill>
-            <a:srgbClr val="1A7F37"/>
-          </a:solidFill>
-          <a:ln/>
-        </p:spPr>
-        <p:txBody>
-          <a:bodyPr wrap="square" rtlCol="0" anchor="ctr"/>
-          <a:lstStyle/>
-          <a:p>
-            <a:pPr indent="0" marL="0">
-              <a:buNone/>
-            </a:pPr>
-            <a:endParaRPr lang="en-US" dirty="0"/>
-          </a:p>
-        </p:txBody>
-      </p:sp>
-      <p:sp>
-        <p:nvSpPr>
-          <p:cNvPr id="3" name="Text 1"/>
-          <p:cNvSpPr/>
-          <p:nvPr/>
-        </p:nvSpPr>
-        <p:spPr>
-          <a:xfrm>
-            <a:off x="7340501" y="177701"/>
-            <a:ext cx="1168301" cy="279350"/>
-          </a:xfrm>
-          <a:prstGeom prst="roundRect">
-            <a:avLst>
-              <a:gd name="adj" fmla="val 22731"/>
-            </a:avLst>
-          </a:prstGeom>
-          <a:solidFill>
-            <a:srgbClr val="1A7F37"/>
-          </a:solidFill>
-          <a:ln/>
-        </p:spPr>
-        <p:txBody>
-          <a:bodyPr wrap="square" rtlCol="0" anchor="ctr"/>
-          <a:lstStyle/>
-          <a:p>
-            <a:pPr indent="0" marL="0">
-              <a:buNone/>
-            </a:pPr>
-            <a:endParaRPr lang="en-US" dirty="0"/>
-          </a:p>
-        </p:txBody>
-      </p:sp>
-      <p:sp>
-        <p:nvSpPr>
-          <p:cNvPr id="4" name="Text 2"/>
-          <p:cNvSpPr/>
-          <p:nvPr/>
-        </p:nvSpPr>
-        <p:spPr>
-          <a:xfrm>
-            <a:off x="7461041" y="231577"/>
-            <a:ext cx="927071" cy="171450"/>
-          </a:xfrm>
-          <a:prstGeom prst="rect">
-            <a:avLst/>
-          </a:prstGeom>
-          <a:noFill/>
-          <a:ln/>
-        </p:spPr>
-        <p:txBody>
-          <a:bodyPr wrap="square" lIns="0" tIns="0" rIns="0" bIns="0" rtlCol="0" anchor="t"/>
-          <a:lstStyle/>
-          <a:p>
-            <a:pPr algn="ctr" indent="0" marL="0">
-              <a:buNone/>
-            </a:pPr>
-            <a:r>
-              <a:rPr lang="en-US" sz="1150" b="1" dirty="0">
-                <a:solidFill>
-                  <a:srgbClr val="FFFFFF"/>
-                </a:solidFill>
-                <a:latin typeface="Arial" pitchFamily="34" charset="0"/>
-                <a:ea typeface="Arial" pitchFamily="34" charset="-122"/>
-                <a:cs typeface="Arial" pitchFamily="34" charset="-120"/>
-              </a:rPr>
-              <a:t>CHAPTER 07</a:t>
-            </a:r>
-            <a:endParaRPr lang="en-US" sz="1150" dirty="0"/>
-          </a:p>
-        </p:txBody>
-      </p:sp>
       <p:pic>
         <p:nvPicPr>
-          <p:cNvPr id="5" name="Image 0" descr="/Users/danwahlin/.copilot/session-state/56a7a0da-def8-48d4-b5e8-0ac3878cb8dd/files/slides-build/icons/FaGithub-1F2328.png">
-            <a:hlinkClick r:id="rId2" tooltip="https://github.com/github/copilot-app-for-beginners/tree/main/07-automations"/>
-          </p:cNvPr>
+          <p:cNvPr id="2" name="Image 0" descr="/Users/danwahlin/.copilot/session-state/56a7a0da-def8-48d4-b5e8-0ac3878cb8dd/files/slides-build/img/grad-corner.png">    </p:cNvPr>
           <p:cNvPicPr>
             <a:picLocks noChangeAspect="1"/>
           </p:cNvPicPr>
@@ -8153,6 +7934,103 @@
         </p:blipFill>
         <p:spPr>
           <a:xfrm>
+            <a:off x="6349901" y="0"/>
+            <a:ext cx="2793950" cy="1308050"/>
+          </a:xfrm>
+          <a:prstGeom prst="rect">
+            <a:avLst/>
+          </a:prstGeom>
+        </p:spPr>
+      </p:pic>
+      <p:sp>
+        <p:nvSpPr>
+          <p:cNvPr id="3" name="Text 0"/>
+          <p:cNvSpPr/>
+          <p:nvPr/>
+        </p:nvSpPr>
+        <p:spPr>
+          <a:xfrm>
+            <a:off x="7340501" y="177701"/>
+            <a:ext cx="1168301" cy="279350"/>
+          </a:xfrm>
+          <a:prstGeom prst="roundRect">
+            <a:avLst>
+              <a:gd name="adj" fmla="val 22731"/>
+            </a:avLst>
+          </a:prstGeom>
+          <a:solidFill>
+            <a:srgbClr val="1A7F37"/>
+          </a:solidFill>
+          <a:ln/>
+        </p:spPr>
+        <p:txBody>
+          <a:bodyPr wrap="square" rtlCol="0" anchor="ctr"/>
+          <a:lstStyle/>
+          <a:p>
+            <a:pPr indent="0" marL="0">
+              <a:buNone/>
+            </a:pPr>
+            <a:endParaRPr lang="en-US" dirty="0"/>
+          </a:p>
+        </p:txBody>
+      </p:sp>
+      <p:sp>
+        <p:nvSpPr>
+          <p:cNvPr id="4" name="Text 1"/>
+          <p:cNvSpPr/>
+          <p:nvPr/>
+        </p:nvSpPr>
+        <p:spPr>
+          <a:xfrm>
+            <a:off x="7461041" y="231577"/>
+            <a:ext cx="927071" cy="171450"/>
+          </a:xfrm>
+          <a:prstGeom prst="rect">
+            <a:avLst/>
+          </a:prstGeom>
+          <a:noFill/>
+          <a:ln/>
+        </p:spPr>
+        <p:txBody>
+          <a:bodyPr wrap="square" lIns="0" tIns="0" rIns="0" bIns="0" rtlCol="0" anchor="t"/>
+          <a:lstStyle/>
+          <a:p>
+            <a:pPr algn="ctr" indent="0" marL="0">
+              <a:buNone/>
+            </a:pPr>
+            <a:r>
+              <a:rPr lang="en-US" sz="1150" b="1" dirty="0">
+                <a:solidFill>
+                  <a:srgbClr val="FFFFFF"/>
+                </a:solidFill>
+                <a:latin typeface="Arial" pitchFamily="34" charset="0"/>
+                <a:ea typeface="Arial" pitchFamily="34" charset="-122"/>
+                <a:cs typeface="Arial" pitchFamily="34" charset="-120"/>
+              </a:rPr>
+              <a:t>CHAPTER 07</a:t>
+            </a:r>
+            <a:endParaRPr lang="en-US" sz="1150" dirty="0"/>
+          </a:p>
+        </p:txBody>
+      </p:sp>
+      <p:pic>
+        <p:nvPicPr>
+          <p:cNvPr id="5" name="Image 1" descr="/Users/danwahlin/.copilot/session-state/56a7a0da-def8-48d4-b5e8-0ac3878cb8dd/files/slides-build/icons/FaGithub-1F2328.png">
+            <a:hlinkClick r:id="rId3" tooltip="https://github.com/github/copilot-app-for-beginners/tree/main/07-automations"/>
+          </p:cNvPr>
+          <p:cNvPicPr>
+            <a:picLocks noChangeAspect="1"/>
+          </p:cNvPicPr>
+          <p:nvPr/>
+        </p:nvPicPr>
+        <p:blipFill>
+          <a:blip r:embed="rId2"/>
+          <a:stretch>
+            <a:fillRect/>
+          </a:stretch>
+        </p:blipFill>
+        <p:spPr>
+          <a:xfrm>
             <a:off x="8610600" y="165050"/>
             <a:ext cx="304800" cy="304800"/>
           </a:xfrm>
@@ -8163,7 +8041,7 @@
       </p:pic>
       <p:sp>
         <p:nvSpPr>
-          <p:cNvPr id="6" name="Text 3"/>
+          <p:cNvPr id="6" name="Text 2"/>
           <p:cNvSpPr/>
           <p:nvPr/>
         </p:nvSpPr>
@@ -8202,7 +8080,7 @@
       </p:sp>
       <p:sp>
         <p:nvSpPr>
-          <p:cNvPr id="7" name="Text 4"/>
+          <p:cNvPr id="7" name="Text 3"/>
           <p:cNvSpPr/>
           <p:nvPr/>
         </p:nvSpPr>
@@ -8247,7 +8125,7 @@
       </p:sp>
       <p:sp>
         <p:nvSpPr>
-          <p:cNvPr id="8" name="Text 5"/>
+          <p:cNvPr id="8" name="Text 4"/>
           <p:cNvSpPr/>
           <p:nvPr/>
         </p:nvSpPr>
@@ -8283,7 +8161,7 @@
       </p:sp>
       <p:sp>
         <p:nvSpPr>
-          <p:cNvPr id="9" name="Text 6"/>
+          <p:cNvPr id="9" name="Text 5"/>
           <p:cNvSpPr/>
           <p:nvPr/>
         </p:nvSpPr>
@@ -8315,7 +8193,7 @@
       </p:sp>
       <p:sp>
         <p:nvSpPr>
-          <p:cNvPr id="10" name="Text 7"/>
+          <p:cNvPr id="10" name="Text 6"/>
           <p:cNvSpPr/>
           <p:nvPr/>
         </p:nvSpPr>
@@ -8354,7 +8232,7 @@
       </p:sp>
       <p:sp>
         <p:nvSpPr>
-          <p:cNvPr id="11" name="Text 8"/>
+          <p:cNvPr id="11" name="Text 7"/>
           <p:cNvSpPr/>
           <p:nvPr/>
         </p:nvSpPr>
@@ -8396,7 +8274,7 @@
       </p:sp>
       <p:sp>
         <p:nvSpPr>
-          <p:cNvPr id="12" name="Text 9"/>
+          <p:cNvPr id="12" name="Text 8"/>
           <p:cNvSpPr/>
           <p:nvPr/>
         </p:nvSpPr>
@@ -8432,7 +8310,7 @@
       </p:sp>
       <p:sp>
         <p:nvSpPr>
-          <p:cNvPr id="13" name="Text 10"/>
+          <p:cNvPr id="13" name="Text 9"/>
           <p:cNvSpPr/>
           <p:nvPr/>
         </p:nvSpPr>
@@ -8464,7 +8342,7 @@
       </p:sp>
       <p:sp>
         <p:nvSpPr>
-          <p:cNvPr id="14" name="Text 11"/>
+          <p:cNvPr id="14" name="Text 10"/>
           <p:cNvSpPr/>
           <p:nvPr/>
         </p:nvSpPr>
@@ -8503,7 +8381,7 @@
       </p:sp>
       <p:sp>
         <p:nvSpPr>
-          <p:cNvPr id="15" name="Text 12"/>
+          <p:cNvPr id="15" name="Text 11"/>
           <p:cNvSpPr/>
           <p:nvPr/>
         </p:nvSpPr>
@@ -8545,7 +8423,7 @@
       </p:sp>
       <p:sp>
         <p:nvSpPr>
-          <p:cNvPr id="16" name="Text 13"/>
+          <p:cNvPr id="16" name="Text 12"/>
           <p:cNvSpPr/>
           <p:nvPr/>
         </p:nvSpPr>
@@ -8581,7 +8459,7 @@
       </p:sp>
       <p:sp>
         <p:nvSpPr>
-          <p:cNvPr id="17" name="Text 14"/>
+          <p:cNvPr id="17" name="Text 13"/>
           <p:cNvSpPr/>
           <p:nvPr/>
         </p:nvSpPr>
@@ -8613,7 +8491,7 @@
       </p:sp>
       <p:sp>
         <p:nvSpPr>
-          <p:cNvPr id="18" name="Text 15"/>
+          <p:cNvPr id="18" name="Text 14"/>
           <p:cNvSpPr/>
           <p:nvPr/>
         </p:nvSpPr>
@@ -8652,7 +8530,7 @@
       </p:sp>
       <p:sp>
         <p:nvSpPr>
-          <p:cNvPr id="19" name="Text 16"/>
+          <p:cNvPr id="19" name="Text 15"/>
           <p:cNvSpPr/>
           <p:nvPr/>
         </p:nvSpPr>
@@ -8694,7 +8572,7 @@
       </p:sp>
       <p:sp>
         <p:nvSpPr>
-          <p:cNvPr id="20" name="Text 17"/>
+          <p:cNvPr id="20" name="Text 16"/>
           <p:cNvSpPr/>
           <p:nvPr/>
         </p:nvSpPr>
@@ -8730,7 +8608,7 @@
       </p:sp>
       <p:sp>
         <p:nvSpPr>
-          <p:cNvPr id="21" name="Text 18"/>
+          <p:cNvPr id="21" name="Text 17"/>
           <p:cNvSpPr/>
           <p:nvPr/>
         </p:nvSpPr>
@@ -8762,7 +8640,7 @@
       </p:sp>
       <p:sp>
         <p:nvSpPr>
-          <p:cNvPr id="22" name="Text 19"/>
+          <p:cNvPr id="22" name="Text 18"/>
           <p:cNvSpPr/>
           <p:nvPr/>
         </p:nvSpPr>
@@ -8801,7 +8679,7 @@
       </p:sp>
       <p:sp>
         <p:nvSpPr>
-          <p:cNvPr id="23" name="Text 20"/>
+          <p:cNvPr id="23" name="Text 19"/>
           <p:cNvSpPr/>
           <p:nvPr/>
         </p:nvSpPr>
@@ -8843,7 +8721,7 @@
       </p:sp>
       <p:sp>
         <p:nvSpPr>
-          <p:cNvPr id="24" name="Text 21"/>
+          <p:cNvPr id="24" name="Text 20"/>
           <p:cNvSpPr/>
           <p:nvPr/>
         </p:nvSpPr>
@@ -8879,7 +8757,7 @@
       </p:sp>
       <p:sp>
         <p:nvSpPr>
-          <p:cNvPr id="25" name="Text 22"/>
+          <p:cNvPr id="25" name="Text 21"/>
           <p:cNvSpPr/>
           <p:nvPr/>
         </p:nvSpPr>
@@ -8911,14 +8789,14 @@
       </p:sp>
       <p:pic>
         <p:nvPicPr>
-          <p:cNvPr id="26" name="Image 1" descr="/Users/danwahlin/.copilot/session-state/56a7a0da-def8-48d4-b5e8-0ac3878cb8dd/files/slides-build/icons/FaGithub-0969DA.png">    </p:cNvPr>
+          <p:cNvPr id="26" name="Image 2" descr="/Users/danwahlin/.copilot/session-state/56a7a0da-def8-48d4-b5e8-0ac3878cb8dd/files/slides-build/icons/FaGithub-0969DA.png">    </p:cNvPr>
           <p:cNvPicPr>
             <a:picLocks noChangeAspect="1"/>
           </p:cNvPicPr>
           <p:nvPr/>
         </p:nvPicPr>
         <p:blipFill>
-          <a:blip r:embed="rId3"/>
+          <a:blip r:embed="rId4"/>
           <a:stretch>
             <a:fillRect/>
           </a:stretch>
@@ -8935,7 +8813,7 @@
       </p:pic>
       <p:sp>
         <p:nvSpPr>
-          <p:cNvPr id="27" name="Text 23"/>
+          <p:cNvPr id="27" name="Text 22"/>
           <p:cNvSpPr/>
           <p:nvPr/>
         </p:nvSpPr>
@@ -8974,7 +8852,7 @@
       </p:sp>
       <p:sp>
         <p:nvSpPr>
-          <p:cNvPr id="28" name="Text 24"/>
+          <p:cNvPr id="28" name="Text 23"/>
           <p:cNvSpPr/>
           <p:nvPr/>
         </p:nvSpPr>
@@ -9004,7 +8882,7 @@
                 <a:latin typeface="Arial" pitchFamily="34" charset="0"/>
                 <a:ea typeface="Arial" pitchFamily="34" charset="-122"/>
                 <a:cs typeface="Arial" pitchFamily="34" charset="-120"/>
-                <a:hlinkClick r:id="rId4" invalidUrl="" action="" tgtFrame="" tooltip="https://github.com/github/copilot-app-for-beginners/tree/main/07-automations" history="1" highlightClick="0" endSnd="0">
+                <a:hlinkClick r:id="rId5" invalidUrl="" action="" tgtFrame="" tooltip="https://github.com/github/copilot-app-for-beginners/tree/main/07-automations" history="1" highlightClick="0" endSnd="0">
                   <a:extLst>
                     <a:ext uri="{A12FA001-AC4F-418D-AE19-62706E023703}">
                       <ahyp:hlinkClr xmlns:ahyp="http://schemas.microsoft.com/office/drawing/2018/hyperlinkcolor" val="tx"/>
@@ -9020,7 +8898,7 @@
       </p:sp>
       <p:sp>
         <p:nvSpPr>
-          <p:cNvPr id="29" name="Text 25"/>
+          <p:cNvPr id="29" name="Text 24"/>
           <p:cNvSpPr/>
           <p:nvPr/>
         </p:nvSpPr>
@@ -9059,7 +8937,7 @@
       </p:sp>
       <p:sp>
         <p:nvSpPr>
-          <p:cNvPr id="30" name="Text 26"/>
+          <p:cNvPr id="30" name="Text 25"/>
           <p:cNvSpPr/>
           <p:nvPr/>
         </p:nvSpPr>
@@ -9089,7 +8967,7 @@
                 <a:latin typeface="Arial" pitchFamily="34" charset="0"/>
                 <a:ea typeface="Arial" pitchFamily="34" charset="-122"/>
                 <a:cs typeface="Arial" pitchFamily="34" charset="-120"/>
-                <a:hlinkClick r:id="rId5" invalidUrl="" action="" tgtFrame="" tooltip="https://github.com/github/copilot-app-for-beginners" history="1" highlightClick="0" endSnd="0">
+                <a:hlinkClick r:id="rId6" invalidUrl="" action="" tgtFrame="" tooltip="https://github.com/github/copilot-app-for-beginners" history="1" highlightClick="0" endSnd="0">
                   <a:extLst>
                     <a:ext uri="{A12FA001-AC4F-418D-AE19-62706E023703}">
                       <ahyp:hlinkClr xmlns:ahyp="http://schemas.microsoft.com/office/drawing/2018/hyperlinkcolor" val="tx"/>
@@ -9135,112 +9013,9 @@
           <a:chExt cx="0" cy="0"/>
         </a:xfrm>
       </p:grpSpPr>
-      <p:sp>
-        <p:nvSpPr>
-          <p:cNvPr id="2" name="Text 0"/>
-          <p:cNvSpPr/>
-          <p:nvPr/>
-        </p:nvSpPr>
-        <p:spPr>
-          <a:xfrm>
-            <a:off x="0" y="0"/>
-            <a:ext cx="9144000" cy="76200"/>
-          </a:xfrm>
-          <a:prstGeom prst="rect">
-            <a:avLst/>
-          </a:prstGeom>
-          <a:solidFill>
-            <a:srgbClr val="1A7F37"/>
-          </a:solidFill>
-          <a:ln/>
-        </p:spPr>
-        <p:txBody>
-          <a:bodyPr wrap="square" rtlCol="0" anchor="ctr"/>
-          <a:lstStyle/>
-          <a:p>
-            <a:pPr indent="0" marL="0">
-              <a:buNone/>
-            </a:pPr>
-            <a:endParaRPr lang="en-US" dirty="0"/>
-          </a:p>
-        </p:txBody>
-      </p:sp>
-      <p:sp>
-        <p:nvSpPr>
-          <p:cNvPr id="3" name="Text 1"/>
-          <p:cNvSpPr/>
-          <p:nvPr/>
-        </p:nvSpPr>
-        <p:spPr>
-          <a:xfrm>
-            <a:off x="7340501" y="177701"/>
-            <a:ext cx="1168301" cy="279350"/>
-          </a:xfrm>
-          <a:prstGeom prst="roundRect">
-            <a:avLst>
-              <a:gd name="adj" fmla="val 22731"/>
-            </a:avLst>
-          </a:prstGeom>
-          <a:solidFill>
-            <a:srgbClr val="1A7F37"/>
-          </a:solidFill>
-          <a:ln/>
-        </p:spPr>
-        <p:txBody>
-          <a:bodyPr wrap="square" rtlCol="0" anchor="ctr"/>
-          <a:lstStyle/>
-          <a:p>
-            <a:pPr indent="0" marL="0">
-              <a:buNone/>
-            </a:pPr>
-            <a:endParaRPr lang="en-US" dirty="0"/>
-          </a:p>
-        </p:txBody>
-      </p:sp>
-      <p:sp>
-        <p:nvSpPr>
-          <p:cNvPr id="4" name="Text 2"/>
-          <p:cNvSpPr/>
-          <p:nvPr/>
-        </p:nvSpPr>
-        <p:spPr>
-          <a:xfrm>
-            <a:off x="7461041" y="231577"/>
-            <a:ext cx="927071" cy="171450"/>
-          </a:xfrm>
-          <a:prstGeom prst="rect">
-            <a:avLst/>
-          </a:prstGeom>
-          <a:noFill/>
-          <a:ln/>
-        </p:spPr>
-        <p:txBody>
-          <a:bodyPr wrap="square" lIns="0" tIns="0" rIns="0" bIns="0" rtlCol="0" anchor="t"/>
-          <a:lstStyle/>
-          <a:p>
-            <a:pPr algn="ctr" indent="0" marL="0">
-              <a:buNone/>
-            </a:pPr>
-            <a:r>
-              <a:rPr lang="en-US" sz="1150" b="1" dirty="0">
-                <a:solidFill>
-                  <a:srgbClr val="FFFFFF"/>
-                </a:solidFill>
-                <a:latin typeface="Arial" pitchFamily="34" charset="0"/>
-                <a:ea typeface="Arial" pitchFamily="34" charset="-122"/>
-                <a:cs typeface="Arial" pitchFamily="34" charset="-120"/>
-              </a:rPr>
-              <a:t>CHAPTER 07</a:t>
-            </a:r>
-            <a:endParaRPr lang="en-US" sz="1150" dirty="0"/>
-          </a:p>
-        </p:txBody>
-      </p:sp>
       <p:pic>
         <p:nvPicPr>
-          <p:cNvPr id="5" name="Image 0" descr="/Users/danwahlin/.copilot/session-state/56a7a0da-def8-48d4-b5e8-0ac3878cb8dd/files/slides-build/icons/FaGithub-1F2328.png">
-            <a:hlinkClick r:id="rId2" tooltip="https://github.com/github/copilot-app-for-beginners/tree/main/07-automations"/>
-          </p:cNvPr>
+          <p:cNvPr id="2" name="Image 0" descr="/Users/danwahlin/.copilot/session-state/56a7a0da-def8-48d4-b5e8-0ac3878cb8dd/files/slides-build/img/grad-corner.png">    </p:cNvPr>
           <p:cNvPicPr>
             <a:picLocks noChangeAspect="1"/>
           </p:cNvPicPr>
@@ -9254,6 +9029,103 @@
         </p:blipFill>
         <p:spPr>
           <a:xfrm>
+            <a:off x="6349901" y="0"/>
+            <a:ext cx="2793950" cy="1308050"/>
+          </a:xfrm>
+          <a:prstGeom prst="rect">
+            <a:avLst/>
+          </a:prstGeom>
+        </p:spPr>
+      </p:pic>
+      <p:sp>
+        <p:nvSpPr>
+          <p:cNvPr id="3" name="Text 0"/>
+          <p:cNvSpPr/>
+          <p:nvPr/>
+        </p:nvSpPr>
+        <p:spPr>
+          <a:xfrm>
+            <a:off x="7340501" y="177701"/>
+            <a:ext cx="1168301" cy="279350"/>
+          </a:xfrm>
+          <a:prstGeom prst="roundRect">
+            <a:avLst>
+              <a:gd name="adj" fmla="val 22731"/>
+            </a:avLst>
+          </a:prstGeom>
+          <a:solidFill>
+            <a:srgbClr val="1A7F37"/>
+          </a:solidFill>
+          <a:ln/>
+        </p:spPr>
+        <p:txBody>
+          <a:bodyPr wrap="square" rtlCol="0" anchor="ctr"/>
+          <a:lstStyle/>
+          <a:p>
+            <a:pPr indent="0" marL="0">
+              <a:buNone/>
+            </a:pPr>
+            <a:endParaRPr lang="en-US" dirty="0"/>
+          </a:p>
+        </p:txBody>
+      </p:sp>
+      <p:sp>
+        <p:nvSpPr>
+          <p:cNvPr id="4" name="Text 1"/>
+          <p:cNvSpPr/>
+          <p:nvPr/>
+        </p:nvSpPr>
+        <p:spPr>
+          <a:xfrm>
+            <a:off x="7461041" y="231577"/>
+            <a:ext cx="927071" cy="171450"/>
+          </a:xfrm>
+          <a:prstGeom prst="rect">
+            <a:avLst/>
+          </a:prstGeom>
+          <a:noFill/>
+          <a:ln/>
+        </p:spPr>
+        <p:txBody>
+          <a:bodyPr wrap="square" lIns="0" tIns="0" rIns="0" bIns="0" rtlCol="0" anchor="t"/>
+          <a:lstStyle/>
+          <a:p>
+            <a:pPr algn="ctr" indent="0" marL="0">
+              <a:buNone/>
+            </a:pPr>
+            <a:r>
+              <a:rPr lang="en-US" sz="1150" b="1" dirty="0">
+                <a:solidFill>
+                  <a:srgbClr val="FFFFFF"/>
+                </a:solidFill>
+                <a:latin typeface="Arial" pitchFamily="34" charset="0"/>
+                <a:ea typeface="Arial" pitchFamily="34" charset="-122"/>
+                <a:cs typeface="Arial" pitchFamily="34" charset="-120"/>
+              </a:rPr>
+              <a:t>CHAPTER 07</a:t>
+            </a:r>
+            <a:endParaRPr lang="en-US" sz="1150" dirty="0"/>
+          </a:p>
+        </p:txBody>
+      </p:sp>
+      <p:pic>
+        <p:nvPicPr>
+          <p:cNvPr id="5" name="Image 1" descr="/Users/danwahlin/.copilot/session-state/56a7a0da-def8-48d4-b5e8-0ac3878cb8dd/files/slides-build/icons/FaGithub-1F2328.png">
+            <a:hlinkClick r:id="rId3" tooltip="https://github.com/github/copilot-app-for-beginners/tree/main/07-automations"/>
+          </p:cNvPr>
+          <p:cNvPicPr>
+            <a:picLocks noChangeAspect="1"/>
+          </p:cNvPicPr>
+          <p:nvPr/>
+        </p:nvPicPr>
+        <p:blipFill>
+          <a:blip r:embed="rId2"/>
+          <a:stretch>
+            <a:fillRect/>
+          </a:stretch>
+        </p:blipFill>
+        <p:spPr>
+          <a:xfrm>
             <a:off x="8610600" y="165050"/>
             <a:ext cx="304800" cy="304800"/>
           </a:xfrm>
@@ -9264,7 +9136,7 @@
       </p:pic>
       <p:sp>
         <p:nvSpPr>
-          <p:cNvPr id="6" name="Text 3"/>
+          <p:cNvPr id="6" name="Text 2"/>
           <p:cNvSpPr/>
           <p:nvPr/>
         </p:nvSpPr>
@@ -9303,7 +9175,7 @@
       </p:sp>
       <p:sp>
         <p:nvSpPr>
-          <p:cNvPr id="7" name="Text 4"/>
+          <p:cNvPr id="7" name="Text 3"/>
           <p:cNvSpPr/>
           <p:nvPr/>
         </p:nvSpPr>
@@ -9348,7 +9220,7 @@
       </p:sp>
       <p:sp>
         <p:nvSpPr>
-          <p:cNvPr id="8" name="Text 5"/>
+          <p:cNvPr id="8" name="Text 4"/>
           <p:cNvSpPr/>
           <p:nvPr/>
         </p:nvSpPr>
@@ -9380,7 +9252,7 @@
       </p:sp>
       <p:sp>
         <p:nvSpPr>
-          <p:cNvPr id="9" name="Shape 6"/>
+          <p:cNvPr id="9" name="Shape 5"/>
           <p:cNvSpPr/>
           <p:nvPr/>
         </p:nvSpPr>
@@ -9403,7 +9275,7 @@
       </p:sp>
       <p:sp>
         <p:nvSpPr>
-          <p:cNvPr id="10" name="Shape 7"/>
+          <p:cNvPr id="10" name="Shape 6"/>
           <p:cNvSpPr/>
           <p:nvPr/>
         </p:nvSpPr>
@@ -9426,7 +9298,7 @@
       </p:sp>
       <p:sp>
         <p:nvSpPr>
-          <p:cNvPr id="11" name="Shape 8"/>
+          <p:cNvPr id="11" name="Shape 7"/>
           <p:cNvSpPr/>
           <p:nvPr/>
         </p:nvSpPr>
@@ -9449,7 +9321,7 @@
       </p:sp>
       <p:sp>
         <p:nvSpPr>
-          <p:cNvPr id="12" name="Shape 9"/>
+          <p:cNvPr id="12" name="Shape 8"/>
           <p:cNvSpPr/>
           <p:nvPr/>
         </p:nvSpPr>
@@ -9472,7 +9344,7 @@
       </p:sp>
       <p:sp>
         <p:nvSpPr>
-          <p:cNvPr id="13" name="Text 10"/>
+          <p:cNvPr id="13" name="Text 9"/>
           <p:cNvSpPr/>
           <p:nvPr/>
         </p:nvSpPr>
@@ -9511,7 +9383,7 @@
       </p:sp>
       <p:sp>
         <p:nvSpPr>
-          <p:cNvPr id="14" name="Text 11"/>
+          <p:cNvPr id="14" name="Text 10"/>
           <p:cNvSpPr/>
           <p:nvPr/>
         </p:nvSpPr>
@@ -9550,7 +9422,7 @@
       </p:sp>
       <p:sp>
         <p:nvSpPr>
-          <p:cNvPr id="15" name="Text 12"/>
+          <p:cNvPr id="15" name="Text 11"/>
           <p:cNvSpPr/>
           <p:nvPr/>
         </p:nvSpPr>
@@ -9592,7 +9464,7 @@
       </p:sp>
       <p:sp>
         <p:nvSpPr>
-          <p:cNvPr id="16" name="Text 13"/>
+          <p:cNvPr id="16" name="Text 12"/>
           <p:cNvSpPr/>
           <p:nvPr/>
         </p:nvSpPr>
@@ -9624,7 +9496,7 @@
       </p:sp>
       <p:sp>
         <p:nvSpPr>
-          <p:cNvPr id="17" name="Shape 14"/>
+          <p:cNvPr id="17" name="Shape 13"/>
           <p:cNvSpPr/>
           <p:nvPr/>
         </p:nvSpPr>
@@ -9647,7 +9519,7 @@
       </p:sp>
       <p:sp>
         <p:nvSpPr>
-          <p:cNvPr id="18" name="Shape 15"/>
+          <p:cNvPr id="18" name="Shape 14"/>
           <p:cNvSpPr/>
           <p:nvPr/>
         </p:nvSpPr>
@@ -9670,7 +9542,7 @@
       </p:sp>
       <p:sp>
         <p:nvSpPr>
-          <p:cNvPr id="19" name="Shape 16"/>
+          <p:cNvPr id="19" name="Shape 15"/>
           <p:cNvSpPr/>
           <p:nvPr/>
         </p:nvSpPr>
@@ -9693,7 +9565,7 @@
       </p:sp>
       <p:sp>
         <p:nvSpPr>
-          <p:cNvPr id="20" name="Shape 17"/>
+          <p:cNvPr id="20" name="Shape 16"/>
           <p:cNvSpPr/>
           <p:nvPr/>
         </p:nvSpPr>
@@ -9716,7 +9588,7 @@
       </p:sp>
       <p:sp>
         <p:nvSpPr>
-          <p:cNvPr id="21" name="Text 18"/>
+          <p:cNvPr id="21" name="Text 17"/>
           <p:cNvSpPr/>
           <p:nvPr/>
         </p:nvSpPr>
@@ -9755,7 +9627,7 @@
       </p:sp>
       <p:sp>
         <p:nvSpPr>
-          <p:cNvPr id="22" name="Text 19"/>
+          <p:cNvPr id="22" name="Text 18"/>
           <p:cNvSpPr/>
           <p:nvPr/>
         </p:nvSpPr>
@@ -9794,7 +9666,7 @@
       </p:sp>
       <p:sp>
         <p:nvSpPr>
-          <p:cNvPr id="23" name="Text 20"/>
+          <p:cNvPr id="23" name="Text 19"/>
           <p:cNvSpPr/>
           <p:nvPr/>
         </p:nvSpPr>
@@ -9836,7 +9708,7 @@
       </p:sp>
       <p:sp>
         <p:nvSpPr>
-          <p:cNvPr id="24" name="Text 21"/>
+          <p:cNvPr id="24" name="Text 20"/>
           <p:cNvSpPr/>
           <p:nvPr/>
         </p:nvSpPr>
@@ -9868,7 +9740,7 @@
       </p:sp>
       <p:sp>
         <p:nvSpPr>
-          <p:cNvPr id="25" name="Shape 22"/>
+          <p:cNvPr id="25" name="Shape 21"/>
           <p:cNvSpPr/>
           <p:nvPr/>
         </p:nvSpPr>
@@ -9891,7 +9763,7 @@
       </p:sp>
       <p:sp>
         <p:nvSpPr>
-          <p:cNvPr id="26" name="Shape 23"/>
+          <p:cNvPr id="26" name="Shape 22"/>
           <p:cNvSpPr/>
           <p:nvPr/>
         </p:nvSpPr>
@@ -9914,7 +9786,7 @@
       </p:sp>
       <p:sp>
         <p:nvSpPr>
-          <p:cNvPr id="27" name="Shape 24"/>
+          <p:cNvPr id="27" name="Shape 23"/>
           <p:cNvSpPr/>
           <p:nvPr/>
         </p:nvSpPr>
@@ -9937,7 +9809,7 @@
       </p:sp>
       <p:sp>
         <p:nvSpPr>
-          <p:cNvPr id="28" name="Shape 25"/>
+          <p:cNvPr id="28" name="Shape 24"/>
           <p:cNvSpPr/>
           <p:nvPr/>
         </p:nvSpPr>
@@ -9960,7 +9832,7 @@
       </p:sp>
       <p:sp>
         <p:nvSpPr>
-          <p:cNvPr id="29" name="Text 26"/>
+          <p:cNvPr id="29" name="Text 25"/>
           <p:cNvSpPr/>
           <p:nvPr/>
         </p:nvSpPr>
@@ -9999,7 +9871,7 @@
       </p:sp>
       <p:sp>
         <p:nvSpPr>
-          <p:cNvPr id="30" name="Text 27"/>
+          <p:cNvPr id="30" name="Text 26"/>
           <p:cNvSpPr/>
           <p:nvPr/>
         </p:nvSpPr>
@@ -10038,7 +9910,7 @@
       </p:sp>
       <p:sp>
         <p:nvSpPr>
-          <p:cNvPr id="31" name="Text 28"/>
+          <p:cNvPr id="31" name="Text 27"/>
           <p:cNvSpPr/>
           <p:nvPr/>
         </p:nvSpPr>
@@ -10212,82 +10084,9 @@
           </a:p>
         </p:txBody>
       </p:sp>
-      <p:sp>
-        <p:nvSpPr>
-          <p:cNvPr id="5" name="Text 3"/>
-          <p:cNvSpPr/>
-          <p:nvPr/>
-        </p:nvSpPr>
-        <p:spPr>
-          <a:xfrm>
-            <a:off x="7340501" y="177701"/>
-            <a:ext cx="1168301" cy="279350"/>
-          </a:xfrm>
-          <a:prstGeom prst="roundRect">
-            <a:avLst>
-              <a:gd name="adj" fmla="val 22731"/>
-            </a:avLst>
-          </a:prstGeom>
-          <a:solidFill>
-            <a:srgbClr val="1A7F37"/>
-          </a:solidFill>
-          <a:ln/>
-        </p:spPr>
-        <p:txBody>
-          <a:bodyPr wrap="square" rtlCol="0" anchor="ctr"/>
-          <a:lstStyle/>
-          <a:p>
-            <a:pPr indent="0" marL="0">
-              <a:buNone/>
-            </a:pPr>
-            <a:endParaRPr lang="en-US" dirty="0"/>
-          </a:p>
-        </p:txBody>
-      </p:sp>
-      <p:sp>
-        <p:nvSpPr>
-          <p:cNvPr id="6" name="Text 4"/>
-          <p:cNvSpPr/>
-          <p:nvPr/>
-        </p:nvSpPr>
-        <p:spPr>
-          <a:xfrm>
-            <a:off x="7461041" y="231577"/>
-            <a:ext cx="927071" cy="171450"/>
-          </a:xfrm>
-          <a:prstGeom prst="rect">
-            <a:avLst/>
-          </a:prstGeom>
-          <a:noFill/>
-          <a:ln/>
-        </p:spPr>
-        <p:txBody>
-          <a:bodyPr wrap="square" lIns="0" tIns="0" rIns="0" bIns="0" rtlCol="0" anchor="t"/>
-          <a:lstStyle/>
-          <a:p>
-            <a:pPr algn="ctr" indent="0" marL="0">
-              <a:buNone/>
-            </a:pPr>
-            <a:r>
-              <a:rPr lang="en-US" sz="1150" b="1" dirty="0">
-                <a:solidFill>
-                  <a:srgbClr val="FFFFFF"/>
-                </a:solidFill>
-                <a:latin typeface="Arial" pitchFamily="34" charset="0"/>
-                <a:ea typeface="Arial" pitchFamily="34" charset="-122"/>
-                <a:cs typeface="Arial" pitchFamily="34" charset="-120"/>
-              </a:rPr>
-              <a:t>CHAPTER 07</a:t>
-            </a:r>
-            <a:endParaRPr lang="en-US" sz="1150" dirty="0"/>
-          </a:p>
-        </p:txBody>
-      </p:sp>
       <p:pic>
         <p:nvPicPr>
-          <p:cNvPr id="7" name="Image 0" descr="/Users/danwahlin/.copilot/session-state/56a7a0da-def8-48d4-b5e8-0ac3878cb8dd/files/slides-build/icons/FaGithub-1F2328.png">
-            <a:hlinkClick r:id="rId2" tooltip="https://github.com/github/copilot-app-for-beginners/tree/main/07-automations"/>
-          </p:cNvPr>
+          <p:cNvPr id="5" name="Image 0" descr="/Users/danwahlin/.copilot/session-state/56a7a0da-def8-48d4-b5e8-0ac3878cb8dd/files/slides-build/img/grad-corner.png">    </p:cNvPr>
           <p:cNvPicPr>
             <a:picLocks noChangeAspect="1"/>
           </p:cNvPicPr>
@@ -10301,6 +10100,103 @@
         </p:blipFill>
         <p:spPr>
           <a:xfrm>
+            <a:off x="6349901" y="0"/>
+            <a:ext cx="2793950" cy="1308050"/>
+          </a:xfrm>
+          <a:prstGeom prst="rect">
+            <a:avLst/>
+          </a:prstGeom>
+        </p:spPr>
+      </p:pic>
+      <p:sp>
+        <p:nvSpPr>
+          <p:cNvPr id="6" name="Text 3"/>
+          <p:cNvSpPr/>
+          <p:nvPr/>
+        </p:nvSpPr>
+        <p:spPr>
+          <a:xfrm>
+            <a:off x="7340501" y="177701"/>
+            <a:ext cx="1168301" cy="279350"/>
+          </a:xfrm>
+          <a:prstGeom prst="roundRect">
+            <a:avLst>
+              <a:gd name="adj" fmla="val 22731"/>
+            </a:avLst>
+          </a:prstGeom>
+          <a:solidFill>
+            <a:srgbClr val="1A7F37"/>
+          </a:solidFill>
+          <a:ln/>
+        </p:spPr>
+        <p:txBody>
+          <a:bodyPr wrap="square" rtlCol="0" anchor="ctr"/>
+          <a:lstStyle/>
+          <a:p>
+            <a:pPr indent="0" marL="0">
+              <a:buNone/>
+            </a:pPr>
+            <a:endParaRPr lang="en-US" dirty="0"/>
+          </a:p>
+        </p:txBody>
+      </p:sp>
+      <p:sp>
+        <p:nvSpPr>
+          <p:cNvPr id="7" name="Text 4"/>
+          <p:cNvSpPr/>
+          <p:nvPr/>
+        </p:nvSpPr>
+        <p:spPr>
+          <a:xfrm>
+            <a:off x="7461041" y="231577"/>
+            <a:ext cx="927071" cy="171450"/>
+          </a:xfrm>
+          <a:prstGeom prst="rect">
+            <a:avLst/>
+          </a:prstGeom>
+          <a:noFill/>
+          <a:ln/>
+        </p:spPr>
+        <p:txBody>
+          <a:bodyPr wrap="square" lIns="0" tIns="0" rIns="0" bIns="0" rtlCol="0" anchor="t"/>
+          <a:lstStyle/>
+          <a:p>
+            <a:pPr algn="ctr" indent="0" marL="0">
+              <a:buNone/>
+            </a:pPr>
+            <a:r>
+              <a:rPr lang="en-US" sz="1150" b="1" dirty="0">
+                <a:solidFill>
+                  <a:srgbClr val="FFFFFF"/>
+                </a:solidFill>
+                <a:latin typeface="Arial" pitchFamily="34" charset="0"/>
+                <a:ea typeface="Arial" pitchFamily="34" charset="-122"/>
+                <a:cs typeface="Arial" pitchFamily="34" charset="-120"/>
+              </a:rPr>
+              <a:t>CHAPTER 07</a:t>
+            </a:r>
+            <a:endParaRPr lang="en-US" sz="1150" dirty="0"/>
+          </a:p>
+        </p:txBody>
+      </p:sp>
+      <p:pic>
+        <p:nvPicPr>
+          <p:cNvPr id="8" name="Image 1" descr="/Users/danwahlin/.copilot/session-state/56a7a0da-def8-48d4-b5e8-0ac3878cb8dd/files/slides-build/icons/FaGithub-1F2328.png">
+            <a:hlinkClick r:id="rId3" tooltip="https://github.com/github/copilot-app-for-beginners/tree/main/07-automations"/>
+          </p:cNvPr>
+          <p:cNvPicPr>
+            <a:picLocks noChangeAspect="1"/>
+          </p:cNvPicPr>
+          <p:nvPr/>
+        </p:nvPicPr>
+        <p:blipFill>
+          <a:blip r:embed="rId2"/>
+          <a:stretch>
+            <a:fillRect/>
+          </a:stretch>
+        </p:blipFill>
+        <p:spPr>
+          <a:xfrm>
             <a:off x="8610600" y="165050"/>
             <a:ext cx="304800" cy="304800"/>
           </a:xfrm>
@@ -10311,7 +10207,7 @@
       </p:pic>
       <p:sp>
         <p:nvSpPr>
-          <p:cNvPr id="8" name="Text 5"/>
+          <p:cNvPr id="9" name="Text 5"/>
           <p:cNvSpPr/>
           <p:nvPr/>
         </p:nvSpPr>
@@ -10350,7 +10246,7 @@
       </p:sp>
       <p:sp>
         <p:nvSpPr>
-          <p:cNvPr id="9" name="Text 6"/>
+          <p:cNvPr id="10" name="Text 6"/>
           <p:cNvSpPr/>
           <p:nvPr/>
         </p:nvSpPr>
@@ -10395,7 +10291,7 @@
       </p:sp>
       <p:sp>
         <p:nvSpPr>
-          <p:cNvPr id="10" name="Text 7"/>
+          <p:cNvPr id="11" name="Text 7"/>
           <p:cNvSpPr/>
           <p:nvPr/>
         </p:nvSpPr>
@@ -10427,7 +10323,7 @@
       </p:sp>
       <p:sp>
         <p:nvSpPr>
-          <p:cNvPr id="11" name="Text 8"/>
+          <p:cNvPr id="12" name="Text 8"/>
           <p:cNvSpPr/>
           <p:nvPr/>
         </p:nvSpPr>
@@ -10499,112 +10395,9 @@
           <a:chExt cx="0" cy="0"/>
         </a:xfrm>
       </p:grpSpPr>
-      <p:sp>
-        <p:nvSpPr>
-          <p:cNvPr id="2" name="Text 0"/>
-          <p:cNvSpPr/>
-          <p:nvPr/>
-        </p:nvSpPr>
-        <p:spPr>
-          <a:xfrm>
-            <a:off x="0" y="0"/>
-            <a:ext cx="9144000" cy="76200"/>
-          </a:xfrm>
-          <a:prstGeom prst="rect">
-            <a:avLst/>
-          </a:prstGeom>
-          <a:solidFill>
-            <a:srgbClr val="9A6700"/>
-          </a:solidFill>
-          <a:ln/>
-        </p:spPr>
-        <p:txBody>
-          <a:bodyPr wrap="square" rtlCol="0" anchor="ctr"/>
-          <a:lstStyle/>
-          <a:p>
-            <a:pPr indent="0" marL="0">
-              <a:buNone/>
-            </a:pPr>
-            <a:endParaRPr lang="en-US" dirty="0"/>
-          </a:p>
-        </p:txBody>
-      </p:sp>
-      <p:sp>
-        <p:nvSpPr>
-          <p:cNvPr id="3" name="Text 1"/>
-          <p:cNvSpPr/>
-          <p:nvPr/>
-        </p:nvSpPr>
-        <p:spPr>
-          <a:xfrm>
-            <a:off x="7340501" y="177701"/>
-            <a:ext cx="1168301" cy="279350"/>
-          </a:xfrm>
-          <a:prstGeom prst="roundRect">
-            <a:avLst>
-              <a:gd name="adj" fmla="val 22731"/>
-            </a:avLst>
-          </a:prstGeom>
-          <a:solidFill>
-            <a:srgbClr val="1A7F37"/>
-          </a:solidFill>
-          <a:ln/>
-        </p:spPr>
-        <p:txBody>
-          <a:bodyPr wrap="square" rtlCol="0" anchor="ctr"/>
-          <a:lstStyle/>
-          <a:p>
-            <a:pPr indent="0" marL="0">
-              <a:buNone/>
-            </a:pPr>
-            <a:endParaRPr lang="en-US" dirty="0"/>
-          </a:p>
-        </p:txBody>
-      </p:sp>
-      <p:sp>
-        <p:nvSpPr>
-          <p:cNvPr id="4" name="Text 2"/>
-          <p:cNvSpPr/>
-          <p:nvPr/>
-        </p:nvSpPr>
-        <p:spPr>
-          <a:xfrm>
-            <a:off x="7461041" y="231577"/>
-            <a:ext cx="927071" cy="171450"/>
-          </a:xfrm>
-          <a:prstGeom prst="rect">
-            <a:avLst/>
-          </a:prstGeom>
-          <a:noFill/>
-          <a:ln/>
-        </p:spPr>
-        <p:txBody>
-          <a:bodyPr wrap="square" lIns="0" tIns="0" rIns="0" bIns="0" rtlCol="0" anchor="t"/>
-          <a:lstStyle/>
-          <a:p>
-            <a:pPr algn="ctr" indent="0" marL="0">
-              <a:buNone/>
-            </a:pPr>
-            <a:r>
-              <a:rPr lang="en-US" sz="1150" b="1" dirty="0">
-                <a:solidFill>
-                  <a:srgbClr val="FFFFFF"/>
-                </a:solidFill>
-                <a:latin typeface="Arial" pitchFamily="34" charset="0"/>
-                <a:ea typeface="Arial" pitchFamily="34" charset="-122"/>
-                <a:cs typeface="Arial" pitchFamily="34" charset="-120"/>
-              </a:rPr>
-              <a:t>CHAPTER 07</a:t>
-            </a:r>
-            <a:endParaRPr lang="en-US" sz="1150" dirty="0"/>
-          </a:p>
-        </p:txBody>
-      </p:sp>
       <p:pic>
         <p:nvPicPr>
-          <p:cNvPr id="5" name="Image 0" descr="/Users/danwahlin/.copilot/session-state/56a7a0da-def8-48d4-b5e8-0ac3878cb8dd/files/slides-build/icons/FaGithub-1F2328.png">
-            <a:hlinkClick r:id="rId2" tooltip="https://github.com/github/copilot-app-for-beginners/tree/main/07-automations"/>
-          </p:cNvPr>
+          <p:cNvPr id="2" name="Image 0" descr="/Users/danwahlin/.copilot/session-state/56a7a0da-def8-48d4-b5e8-0ac3878cb8dd/files/slides-build/img/grad-corner.png">    </p:cNvPr>
           <p:cNvPicPr>
             <a:picLocks noChangeAspect="1"/>
           </p:cNvPicPr>
@@ -10618,6 +10411,103 @@
         </p:blipFill>
         <p:spPr>
           <a:xfrm>
+            <a:off x="6349901" y="0"/>
+            <a:ext cx="2793950" cy="1308050"/>
+          </a:xfrm>
+          <a:prstGeom prst="rect">
+            <a:avLst/>
+          </a:prstGeom>
+        </p:spPr>
+      </p:pic>
+      <p:sp>
+        <p:nvSpPr>
+          <p:cNvPr id="3" name="Text 0"/>
+          <p:cNvSpPr/>
+          <p:nvPr/>
+        </p:nvSpPr>
+        <p:spPr>
+          <a:xfrm>
+            <a:off x="7340501" y="177701"/>
+            <a:ext cx="1168301" cy="279350"/>
+          </a:xfrm>
+          <a:prstGeom prst="roundRect">
+            <a:avLst>
+              <a:gd name="adj" fmla="val 22731"/>
+            </a:avLst>
+          </a:prstGeom>
+          <a:solidFill>
+            <a:srgbClr val="1A7F37"/>
+          </a:solidFill>
+          <a:ln/>
+        </p:spPr>
+        <p:txBody>
+          <a:bodyPr wrap="square" rtlCol="0" anchor="ctr"/>
+          <a:lstStyle/>
+          <a:p>
+            <a:pPr indent="0" marL="0">
+              <a:buNone/>
+            </a:pPr>
+            <a:endParaRPr lang="en-US" dirty="0"/>
+          </a:p>
+        </p:txBody>
+      </p:sp>
+      <p:sp>
+        <p:nvSpPr>
+          <p:cNvPr id="4" name="Text 1"/>
+          <p:cNvSpPr/>
+          <p:nvPr/>
+        </p:nvSpPr>
+        <p:spPr>
+          <a:xfrm>
+            <a:off x="7461041" y="231577"/>
+            <a:ext cx="927071" cy="171450"/>
+          </a:xfrm>
+          <a:prstGeom prst="rect">
+            <a:avLst/>
+          </a:prstGeom>
+          <a:noFill/>
+          <a:ln/>
+        </p:spPr>
+        <p:txBody>
+          <a:bodyPr wrap="square" lIns="0" tIns="0" rIns="0" bIns="0" rtlCol="0" anchor="t"/>
+          <a:lstStyle/>
+          <a:p>
+            <a:pPr algn="ctr" indent="0" marL="0">
+              <a:buNone/>
+            </a:pPr>
+            <a:r>
+              <a:rPr lang="en-US" sz="1150" b="1" dirty="0">
+                <a:solidFill>
+                  <a:srgbClr val="FFFFFF"/>
+                </a:solidFill>
+                <a:latin typeface="Arial" pitchFamily="34" charset="0"/>
+                <a:ea typeface="Arial" pitchFamily="34" charset="-122"/>
+                <a:cs typeface="Arial" pitchFamily="34" charset="-120"/>
+              </a:rPr>
+              <a:t>CHAPTER 07</a:t>
+            </a:r>
+            <a:endParaRPr lang="en-US" sz="1150" dirty="0"/>
+          </a:p>
+        </p:txBody>
+      </p:sp>
+      <p:pic>
+        <p:nvPicPr>
+          <p:cNvPr id="5" name="Image 1" descr="/Users/danwahlin/.copilot/session-state/56a7a0da-def8-48d4-b5e8-0ac3878cb8dd/files/slides-build/icons/FaGithub-1F2328.png">
+            <a:hlinkClick r:id="rId3" tooltip="https://github.com/github/copilot-app-for-beginners/tree/main/07-automations"/>
+          </p:cNvPr>
+          <p:cNvPicPr>
+            <a:picLocks noChangeAspect="1"/>
+          </p:cNvPicPr>
+          <p:nvPr/>
+        </p:nvPicPr>
+        <p:blipFill>
+          <a:blip r:embed="rId2"/>
+          <a:stretch>
+            <a:fillRect/>
+          </a:stretch>
+        </p:blipFill>
+        <p:spPr>
+          <a:xfrm>
             <a:off x="8610600" y="165050"/>
             <a:ext cx="304800" cy="304800"/>
           </a:xfrm>
@@ -10628,7 +10518,7 @@
       </p:pic>
       <p:sp>
         <p:nvSpPr>
-          <p:cNvPr id="6" name="Text 3"/>
+          <p:cNvPr id="6" name="Text 2"/>
           <p:cNvSpPr/>
           <p:nvPr/>
         </p:nvSpPr>
@@ -10667,7 +10557,7 @@
       </p:sp>
       <p:sp>
         <p:nvSpPr>
-          <p:cNvPr id="7" name="Text 4"/>
+          <p:cNvPr id="7" name="Text 3"/>
           <p:cNvSpPr/>
           <p:nvPr/>
         </p:nvSpPr>
@@ -10712,7 +10602,7 @@
       </p:sp>
       <p:sp>
         <p:nvSpPr>
-          <p:cNvPr id="8" name="Text 5"/>
+          <p:cNvPr id="8" name="Text 4"/>
           <p:cNvSpPr/>
           <p:nvPr/>
         </p:nvSpPr>
@@ -10757,7 +10647,7 @@
       </p:sp>
       <p:sp>
         <p:nvSpPr>
-          <p:cNvPr id="9" name="Text 6"/>
+          <p:cNvPr id="9" name="Text 5"/>
           <p:cNvSpPr/>
           <p:nvPr/>
         </p:nvSpPr>
@@ -10800,14 +10690,14 @@
       </p:sp>
       <p:pic>
         <p:nvPicPr>
-          <p:cNvPr id="10" name="Image 1" descr="/Users/danwahlin/.copilot/session-state/56a7a0da-def8-48d4-b5e8-0ac3878cb8dd/files/slides-build/img/07-sequencer-automation.jpg">    </p:cNvPr>
+          <p:cNvPr id="10" name="Image 2" descr="/Users/danwahlin/.copilot/session-state/56a7a0da-def8-48d4-b5e8-0ac3878cb8dd/files/slides-build/img/07-sequencer-automation.jpg">    </p:cNvPr>
           <p:cNvPicPr>
             <a:picLocks noChangeAspect="1"/>
           </p:cNvPicPr>
           <p:nvPr/>
         </p:nvPicPr>
         <p:blipFill>
-          <a:blip r:embed="rId3"/>
+          <a:blip r:embed="rId4"/>
           <a:stretch>
             <a:fillRect/>
           </a:stretch>
@@ -10824,7 +10714,7 @@
       </p:pic>
       <p:sp>
         <p:nvSpPr>
-          <p:cNvPr id="11" name="Text 7"/>
+          <p:cNvPr id="11" name="Text 6"/>
           <p:cNvSpPr/>
           <p:nvPr/>
         </p:nvSpPr>
@@ -10860,7 +10750,7 @@
       </p:sp>
       <p:sp>
         <p:nvSpPr>
-          <p:cNvPr id="12" name="Text 8"/>
+          <p:cNvPr id="12" name="Text 7"/>
           <p:cNvSpPr/>
           <p:nvPr/>
         </p:nvSpPr>
@@ -10890,7 +10780,7 @@
       </p:sp>
       <p:sp>
         <p:nvSpPr>
-          <p:cNvPr id="13" name="Shape 9"/>
+          <p:cNvPr id="13" name="Shape 8"/>
           <p:cNvSpPr/>
           <p:nvPr/>
         </p:nvSpPr>
@@ -10913,7 +10803,7 @@
       </p:sp>
       <p:sp>
         <p:nvSpPr>
-          <p:cNvPr id="14" name="Text 10"/>
+          <p:cNvPr id="14" name="Text 9"/>
           <p:cNvSpPr/>
           <p:nvPr/>
         </p:nvSpPr>
@@ -10955,7 +10845,7 @@
       </p:sp>
       <p:sp>
         <p:nvSpPr>
-          <p:cNvPr id="15" name="Text 11"/>
+          <p:cNvPr id="15" name="Text 10"/>
           <p:cNvSpPr/>
           <p:nvPr/>
         </p:nvSpPr>
@@ -10997,7 +10887,7 @@
       </p:sp>
       <p:sp>
         <p:nvSpPr>
-          <p:cNvPr id="16" name="Shape 12"/>
+          <p:cNvPr id="16" name="Shape 11"/>
           <p:cNvSpPr/>
           <p:nvPr/>
         </p:nvSpPr>
@@ -11020,7 +10910,7 @@
       </p:sp>
       <p:sp>
         <p:nvSpPr>
-          <p:cNvPr id="17" name="Text 13"/>
+          <p:cNvPr id="17" name="Text 12"/>
           <p:cNvSpPr/>
           <p:nvPr/>
         </p:nvSpPr>
@@ -11062,7 +10952,7 @@
       </p:sp>
       <p:sp>
         <p:nvSpPr>
-          <p:cNvPr id="18" name="Text 14"/>
+          <p:cNvPr id="18" name="Text 13"/>
           <p:cNvSpPr/>
           <p:nvPr/>
         </p:nvSpPr>
@@ -11104,7 +10994,7 @@
       </p:sp>
       <p:sp>
         <p:nvSpPr>
-          <p:cNvPr id="19" name="Shape 15"/>
+          <p:cNvPr id="19" name="Shape 14"/>
           <p:cNvSpPr/>
           <p:nvPr/>
         </p:nvSpPr>
@@ -11127,7 +11017,7 @@
       </p:sp>
       <p:sp>
         <p:nvSpPr>
-          <p:cNvPr id="20" name="Text 16"/>
+          <p:cNvPr id="20" name="Text 15"/>
           <p:cNvSpPr/>
           <p:nvPr/>
         </p:nvSpPr>
@@ -11169,7 +11059,7 @@
       </p:sp>
       <p:sp>
         <p:nvSpPr>
-          <p:cNvPr id="21" name="Text 17"/>
+          <p:cNvPr id="21" name="Text 16"/>
           <p:cNvSpPr/>
           <p:nvPr/>
         </p:nvSpPr>
@@ -11211,7 +11101,7 @@
       </p:sp>
       <p:sp>
         <p:nvSpPr>
-          <p:cNvPr id="22" name="Shape 18"/>
+          <p:cNvPr id="22" name="Shape 17"/>
           <p:cNvSpPr/>
           <p:nvPr/>
         </p:nvSpPr>
@@ -11234,7 +11124,7 @@
       </p:sp>
       <p:sp>
         <p:nvSpPr>
-          <p:cNvPr id="23" name="Text 19"/>
+          <p:cNvPr id="23" name="Text 18"/>
           <p:cNvSpPr/>
           <p:nvPr/>
         </p:nvSpPr>
@@ -11276,7 +11166,7 @@
       </p:sp>
       <p:sp>
         <p:nvSpPr>
-          <p:cNvPr id="24" name="Text 20"/>
+          <p:cNvPr id="24" name="Text 19"/>
           <p:cNvSpPr/>
           <p:nvPr/>
         </p:nvSpPr>
@@ -11318,7 +11208,7 @@
       </p:sp>
       <p:sp>
         <p:nvSpPr>
-          <p:cNvPr id="25" name="Text 21"/>
+          <p:cNvPr id="25" name="Text 20"/>
           <p:cNvSpPr/>
           <p:nvPr/>
         </p:nvSpPr>
@@ -11360,7 +11250,7 @@
       </p:sp>
       <p:sp>
         <p:nvSpPr>
-          <p:cNvPr id="26" name="Text 22"/>
+          <p:cNvPr id="26" name="Text 21"/>
           <p:cNvSpPr/>
           <p:nvPr/>
         </p:nvSpPr>
@@ -11432,112 +11322,9 @@
           <a:chExt cx="0" cy="0"/>
         </a:xfrm>
       </p:grpSpPr>
-      <p:sp>
-        <p:nvSpPr>
-          <p:cNvPr id="2" name="Text 0"/>
-          <p:cNvSpPr/>
-          <p:nvPr/>
-        </p:nvSpPr>
-        <p:spPr>
-          <a:xfrm>
-            <a:off x="0" y="0"/>
-            <a:ext cx="9144000" cy="76200"/>
-          </a:xfrm>
-          <a:prstGeom prst="rect">
-            <a:avLst/>
-          </a:prstGeom>
-          <a:solidFill>
-            <a:srgbClr val="0969DA"/>
-          </a:solidFill>
-          <a:ln/>
-        </p:spPr>
-        <p:txBody>
-          <a:bodyPr wrap="square" rtlCol="0" anchor="ctr"/>
-          <a:lstStyle/>
-          <a:p>
-            <a:pPr indent="0" marL="0">
-              <a:buNone/>
-            </a:pPr>
-            <a:endParaRPr lang="en-US" dirty="0"/>
-          </a:p>
-        </p:txBody>
-      </p:sp>
-      <p:sp>
-        <p:nvSpPr>
-          <p:cNvPr id="3" name="Text 1"/>
-          <p:cNvSpPr/>
-          <p:nvPr/>
-        </p:nvSpPr>
-        <p:spPr>
-          <a:xfrm>
-            <a:off x="7340501" y="177701"/>
-            <a:ext cx="1168301" cy="279350"/>
-          </a:xfrm>
-          <a:prstGeom prst="roundRect">
-            <a:avLst>
-              <a:gd name="adj" fmla="val 22731"/>
-            </a:avLst>
-          </a:prstGeom>
-          <a:solidFill>
-            <a:srgbClr val="1A7F37"/>
-          </a:solidFill>
-          <a:ln/>
-        </p:spPr>
-        <p:txBody>
-          <a:bodyPr wrap="square" rtlCol="0" anchor="ctr"/>
-          <a:lstStyle/>
-          <a:p>
-            <a:pPr indent="0" marL="0">
-              <a:buNone/>
-            </a:pPr>
-            <a:endParaRPr lang="en-US" dirty="0"/>
-          </a:p>
-        </p:txBody>
-      </p:sp>
-      <p:sp>
-        <p:nvSpPr>
-          <p:cNvPr id="4" name="Text 2"/>
-          <p:cNvSpPr/>
-          <p:nvPr/>
-        </p:nvSpPr>
-        <p:spPr>
-          <a:xfrm>
-            <a:off x="7461041" y="231577"/>
-            <a:ext cx="927071" cy="171450"/>
-          </a:xfrm>
-          <a:prstGeom prst="rect">
-            <a:avLst/>
-          </a:prstGeom>
-          <a:noFill/>
-          <a:ln/>
-        </p:spPr>
-        <p:txBody>
-          <a:bodyPr wrap="square" lIns="0" tIns="0" rIns="0" bIns="0" rtlCol="0" anchor="t"/>
-          <a:lstStyle/>
-          <a:p>
-            <a:pPr algn="ctr" indent="0" marL="0">
-              <a:buNone/>
-            </a:pPr>
-            <a:r>
-              <a:rPr lang="en-US" sz="1150" b="1" dirty="0">
-                <a:solidFill>
-                  <a:srgbClr val="FFFFFF"/>
-                </a:solidFill>
-                <a:latin typeface="Arial" pitchFamily="34" charset="0"/>
-                <a:ea typeface="Arial" pitchFamily="34" charset="-122"/>
-                <a:cs typeface="Arial" pitchFamily="34" charset="-120"/>
-              </a:rPr>
-              <a:t>CHAPTER 07</a:t>
-            </a:r>
-            <a:endParaRPr lang="en-US" sz="1150" dirty="0"/>
-          </a:p>
-        </p:txBody>
-      </p:sp>
       <p:pic>
         <p:nvPicPr>
-          <p:cNvPr id="5" name="Image 0" descr="/Users/danwahlin/.copilot/session-state/56a7a0da-def8-48d4-b5e8-0ac3878cb8dd/files/slides-build/icons/FaGithub-1F2328.png">
-            <a:hlinkClick r:id="rId2" tooltip="https://github.com/github/copilot-app-for-beginners/tree/main/07-automations"/>
-          </p:cNvPr>
+          <p:cNvPr id="2" name="Image 0" descr="/Users/danwahlin/.copilot/session-state/56a7a0da-def8-48d4-b5e8-0ac3878cb8dd/files/slides-build/img/grad-corner.png">    </p:cNvPr>
           <p:cNvPicPr>
             <a:picLocks noChangeAspect="1"/>
           </p:cNvPicPr>
@@ -11551,6 +11338,103 @@
         </p:blipFill>
         <p:spPr>
           <a:xfrm>
+            <a:off x="6349901" y="0"/>
+            <a:ext cx="2793950" cy="1308050"/>
+          </a:xfrm>
+          <a:prstGeom prst="rect">
+            <a:avLst/>
+          </a:prstGeom>
+        </p:spPr>
+      </p:pic>
+      <p:sp>
+        <p:nvSpPr>
+          <p:cNvPr id="3" name="Text 0"/>
+          <p:cNvSpPr/>
+          <p:nvPr/>
+        </p:nvSpPr>
+        <p:spPr>
+          <a:xfrm>
+            <a:off x="7340501" y="177701"/>
+            <a:ext cx="1168301" cy="279350"/>
+          </a:xfrm>
+          <a:prstGeom prst="roundRect">
+            <a:avLst>
+              <a:gd name="adj" fmla="val 22731"/>
+            </a:avLst>
+          </a:prstGeom>
+          <a:solidFill>
+            <a:srgbClr val="1A7F37"/>
+          </a:solidFill>
+          <a:ln/>
+        </p:spPr>
+        <p:txBody>
+          <a:bodyPr wrap="square" rtlCol="0" anchor="ctr"/>
+          <a:lstStyle/>
+          <a:p>
+            <a:pPr indent="0" marL="0">
+              <a:buNone/>
+            </a:pPr>
+            <a:endParaRPr lang="en-US" dirty="0"/>
+          </a:p>
+        </p:txBody>
+      </p:sp>
+      <p:sp>
+        <p:nvSpPr>
+          <p:cNvPr id="4" name="Text 1"/>
+          <p:cNvSpPr/>
+          <p:nvPr/>
+        </p:nvSpPr>
+        <p:spPr>
+          <a:xfrm>
+            <a:off x="7461041" y="231577"/>
+            <a:ext cx="927071" cy="171450"/>
+          </a:xfrm>
+          <a:prstGeom prst="rect">
+            <a:avLst/>
+          </a:prstGeom>
+          <a:noFill/>
+          <a:ln/>
+        </p:spPr>
+        <p:txBody>
+          <a:bodyPr wrap="square" lIns="0" tIns="0" rIns="0" bIns="0" rtlCol="0" anchor="t"/>
+          <a:lstStyle/>
+          <a:p>
+            <a:pPr algn="ctr" indent="0" marL="0">
+              <a:buNone/>
+            </a:pPr>
+            <a:r>
+              <a:rPr lang="en-US" sz="1150" b="1" dirty="0">
+                <a:solidFill>
+                  <a:srgbClr val="FFFFFF"/>
+                </a:solidFill>
+                <a:latin typeface="Arial" pitchFamily="34" charset="0"/>
+                <a:ea typeface="Arial" pitchFamily="34" charset="-122"/>
+                <a:cs typeface="Arial" pitchFamily="34" charset="-120"/>
+              </a:rPr>
+              <a:t>CHAPTER 07</a:t>
+            </a:r>
+            <a:endParaRPr lang="en-US" sz="1150" dirty="0"/>
+          </a:p>
+        </p:txBody>
+      </p:sp>
+      <p:pic>
+        <p:nvPicPr>
+          <p:cNvPr id="5" name="Image 1" descr="/Users/danwahlin/.copilot/session-state/56a7a0da-def8-48d4-b5e8-0ac3878cb8dd/files/slides-build/icons/FaGithub-1F2328.png">
+            <a:hlinkClick r:id="rId3" tooltip="https://github.com/github/copilot-app-for-beginners/tree/main/07-automations"/>
+          </p:cNvPr>
+          <p:cNvPicPr>
+            <a:picLocks noChangeAspect="1"/>
+          </p:cNvPicPr>
+          <p:nvPr/>
+        </p:nvPicPr>
+        <p:blipFill>
+          <a:blip r:embed="rId2"/>
+          <a:stretch>
+            <a:fillRect/>
+          </a:stretch>
+        </p:blipFill>
+        <p:spPr>
+          <a:xfrm>
             <a:off x="8610600" y="165050"/>
             <a:ext cx="304800" cy="304800"/>
           </a:xfrm>
@@ -11561,7 +11445,7 @@
       </p:pic>
       <p:sp>
         <p:nvSpPr>
-          <p:cNvPr id="6" name="Text 3"/>
+          <p:cNvPr id="6" name="Text 2"/>
           <p:cNvSpPr/>
           <p:nvPr/>
         </p:nvSpPr>
@@ -11600,7 +11484,7 @@
       </p:sp>
       <p:sp>
         <p:nvSpPr>
-          <p:cNvPr id="7" name="Text 4"/>
+          <p:cNvPr id="7" name="Text 3"/>
           <p:cNvSpPr/>
           <p:nvPr/>
         </p:nvSpPr>
@@ -11645,7 +11529,7 @@
       </p:sp>
       <p:sp>
         <p:nvSpPr>
-          <p:cNvPr id="8" name="Text 5"/>
+          <p:cNvPr id="8" name="Text 4"/>
           <p:cNvSpPr/>
           <p:nvPr/>
         </p:nvSpPr>
@@ -11688,63 +11572,7 @@
       </p:sp>
       <p:pic>
         <p:nvPicPr>
-          <p:cNvPr id="9" name="Image 1" descr="/Users/danwahlin/.copilot/session-state/56a7a0da-def8-48d4-b5e8-0ac3878cb8dd/files/slides-build/img/07-automation-trigger-to-run.jpg">    </p:cNvPr>
-          <p:cNvPicPr>
-            <a:picLocks noChangeAspect="1"/>
-          </p:cNvPicPr>
-          <p:nvPr/>
-        </p:nvPicPr>
-        <p:blipFill>
-          <a:blip r:embed="rId3"/>
-          <a:stretch>
-            <a:fillRect/>
-          </a:stretch>
-        </p:blipFill>
-        <p:spPr>
-          <a:xfrm>
-            <a:off x="558701" y="1680716"/>
-            <a:ext cx="3454301" cy="2302371"/>
-          </a:xfrm>
-          <a:prstGeom prst="rect">
-            <a:avLst/>
-          </a:prstGeom>
-        </p:spPr>
-      </p:pic>
-      <p:sp>
-        <p:nvSpPr>
-          <p:cNvPr id="10" name="Text 6"/>
-          <p:cNvSpPr/>
-          <p:nvPr/>
-        </p:nvSpPr>
-        <p:spPr>
-          <a:xfrm>
-            <a:off x="4419451" y="1734889"/>
-            <a:ext cx="381000" cy="381000"/>
-          </a:xfrm>
-          <a:prstGeom prst="roundRect">
-            <a:avLst>
-              <a:gd name="adj" fmla="val 23333"/>
-            </a:avLst>
-          </a:prstGeom>
-          <a:solidFill>
-            <a:srgbClr val="DDF4FF"/>
-          </a:solidFill>
-          <a:ln/>
-        </p:spPr>
-        <p:txBody>
-          <a:bodyPr wrap="square" rtlCol="0" anchor="ctr"/>
-          <a:lstStyle/>
-          <a:p>
-            <a:pPr indent="0" marL="0">
-              <a:buNone/>
-            </a:pPr>
-            <a:endParaRPr lang="en-US" dirty="0"/>
-          </a:p>
-        </p:txBody>
-      </p:sp>
-      <p:pic>
-        <p:nvPicPr>
-          <p:cNvPr id="11" name="Image 2" descr="/Users/danwahlin/.copilot/session-state/56a7a0da-def8-48d4-b5e8-0ac3878cb8dd/files/slides-build/icons/GoZap-0969DA.png">    </p:cNvPr>
+          <p:cNvPr id="9" name="Image 2" descr="/Users/danwahlin/.copilot/session-state/56a7a0da-def8-48d4-b5e8-0ac3878cb8dd/files/slides-build/img/07-automation-trigger-to-run.jpg">    </p:cNvPr>
           <p:cNvPicPr>
             <a:picLocks noChangeAspect="1"/>
           </p:cNvPicPr>
@@ -11758,8 +11586,8 @@
         </p:blipFill>
         <p:spPr>
           <a:xfrm>
-            <a:off x="4502051" y="1817489"/>
-            <a:ext cx="215801" cy="215801"/>
+            <a:off x="558701" y="1680716"/>
+            <a:ext cx="3454301" cy="2302371"/>
           </a:xfrm>
           <a:prstGeom prst="rect">
             <a:avLst/>
@@ -11768,94 +11596,13 @@
       </p:pic>
       <p:sp>
         <p:nvSpPr>
-          <p:cNvPr id="12" name="Text 7"/>
-          <p:cNvSpPr/>
-          <p:nvPr/>
-        </p:nvSpPr>
-        <p:spPr>
-          <a:xfrm>
-            <a:off x="4952851" y="1699468"/>
-            <a:ext cx="1117586" cy="228600"/>
-          </a:xfrm>
-          <a:prstGeom prst="rect">
-            <a:avLst/>
-          </a:prstGeom>
-          <a:noFill/>
-          <a:ln/>
-        </p:spPr>
-        <p:txBody>
-          <a:bodyPr wrap="square" lIns="0" tIns="0" rIns="0" bIns="0" rtlCol="0" anchor="t"/>
-          <a:lstStyle/>
-          <a:p>
-            <a:pPr algn="l" indent="0" marL="0">
-              <a:buNone/>
-            </a:pPr>
-            <a:r>
-              <a:rPr lang="en-US" sz="1550" b="1" dirty="0">
-                <a:solidFill>
-                  <a:srgbClr val="1F2328"/>
-                </a:solidFill>
-                <a:latin typeface="Arial" pitchFamily="34" charset="0"/>
-                <a:ea typeface="Arial" pitchFamily="34" charset="-122"/>
-                <a:cs typeface="Arial" pitchFamily="34" charset="-120"/>
-              </a:rPr>
-              <a:t>Trigger</a:t>
-            </a:r>
-            <a:endParaRPr lang="en-US" sz="1550" dirty="0"/>
-          </a:p>
-        </p:txBody>
-      </p:sp>
-      <p:sp>
-        <p:nvSpPr>
-          <p:cNvPr id="13" name="Text 8"/>
-          <p:cNvSpPr/>
-          <p:nvPr/>
-        </p:nvSpPr>
-        <p:spPr>
-          <a:xfrm>
-            <a:off x="4952851" y="1953369"/>
-            <a:ext cx="1117586" cy="198090"/>
-          </a:xfrm>
-          <a:prstGeom prst="rect">
-            <a:avLst/>
-          </a:prstGeom>
-          <a:noFill/>
-          <a:ln/>
-        </p:spPr>
-        <p:txBody>
-          <a:bodyPr wrap="square" lIns="0" tIns="0" rIns="0" bIns="0" rtlCol="0" anchor="t"/>
-          <a:lstStyle/>
-          <a:p>
-            <a:pPr algn="l" indent="0" marL="0">
-              <a:lnSpc>
-                <a:spcPts val="1560"/>
-              </a:lnSpc>
-              <a:buNone/>
-            </a:pPr>
-            <a:r>
-              <a:rPr lang="en-US" sz="1350" dirty="0">
-                <a:solidFill>
-                  <a:srgbClr val="59636E"/>
-                </a:solidFill>
-                <a:latin typeface="Arial" pitchFamily="34" charset="0"/>
-                <a:ea typeface="Arial" pitchFamily="34" charset="-122"/>
-                <a:cs typeface="Arial" pitchFamily="34" charset="-120"/>
-              </a:rPr>
-              <a:t>What starts it?</a:t>
-            </a:r>
-            <a:endParaRPr lang="en-US" sz="1350" dirty="0"/>
-          </a:p>
-        </p:txBody>
-      </p:sp>
-      <p:sp>
-        <p:nvSpPr>
-          <p:cNvPr id="14" name="Text 9"/>
-          <p:cNvSpPr/>
-          <p:nvPr/>
-        </p:nvSpPr>
-        <p:spPr>
-          <a:xfrm>
-            <a:off x="4419451" y="2390031"/>
+          <p:cNvPr id="10" name="Text 5"/>
+          <p:cNvSpPr/>
+          <p:nvPr/>
+        </p:nvSpPr>
+        <p:spPr>
+          <a:xfrm>
+            <a:off x="4419451" y="1734889"/>
             <a:ext cx="381000" cy="381000"/>
           </a:xfrm>
           <a:prstGeom prst="roundRect">
@@ -11881,7 +11628,7 @@
       </p:sp>
       <p:pic>
         <p:nvPicPr>
-          <p:cNvPr id="15" name="Image 3" descr="/Users/danwahlin/.copilot/session-state/56a7a0da-def8-48d4-b5e8-0ac3878cb8dd/files/slides-build/icons/GoCopilot-0969DA.png">    </p:cNvPr>
+          <p:cNvPr id="11" name="Image 3" descr="/Users/danwahlin/.copilot/session-state/56a7a0da-def8-48d4-b5e8-0ac3878cb8dd/files/slides-build/icons/GoZap-0969DA.png">    </p:cNvPr>
           <p:cNvPicPr>
             <a:picLocks noChangeAspect="1"/>
           </p:cNvPicPr>
@@ -11895,7 +11642,7 @@
         </p:blipFill>
         <p:spPr>
           <a:xfrm>
-            <a:off x="4502051" y="2472630"/>
+            <a:off x="4502051" y="1817489"/>
             <a:ext cx="215801" cy="215801"/>
           </a:xfrm>
           <a:prstGeom prst="rect">
@@ -11905,14 +11652,14 @@
       </p:pic>
       <p:sp>
         <p:nvSpPr>
-          <p:cNvPr id="16" name="Text 10"/>
-          <p:cNvSpPr/>
-          <p:nvPr/>
-        </p:nvSpPr>
-        <p:spPr>
-          <a:xfrm>
-            <a:off x="4952851" y="2354610"/>
-            <a:ext cx="2090351" cy="228600"/>
+          <p:cNvPr id="12" name="Text 6"/>
+          <p:cNvSpPr/>
+          <p:nvPr/>
+        </p:nvSpPr>
+        <p:spPr>
+          <a:xfrm>
+            <a:off x="4952851" y="1699468"/>
+            <a:ext cx="1117586" cy="228600"/>
           </a:xfrm>
           <a:prstGeom prst="rect">
             <a:avLst/>
@@ -11936,7 +11683,7 @@
                 <a:ea typeface="Arial" pitchFamily="34" charset="-122"/>
                 <a:cs typeface="Arial" pitchFamily="34" charset="-120"/>
               </a:rPr>
-              <a:t>Prompt</a:t>
+              <a:t>Trigger</a:t>
             </a:r>
             <a:endParaRPr lang="en-US" sz="1550" dirty="0"/>
           </a:p>
@@ -11944,14 +11691,14 @@
       </p:sp>
       <p:sp>
         <p:nvSpPr>
-          <p:cNvPr id="17" name="Text 11"/>
-          <p:cNvSpPr/>
-          <p:nvPr/>
-        </p:nvSpPr>
-        <p:spPr>
-          <a:xfrm>
-            <a:off x="4952851" y="2608511"/>
-            <a:ext cx="2090351" cy="198090"/>
+          <p:cNvPr id="13" name="Text 7"/>
+          <p:cNvSpPr/>
+          <p:nvPr/>
+        </p:nvSpPr>
+        <p:spPr>
+          <a:xfrm>
+            <a:off x="4952851" y="1953369"/>
+            <a:ext cx="1117586" cy="198090"/>
           </a:xfrm>
           <a:prstGeom prst="rect">
             <a:avLst/>
@@ -11978,7 +11725,7 @@
                 <a:ea typeface="Arial" pitchFamily="34" charset="-122"/>
                 <a:cs typeface="Arial" pitchFamily="34" charset="-120"/>
               </a:rPr>
-              <a:t>What should the agent do?</a:t>
+              <a:t>What starts it?</a:t>
             </a:r>
             <a:endParaRPr lang="en-US" sz="1350" dirty="0"/>
           </a:p>
@@ -11986,13 +11733,13 @@
       </p:sp>
       <p:sp>
         <p:nvSpPr>
-          <p:cNvPr id="18" name="Text 12"/>
-          <p:cNvSpPr/>
-          <p:nvPr/>
-        </p:nvSpPr>
-        <p:spPr>
-          <a:xfrm>
-            <a:off x="4419451" y="3045172"/>
+          <p:cNvPr id="14" name="Text 8"/>
+          <p:cNvSpPr/>
+          <p:nvPr/>
+        </p:nvSpPr>
+        <p:spPr>
+          <a:xfrm>
+            <a:off x="4419451" y="2390031"/>
             <a:ext cx="381000" cy="381000"/>
           </a:xfrm>
           <a:prstGeom prst="roundRect">
@@ -12018,7 +11765,7 @@
       </p:sp>
       <p:pic>
         <p:nvPicPr>
-          <p:cNvPr id="19" name="Image 4" descr="/Users/danwahlin/.copilot/session-state/56a7a0da-def8-48d4-b5e8-0ac3878cb8dd/files/slides-build/icons/GoLock-0969DA.png">    </p:cNvPr>
+          <p:cNvPr id="15" name="Image 4" descr="/Users/danwahlin/.copilot/session-state/56a7a0da-def8-48d4-b5e8-0ac3878cb8dd/files/slides-build/icons/GoCopilot-0969DA.png">    </p:cNvPr>
           <p:cNvPicPr>
             <a:picLocks noChangeAspect="1"/>
           </p:cNvPicPr>
@@ -12032,7 +11779,7 @@
         </p:blipFill>
         <p:spPr>
           <a:xfrm>
-            <a:off x="4502051" y="3127772"/>
+            <a:off x="4502051" y="2472630"/>
             <a:ext cx="215801" cy="215801"/>
           </a:xfrm>
           <a:prstGeom prst="rect">
@@ -12042,14 +11789,14 @@
       </p:pic>
       <p:sp>
         <p:nvSpPr>
-          <p:cNvPr id="20" name="Text 13"/>
-          <p:cNvSpPr/>
-          <p:nvPr/>
-        </p:nvSpPr>
-        <p:spPr>
-          <a:xfrm>
-            <a:off x="4952851" y="3009751"/>
-            <a:ext cx="2614988" cy="228600"/>
+          <p:cNvPr id="16" name="Text 9"/>
+          <p:cNvSpPr/>
+          <p:nvPr/>
+        </p:nvSpPr>
+        <p:spPr>
+          <a:xfrm>
+            <a:off x="4952851" y="2354610"/>
+            <a:ext cx="2090351" cy="228600"/>
           </a:xfrm>
           <a:prstGeom prst="rect">
             <a:avLst/>
@@ -12073,7 +11820,7 @@
                 <a:ea typeface="Arial" pitchFamily="34" charset="-122"/>
                 <a:cs typeface="Arial" pitchFamily="34" charset="-120"/>
               </a:rPr>
-              <a:t>Tools</a:t>
+              <a:t>Prompt</a:t>
             </a:r>
             <a:endParaRPr lang="en-US" sz="1550" dirty="0"/>
           </a:p>
@@ -12081,14 +11828,14 @@
       </p:sp>
       <p:sp>
         <p:nvSpPr>
-          <p:cNvPr id="21" name="Text 14"/>
-          <p:cNvSpPr/>
-          <p:nvPr/>
-        </p:nvSpPr>
-        <p:spPr>
-          <a:xfrm>
-            <a:off x="4952851" y="3263652"/>
-            <a:ext cx="2614988" cy="198090"/>
+          <p:cNvPr id="17" name="Text 10"/>
+          <p:cNvSpPr/>
+          <p:nvPr/>
+        </p:nvSpPr>
+        <p:spPr>
+          <a:xfrm>
+            <a:off x="4952851" y="2608511"/>
+            <a:ext cx="2090351" cy="198090"/>
           </a:xfrm>
           <a:prstGeom prst="rect">
             <a:avLst/>
@@ -12115,7 +11862,7 @@
                 <a:ea typeface="Arial" pitchFamily="34" charset="-122"/>
                 <a:cs typeface="Arial" pitchFamily="34" charset="-120"/>
               </a:rPr>
-              <a:t>What is the least access needed?</a:t>
+              <a:t>What should the agent do?</a:t>
             </a:r>
             <a:endParaRPr lang="en-US" sz="1350" dirty="0"/>
           </a:p>
@@ -12123,13 +11870,13 @@
       </p:sp>
       <p:sp>
         <p:nvSpPr>
-          <p:cNvPr id="22" name="Text 15"/>
-          <p:cNvSpPr/>
-          <p:nvPr/>
-        </p:nvSpPr>
-        <p:spPr>
-          <a:xfrm>
-            <a:off x="4419451" y="3700314"/>
+          <p:cNvPr id="18" name="Text 11"/>
+          <p:cNvSpPr/>
+          <p:nvPr/>
+        </p:nvSpPr>
+        <p:spPr>
+          <a:xfrm>
+            <a:off x="4419451" y="3045172"/>
             <a:ext cx="381000" cy="381000"/>
           </a:xfrm>
           <a:prstGeom prst="roundRect">
@@ -12155,7 +11902,7 @@
       </p:sp>
       <p:pic>
         <p:nvPicPr>
-          <p:cNvPr id="23" name="Image 5" descr="/Users/danwahlin/.copilot/session-state/56a7a0da-def8-48d4-b5e8-0ac3878cb8dd/files/slides-build/icons/GoEye-0969DA.png">    </p:cNvPr>
+          <p:cNvPr id="19" name="Image 5" descr="/Users/danwahlin/.copilot/session-state/56a7a0da-def8-48d4-b5e8-0ac3878cb8dd/files/slides-build/icons/GoLock-0969DA.png">    </p:cNvPr>
           <p:cNvPicPr>
             <a:picLocks noChangeAspect="1"/>
           </p:cNvPicPr>
@@ -12169,6 +11916,143 @@
         </p:blipFill>
         <p:spPr>
           <a:xfrm>
+            <a:off x="4502051" y="3127772"/>
+            <a:ext cx="215801" cy="215801"/>
+          </a:xfrm>
+          <a:prstGeom prst="rect">
+            <a:avLst/>
+          </a:prstGeom>
+        </p:spPr>
+      </p:pic>
+      <p:sp>
+        <p:nvSpPr>
+          <p:cNvPr id="20" name="Text 12"/>
+          <p:cNvSpPr/>
+          <p:nvPr/>
+        </p:nvSpPr>
+        <p:spPr>
+          <a:xfrm>
+            <a:off x="4952851" y="3009751"/>
+            <a:ext cx="2614988" cy="228600"/>
+          </a:xfrm>
+          <a:prstGeom prst="rect">
+            <a:avLst/>
+          </a:prstGeom>
+          <a:noFill/>
+          <a:ln/>
+        </p:spPr>
+        <p:txBody>
+          <a:bodyPr wrap="square" lIns="0" tIns="0" rIns="0" bIns="0" rtlCol="0" anchor="t"/>
+          <a:lstStyle/>
+          <a:p>
+            <a:pPr algn="l" indent="0" marL="0">
+              <a:buNone/>
+            </a:pPr>
+            <a:r>
+              <a:rPr lang="en-US" sz="1550" b="1" dirty="0">
+                <a:solidFill>
+                  <a:srgbClr val="1F2328"/>
+                </a:solidFill>
+                <a:latin typeface="Arial" pitchFamily="34" charset="0"/>
+                <a:ea typeface="Arial" pitchFamily="34" charset="-122"/>
+                <a:cs typeface="Arial" pitchFamily="34" charset="-120"/>
+              </a:rPr>
+              <a:t>Tools</a:t>
+            </a:r>
+            <a:endParaRPr lang="en-US" sz="1550" dirty="0"/>
+          </a:p>
+        </p:txBody>
+      </p:sp>
+      <p:sp>
+        <p:nvSpPr>
+          <p:cNvPr id="21" name="Text 13"/>
+          <p:cNvSpPr/>
+          <p:nvPr/>
+        </p:nvSpPr>
+        <p:spPr>
+          <a:xfrm>
+            <a:off x="4952851" y="3263652"/>
+            <a:ext cx="2614988" cy="198090"/>
+          </a:xfrm>
+          <a:prstGeom prst="rect">
+            <a:avLst/>
+          </a:prstGeom>
+          <a:noFill/>
+          <a:ln/>
+        </p:spPr>
+        <p:txBody>
+          <a:bodyPr wrap="square" lIns="0" tIns="0" rIns="0" bIns="0" rtlCol="0" anchor="t"/>
+          <a:lstStyle/>
+          <a:p>
+            <a:pPr algn="l" indent="0" marL="0">
+              <a:lnSpc>
+                <a:spcPts val="1560"/>
+              </a:lnSpc>
+              <a:buNone/>
+            </a:pPr>
+            <a:r>
+              <a:rPr lang="en-US" sz="1350" dirty="0">
+                <a:solidFill>
+                  <a:srgbClr val="59636E"/>
+                </a:solidFill>
+                <a:latin typeface="Arial" pitchFamily="34" charset="0"/>
+                <a:ea typeface="Arial" pitchFamily="34" charset="-122"/>
+                <a:cs typeface="Arial" pitchFamily="34" charset="-120"/>
+              </a:rPr>
+              <a:t>What is the least access needed?</a:t>
+            </a:r>
+            <a:endParaRPr lang="en-US" sz="1350" dirty="0"/>
+          </a:p>
+        </p:txBody>
+      </p:sp>
+      <p:sp>
+        <p:nvSpPr>
+          <p:cNvPr id="22" name="Text 14"/>
+          <p:cNvSpPr/>
+          <p:nvPr/>
+        </p:nvSpPr>
+        <p:spPr>
+          <a:xfrm>
+            <a:off x="4419451" y="3700314"/>
+            <a:ext cx="381000" cy="381000"/>
+          </a:xfrm>
+          <a:prstGeom prst="roundRect">
+            <a:avLst>
+              <a:gd name="adj" fmla="val 23333"/>
+            </a:avLst>
+          </a:prstGeom>
+          <a:solidFill>
+            <a:srgbClr val="DDF4FF"/>
+          </a:solidFill>
+          <a:ln/>
+        </p:spPr>
+        <p:txBody>
+          <a:bodyPr wrap="square" rtlCol="0" anchor="ctr"/>
+          <a:lstStyle/>
+          <a:p>
+            <a:pPr indent="0" marL="0">
+              <a:buNone/>
+            </a:pPr>
+            <a:endParaRPr lang="en-US" dirty="0"/>
+          </a:p>
+        </p:txBody>
+      </p:sp>
+      <p:pic>
+        <p:nvPicPr>
+          <p:cNvPr id="23" name="Image 6" descr="/Users/danwahlin/.copilot/session-state/56a7a0da-def8-48d4-b5e8-0ac3878cb8dd/files/slides-build/icons/GoEye-0969DA.png">    </p:cNvPr>
+          <p:cNvPicPr>
+            <a:picLocks noChangeAspect="1"/>
+          </p:cNvPicPr>
+          <p:nvPr/>
+        </p:nvPicPr>
+        <p:blipFill>
+          <a:blip r:embed="rId8"/>
+          <a:stretch>
+            <a:fillRect/>
+          </a:stretch>
+        </p:blipFill>
+        <p:spPr>
+          <a:xfrm>
             <a:off x="4502051" y="3782913"/>
             <a:ext cx="215801" cy="215801"/>
           </a:xfrm>
@@ -12179,7 +12063,7 @@
       </p:pic>
       <p:sp>
         <p:nvSpPr>
-          <p:cNvPr id="24" name="Text 16"/>
+          <p:cNvPr id="24" name="Text 15"/>
           <p:cNvSpPr/>
           <p:nvPr/>
         </p:nvSpPr>
@@ -12218,7 +12102,7 @@
       </p:sp>
       <p:sp>
         <p:nvSpPr>
-          <p:cNvPr id="25" name="Text 17"/>
+          <p:cNvPr id="25" name="Text 16"/>
           <p:cNvSpPr/>
           <p:nvPr/>
         </p:nvSpPr>
@@ -12290,112 +12174,9 @@
           <a:chExt cx="0" cy="0"/>
         </a:xfrm>
       </p:grpSpPr>
-      <p:sp>
-        <p:nvSpPr>
-          <p:cNvPr id="2" name="Text 0"/>
-          <p:cNvSpPr/>
-          <p:nvPr/>
-        </p:nvSpPr>
-        <p:spPr>
-          <a:xfrm>
-            <a:off x="0" y="0"/>
-            <a:ext cx="9144000" cy="76200"/>
-          </a:xfrm>
-          <a:prstGeom prst="rect">
-            <a:avLst/>
-          </a:prstGeom>
-          <a:solidFill>
-            <a:srgbClr val="0969DA"/>
-          </a:solidFill>
-          <a:ln/>
-        </p:spPr>
-        <p:txBody>
-          <a:bodyPr wrap="square" rtlCol="0" anchor="ctr"/>
-          <a:lstStyle/>
-          <a:p>
-            <a:pPr indent="0" marL="0">
-              <a:buNone/>
-            </a:pPr>
-            <a:endParaRPr lang="en-US" dirty="0"/>
-          </a:p>
-        </p:txBody>
-      </p:sp>
-      <p:sp>
-        <p:nvSpPr>
-          <p:cNvPr id="3" name="Text 1"/>
-          <p:cNvSpPr/>
-          <p:nvPr/>
-        </p:nvSpPr>
-        <p:spPr>
-          <a:xfrm>
-            <a:off x="7340501" y="177701"/>
-            <a:ext cx="1168301" cy="279350"/>
-          </a:xfrm>
-          <a:prstGeom prst="roundRect">
-            <a:avLst>
-              <a:gd name="adj" fmla="val 22731"/>
-            </a:avLst>
-          </a:prstGeom>
-          <a:solidFill>
-            <a:srgbClr val="1A7F37"/>
-          </a:solidFill>
-          <a:ln/>
-        </p:spPr>
-        <p:txBody>
-          <a:bodyPr wrap="square" rtlCol="0" anchor="ctr"/>
-          <a:lstStyle/>
-          <a:p>
-            <a:pPr indent="0" marL="0">
-              <a:buNone/>
-            </a:pPr>
-            <a:endParaRPr lang="en-US" dirty="0"/>
-          </a:p>
-        </p:txBody>
-      </p:sp>
-      <p:sp>
-        <p:nvSpPr>
-          <p:cNvPr id="4" name="Text 2"/>
-          <p:cNvSpPr/>
-          <p:nvPr/>
-        </p:nvSpPr>
-        <p:spPr>
-          <a:xfrm>
-            <a:off x="7461041" y="231577"/>
-            <a:ext cx="927071" cy="171450"/>
-          </a:xfrm>
-          <a:prstGeom prst="rect">
-            <a:avLst/>
-          </a:prstGeom>
-          <a:noFill/>
-          <a:ln/>
-        </p:spPr>
-        <p:txBody>
-          <a:bodyPr wrap="square" lIns="0" tIns="0" rIns="0" bIns="0" rtlCol="0" anchor="t"/>
-          <a:lstStyle/>
-          <a:p>
-            <a:pPr algn="ctr" indent="0" marL="0">
-              <a:buNone/>
-            </a:pPr>
-            <a:r>
-              <a:rPr lang="en-US" sz="1150" b="1" dirty="0">
-                <a:solidFill>
-                  <a:srgbClr val="FFFFFF"/>
-                </a:solidFill>
-                <a:latin typeface="Arial" pitchFamily="34" charset="0"/>
-                <a:ea typeface="Arial" pitchFamily="34" charset="-122"/>
-                <a:cs typeface="Arial" pitchFamily="34" charset="-120"/>
-              </a:rPr>
-              <a:t>CHAPTER 07</a:t>
-            </a:r>
-            <a:endParaRPr lang="en-US" sz="1150" dirty="0"/>
-          </a:p>
-        </p:txBody>
-      </p:sp>
       <p:pic>
         <p:nvPicPr>
-          <p:cNvPr id="5" name="Image 0" descr="/Users/danwahlin/.copilot/session-state/56a7a0da-def8-48d4-b5e8-0ac3878cb8dd/files/slides-build/icons/FaGithub-1F2328.png">
-            <a:hlinkClick r:id="rId2" tooltip="https://github.com/github/copilot-app-for-beginners/tree/main/07-automations"/>
-          </p:cNvPr>
+          <p:cNvPr id="2" name="Image 0" descr="/Users/danwahlin/.copilot/session-state/56a7a0da-def8-48d4-b5e8-0ac3878cb8dd/files/slides-build/img/grad-corner.png">    </p:cNvPr>
           <p:cNvPicPr>
             <a:picLocks noChangeAspect="1"/>
           </p:cNvPicPr>
@@ -12409,6 +12190,103 @@
         </p:blipFill>
         <p:spPr>
           <a:xfrm>
+            <a:off x="6349901" y="0"/>
+            <a:ext cx="2793950" cy="1308050"/>
+          </a:xfrm>
+          <a:prstGeom prst="rect">
+            <a:avLst/>
+          </a:prstGeom>
+        </p:spPr>
+      </p:pic>
+      <p:sp>
+        <p:nvSpPr>
+          <p:cNvPr id="3" name="Text 0"/>
+          <p:cNvSpPr/>
+          <p:nvPr/>
+        </p:nvSpPr>
+        <p:spPr>
+          <a:xfrm>
+            <a:off x="7340501" y="177701"/>
+            <a:ext cx="1168301" cy="279350"/>
+          </a:xfrm>
+          <a:prstGeom prst="roundRect">
+            <a:avLst>
+              <a:gd name="adj" fmla="val 22731"/>
+            </a:avLst>
+          </a:prstGeom>
+          <a:solidFill>
+            <a:srgbClr val="1A7F37"/>
+          </a:solidFill>
+          <a:ln/>
+        </p:spPr>
+        <p:txBody>
+          <a:bodyPr wrap="square" rtlCol="0" anchor="ctr"/>
+          <a:lstStyle/>
+          <a:p>
+            <a:pPr indent="0" marL="0">
+              <a:buNone/>
+            </a:pPr>
+            <a:endParaRPr lang="en-US" dirty="0"/>
+          </a:p>
+        </p:txBody>
+      </p:sp>
+      <p:sp>
+        <p:nvSpPr>
+          <p:cNvPr id="4" name="Text 1"/>
+          <p:cNvSpPr/>
+          <p:nvPr/>
+        </p:nvSpPr>
+        <p:spPr>
+          <a:xfrm>
+            <a:off x="7461041" y="231577"/>
+            <a:ext cx="927071" cy="171450"/>
+          </a:xfrm>
+          <a:prstGeom prst="rect">
+            <a:avLst/>
+          </a:prstGeom>
+          <a:noFill/>
+          <a:ln/>
+        </p:spPr>
+        <p:txBody>
+          <a:bodyPr wrap="square" lIns="0" tIns="0" rIns="0" bIns="0" rtlCol="0" anchor="t"/>
+          <a:lstStyle/>
+          <a:p>
+            <a:pPr algn="ctr" indent="0" marL="0">
+              <a:buNone/>
+            </a:pPr>
+            <a:r>
+              <a:rPr lang="en-US" sz="1150" b="1" dirty="0">
+                <a:solidFill>
+                  <a:srgbClr val="FFFFFF"/>
+                </a:solidFill>
+                <a:latin typeface="Arial" pitchFamily="34" charset="0"/>
+                <a:ea typeface="Arial" pitchFamily="34" charset="-122"/>
+                <a:cs typeface="Arial" pitchFamily="34" charset="-120"/>
+              </a:rPr>
+              <a:t>CHAPTER 07</a:t>
+            </a:r>
+            <a:endParaRPr lang="en-US" sz="1150" dirty="0"/>
+          </a:p>
+        </p:txBody>
+      </p:sp>
+      <p:pic>
+        <p:nvPicPr>
+          <p:cNvPr id="5" name="Image 1" descr="/Users/danwahlin/.copilot/session-state/56a7a0da-def8-48d4-b5e8-0ac3878cb8dd/files/slides-build/icons/FaGithub-1F2328.png">
+            <a:hlinkClick r:id="rId3" tooltip="https://github.com/github/copilot-app-for-beginners/tree/main/07-automations"/>
+          </p:cNvPr>
+          <p:cNvPicPr>
+            <a:picLocks noChangeAspect="1"/>
+          </p:cNvPicPr>
+          <p:nvPr/>
+        </p:nvPicPr>
+        <p:blipFill>
+          <a:blip r:embed="rId2"/>
+          <a:stretch>
+            <a:fillRect/>
+          </a:stretch>
+        </p:blipFill>
+        <p:spPr>
+          <a:xfrm>
             <a:off x="8610600" y="165050"/>
             <a:ext cx="304800" cy="304800"/>
           </a:xfrm>
@@ -12419,7 +12297,7 @@
       </p:pic>
       <p:sp>
         <p:nvSpPr>
-          <p:cNvPr id="6" name="Text 3"/>
+          <p:cNvPr id="6" name="Text 2"/>
           <p:cNvSpPr/>
           <p:nvPr/>
         </p:nvSpPr>
@@ -12458,7 +12336,7 @@
       </p:sp>
       <p:sp>
         <p:nvSpPr>
-          <p:cNvPr id="7" name="Text 4"/>
+          <p:cNvPr id="7" name="Text 3"/>
           <p:cNvSpPr/>
           <p:nvPr/>
         </p:nvSpPr>
@@ -12503,7 +12381,7 @@
       </p:sp>
       <p:sp>
         <p:nvSpPr>
-          <p:cNvPr id="8" name="Text 5"/>
+          <p:cNvPr id="8" name="Text 4"/>
           <p:cNvSpPr/>
           <p:nvPr/>
         </p:nvSpPr>
@@ -12548,7 +12426,7 @@
       </p:sp>
       <p:sp>
         <p:nvSpPr>
-          <p:cNvPr id="9" name="Text 6"/>
+          <p:cNvPr id="9" name="Text 5"/>
           <p:cNvSpPr/>
           <p:nvPr/>
         </p:nvSpPr>
@@ -12591,14 +12469,14 @@
       </p:sp>
       <p:pic>
         <p:nvPicPr>
-          <p:cNvPr id="10" name="Image 1" descr="/Users/danwahlin/.copilot/session-state/56a7a0da-def8-48d4-b5e8-0ac3878cb8dd/files/slides-build/img/07-manual-first-path.jpg">    </p:cNvPr>
+          <p:cNvPr id="10" name="Image 2" descr="/Users/danwahlin/.copilot/session-state/56a7a0da-def8-48d4-b5e8-0ac3878cb8dd/files/slides-build/img/07-manual-first-path.jpg">    </p:cNvPr>
           <p:cNvPicPr>
             <a:picLocks noChangeAspect="1"/>
           </p:cNvPicPr>
           <p:nvPr/>
         </p:nvPicPr>
         <p:blipFill>
-          <a:blip r:embed="rId3"/>
+          <a:blip r:embed="rId4"/>
           <a:stretch>
             <a:fillRect/>
           </a:stretch>
@@ -12615,7 +12493,7 @@
       </p:pic>
       <p:sp>
         <p:nvSpPr>
-          <p:cNvPr id="11" name="Text 7"/>
+          <p:cNvPr id="11" name="Text 6"/>
           <p:cNvSpPr/>
           <p:nvPr/>
         </p:nvSpPr>
@@ -12651,7 +12529,7 @@
       </p:sp>
       <p:sp>
         <p:nvSpPr>
-          <p:cNvPr id="12" name="Text 8"/>
+          <p:cNvPr id="12" name="Text 7"/>
           <p:cNvSpPr/>
           <p:nvPr/>
         </p:nvSpPr>
@@ -12683,14 +12561,14 @@
       </p:sp>
       <p:pic>
         <p:nvPicPr>
-          <p:cNvPr id="13" name="Image 2" descr="/Users/danwahlin/.copilot/session-state/56a7a0da-def8-48d4-b5e8-0ac3878cb8dd/files/slides-build/icons/GoCheckCircle-1A7F37.png">    </p:cNvPr>
+          <p:cNvPr id="13" name="Image 3" descr="/Users/danwahlin/.copilot/session-state/56a7a0da-def8-48d4-b5e8-0ac3878cb8dd/files/slides-build/icons/GoCheckCircle-1A7F37.png">    </p:cNvPr>
           <p:cNvPicPr>
             <a:picLocks noChangeAspect="1"/>
           </p:cNvPicPr>
           <p:nvPr/>
         </p:nvPicPr>
         <p:blipFill>
-          <a:blip r:embed="rId4"/>
+          <a:blip r:embed="rId5"/>
           <a:stretch>
             <a:fillRect/>
           </a:stretch>
@@ -12707,7 +12585,7 @@
       </p:pic>
       <p:sp>
         <p:nvSpPr>
-          <p:cNvPr id="14" name="Text 9"/>
+          <p:cNvPr id="14" name="Text 8"/>
           <p:cNvSpPr/>
           <p:nvPr/>
         </p:nvSpPr>
@@ -12749,7 +12627,7 @@
       </p:sp>
       <p:sp>
         <p:nvSpPr>
-          <p:cNvPr id="15" name="Text 10"/>
+          <p:cNvPr id="15" name="Text 9"/>
           <p:cNvSpPr/>
           <p:nvPr/>
         </p:nvSpPr>
@@ -12791,7 +12669,7 @@
       </p:sp>
       <p:sp>
         <p:nvSpPr>
-          <p:cNvPr id="16" name="Text 11"/>
+          <p:cNvPr id="16" name="Text 10"/>
           <p:cNvSpPr/>
           <p:nvPr/>
         </p:nvSpPr>
@@ -12827,7 +12705,7 @@
       </p:sp>
       <p:sp>
         <p:nvSpPr>
-          <p:cNvPr id="17" name="Text 12"/>
+          <p:cNvPr id="17" name="Text 11"/>
           <p:cNvSpPr/>
           <p:nvPr/>
         </p:nvSpPr>
@@ -12859,14 +12737,14 @@
       </p:sp>
       <p:pic>
         <p:nvPicPr>
-          <p:cNvPr id="18" name="Image 3" descr="/Users/danwahlin/.copilot/session-state/56a7a0da-def8-48d4-b5e8-0ac3878cb8dd/files/slides-build/icons/GoX-CF222E.png">    </p:cNvPr>
+          <p:cNvPr id="18" name="Image 4" descr="/Users/danwahlin/.copilot/session-state/56a7a0da-def8-48d4-b5e8-0ac3878cb8dd/files/slides-build/icons/GoX-CF222E.png">    </p:cNvPr>
           <p:cNvPicPr>
             <a:picLocks noChangeAspect="1"/>
           </p:cNvPicPr>
           <p:nvPr/>
         </p:nvPicPr>
         <p:blipFill>
-          <a:blip r:embed="rId5"/>
+          <a:blip r:embed="rId6"/>
           <a:stretch>
             <a:fillRect/>
           </a:stretch>
@@ -12883,7 +12761,7 @@
       </p:pic>
       <p:sp>
         <p:nvSpPr>
-          <p:cNvPr id="19" name="Text 13"/>
+          <p:cNvPr id="19" name="Text 12"/>
           <p:cNvSpPr/>
           <p:nvPr/>
         </p:nvSpPr>
@@ -12925,7 +12803,7 @@
       </p:sp>
       <p:sp>
         <p:nvSpPr>
-          <p:cNvPr id="20" name="Text 14"/>
+          <p:cNvPr id="20" name="Text 13"/>
           <p:cNvSpPr/>
           <p:nvPr/>
         </p:nvSpPr>
@@ -13099,82 +12977,9 @@
           </a:p>
         </p:txBody>
       </p:sp>
-      <p:sp>
-        <p:nvSpPr>
-          <p:cNvPr id="5" name="Text 3"/>
-          <p:cNvSpPr/>
-          <p:nvPr/>
-        </p:nvSpPr>
-        <p:spPr>
-          <a:xfrm>
-            <a:off x="7340501" y="177701"/>
-            <a:ext cx="1168301" cy="279350"/>
-          </a:xfrm>
-          <a:prstGeom prst="roundRect">
-            <a:avLst>
-              <a:gd name="adj" fmla="val 22731"/>
-            </a:avLst>
-          </a:prstGeom>
-          <a:solidFill>
-            <a:srgbClr val="1A7F37"/>
-          </a:solidFill>
-          <a:ln/>
-        </p:spPr>
-        <p:txBody>
-          <a:bodyPr wrap="square" rtlCol="0" anchor="ctr"/>
-          <a:lstStyle/>
-          <a:p>
-            <a:pPr indent="0" marL="0">
-              <a:buNone/>
-            </a:pPr>
-            <a:endParaRPr lang="en-US" dirty="0"/>
-          </a:p>
-        </p:txBody>
-      </p:sp>
-      <p:sp>
-        <p:nvSpPr>
-          <p:cNvPr id="6" name="Text 4"/>
-          <p:cNvSpPr/>
-          <p:nvPr/>
-        </p:nvSpPr>
-        <p:spPr>
-          <a:xfrm>
-            <a:off x="7461041" y="231577"/>
-            <a:ext cx="927071" cy="171450"/>
-          </a:xfrm>
-          <a:prstGeom prst="rect">
-            <a:avLst/>
-          </a:prstGeom>
-          <a:noFill/>
-          <a:ln/>
-        </p:spPr>
-        <p:txBody>
-          <a:bodyPr wrap="square" lIns="0" tIns="0" rIns="0" bIns="0" rtlCol="0" anchor="t"/>
-          <a:lstStyle/>
-          <a:p>
-            <a:pPr algn="ctr" indent="0" marL="0">
-              <a:buNone/>
-            </a:pPr>
-            <a:r>
-              <a:rPr lang="en-US" sz="1150" b="1" dirty="0">
-                <a:solidFill>
-                  <a:srgbClr val="FFFFFF"/>
-                </a:solidFill>
-                <a:latin typeface="Arial" pitchFamily="34" charset="0"/>
-                <a:ea typeface="Arial" pitchFamily="34" charset="-122"/>
-                <a:cs typeface="Arial" pitchFamily="34" charset="-120"/>
-              </a:rPr>
-              <a:t>CHAPTER 07</a:t>
-            </a:r>
-            <a:endParaRPr lang="en-US" sz="1150" dirty="0"/>
-          </a:p>
-        </p:txBody>
-      </p:sp>
       <p:pic>
         <p:nvPicPr>
-          <p:cNvPr id="7" name="Image 0" descr="/Users/danwahlin/.copilot/session-state/56a7a0da-def8-48d4-b5e8-0ac3878cb8dd/files/slides-build/icons/FaGithub-1F2328.png">
-            <a:hlinkClick r:id="rId2" tooltip="https://github.com/github/copilot-app-for-beginners/tree/main/07-automations"/>
-          </p:cNvPr>
+          <p:cNvPr id="5" name="Image 0" descr="/Users/danwahlin/.copilot/session-state/56a7a0da-def8-48d4-b5e8-0ac3878cb8dd/files/slides-build/img/grad-corner.png">    </p:cNvPr>
           <p:cNvPicPr>
             <a:picLocks noChangeAspect="1"/>
           </p:cNvPicPr>
@@ -13188,6 +12993,103 @@
         </p:blipFill>
         <p:spPr>
           <a:xfrm>
+            <a:off x="6349901" y="0"/>
+            <a:ext cx="2793950" cy="1308050"/>
+          </a:xfrm>
+          <a:prstGeom prst="rect">
+            <a:avLst/>
+          </a:prstGeom>
+        </p:spPr>
+      </p:pic>
+      <p:sp>
+        <p:nvSpPr>
+          <p:cNvPr id="6" name="Text 3"/>
+          <p:cNvSpPr/>
+          <p:nvPr/>
+        </p:nvSpPr>
+        <p:spPr>
+          <a:xfrm>
+            <a:off x="7340501" y="177701"/>
+            <a:ext cx="1168301" cy="279350"/>
+          </a:xfrm>
+          <a:prstGeom prst="roundRect">
+            <a:avLst>
+              <a:gd name="adj" fmla="val 22731"/>
+            </a:avLst>
+          </a:prstGeom>
+          <a:solidFill>
+            <a:srgbClr val="1A7F37"/>
+          </a:solidFill>
+          <a:ln/>
+        </p:spPr>
+        <p:txBody>
+          <a:bodyPr wrap="square" rtlCol="0" anchor="ctr"/>
+          <a:lstStyle/>
+          <a:p>
+            <a:pPr indent="0" marL="0">
+              <a:buNone/>
+            </a:pPr>
+            <a:endParaRPr lang="en-US" dirty="0"/>
+          </a:p>
+        </p:txBody>
+      </p:sp>
+      <p:sp>
+        <p:nvSpPr>
+          <p:cNvPr id="7" name="Text 4"/>
+          <p:cNvSpPr/>
+          <p:nvPr/>
+        </p:nvSpPr>
+        <p:spPr>
+          <a:xfrm>
+            <a:off x="7461041" y="231577"/>
+            <a:ext cx="927071" cy="171450"/>
+          </a:xfrm>
+          <a:prstGeom prst="rect">
+            <a:avLst/>
+          </a:prstGeom>
+          <a:noFill/>
+          <a:ln/>
+        </p:spPr>
+        <p:txBody>
+          <a:bodyPr wrap="square" lIns="0" tIns="0" rIns="0" bIns="0" rtlCol="0" anchor="t"/>
+          <a:lstStyle/>
+          <a:p>
+            <a:pPr algn="ctr" indent="0" marL="0">
+              <a:buNone/>
+            </a:pPr>
+            <a:r>
+              <a:rPr lang="en-US" sz="1150" b="1" dirty="0">
+                <a:solidFill>
+                  <a:srgbClr val="FFFFFF"/>
+                </a:solidFill>
+                <a:latin typeface="Arial" pitchFamily="34" charset="0"/>
+                <a:ea typeface="Arial" pitchFamily="34" charset="-122"/>
+                <a:cs typeface="Arial" pitchFamily="34" charset="-120"/>
+              </a:rPr>
+              <a:t>CHAPTER 07</a:t>
+            </a:r>
+            <a:endParaRPr lang="en-US" sz="1150" dirty="0"/>
+          </a:p>
+        </p:txBody>
+      </p:sp>
+      <p:pic>
+        <p:nvPicPr>
+          <p:cNvPr id="8" name="Image 1" descr="/Users/danwahlin/.copilot/session-state/56a7a0da-def8-48d4-b5e8-0ac3878cb8dd/files/slides-build/icons/FaGithub-1F2328.png">
+            <a:hlinkClick r:id="rId3" tooltip="https://github.com/github/copilot-app-for-beginners/tree/main/07-automations"/>
+          </p:cNvPr>
+          <p:cNvPicPr>
+            <a:picLocks noChangeAspect="1"/>
+          </p:cNvPicPr>
+          <p:nvPr/>
+        </p:nvPicPr>
+        <p:blipFill>
+          <a:blip r:embed="rId2"/>
+          <a:stretch>
+            <a:fillRect/>
+          </a:stretch>
+        </p:blipFill>
+        <p:spPr>
+          <a:xfrm>
             <a:off x="8610600" y="165050"/>
             <a:ext cx="304800" cy="304800"/>
           </a:xfrm>
@@ -13198,7 +13100,7 @@
       </p:pic>
       <p:sp>
         <p:nvSpPr>
-          <p:cNvPr id="8" name="Text 5"/>
+          <p:cNvPr id="9" name="Text 5"/>
           <p:cNvSpPr/>
           <p:nvPr/>
         </p:nvSpPr>
@@ -13237,7 +13139,7 @@
       </p:sp>
       <p:sp>
         <p:nvSpPr>
-          <p:cNvPr id="9" name="Text 6"/>
+          <p:cNvPr id="10" name="Text 6"/>
           <p:cNvSpPr/>
           <p:nvPr/>
         </p:nvSpPr>
@@ -13282,7 +13184,7 @@
       </p:sp>
       <p:sp>
         <p:nvSpPr>
-          <p:cNvPr id="10" name="Text 7"/>
+          <p:cNvPr id="11" name="Text 7"/>
           <p:cNvSpPr/>
           <p:nvPr/>
         </p:nvSpPr>
@@ -13314,7 +13216,7 @@
       </p:sp>
       <p:sp>
         <p:nvSpPr>
-          <p:cNvPr id="11" name="Text 8"/>
+          <p:cNvPr id="12" name="Text 8"/>
           <p:cNvSpPr/>
           <p:nvPr/>
         </p:nvSpPr>
@@ -13386,112 +13288,9 @@
           <a:chExt cx="0" cy="0"/>
         </a:xfrm>
       </p:grpSpPr>
-      <p:sp>
-        <p:nvSpPr>
-          <p:cNvPr id="2" name="Text 0"/>
-          <p:cNvSpPr/>
-          <p:nvPr/>
-        </p:nvSpPr>
-        <p:spPr>
-          <a:xfrm>
-            <a:off x="0" y="0"/>
-            <a:ext cx="9144000" cy="76200"/>
-          </a:xfrm>
-          <a:prstGeom prst="rect">
-            <a:avLst/>
-          </a:prstGeom>
-          <a:solidFill>
-            <a:srgbClr val="8250DF"/>
-          </a:solidFill>
-          <a:ln/>
-        </p:spPr>
-        <p:txBody>
-          <a:bodyPr wrap="square" rtlCol="0" anchor="ctr"/>
-          <a:lstStyle/>
-          <a:p>
-            <a:pPr indent="0" marL="0">
-              <a:buNone/>
-            </a:pPr>
-            <a:endParaRPr lang="en-US" dirty="0"/>
-          </a:p>
-        </p:txBody>
-      </p:sp>
-      <p:sp>
-        <p:nvSpPr>
-          <p:cNvPr id="3" name="Text 1"/>
-          <p:cNvSpPr/>
-          <p:nvPr/>
-        </p:nvSpPr>
-        <p:spPr>
-          <a:xfrm>
-            <a:off x="7340501" y="177701"/>
-            <a:ext cx="1168301" cy="279350"/>
-          </a:xfrm>
-          <a:prstGeom prst="roundRect">
-            <a:avLst>
-              <a:gd name="adj" fmla="val 22731"/>
-            </a:avLst>
-          </a:prstGeom>
-          <a:solidFill>
-            <a:srgbClr val="1A7F37"/>
-          </a:solidFill>
-          <a:ln/>
-        </p:spPr>
-        <p:txBody>
-          <a:bodyPr wrap="square" rtlCol="0" anchor="ctr"/>
-          <a:lstStyle/>
-          <a:p>
-            <a:pPr indent="0" marL="0">
-              <a:buNone/>
-            </a:pPr>
-            <a:endParaRPr lang="en-US" dirty="0"/>
-          </a:p>
-        </p:txBody>
-      </p:sp>
-      <p:sp>
-        <p:nvSpPr>
-          <p:cNvPr id="4" name="Text 2"/>
-          <p:cNvSpPr/>
-          <p:nvPr/>
-        </p:nvSpPr>
-        <p:spPr>
-          <a:xfrm>
-            <a:off x="7461041" y="231577"/>
-            <a:ext cx="927071" cy="171450"/>
-          </a:xfrm>
-          <a:prstGeom prst="rect">
-            <a:avLst/>
-          </a:prstGeom>
-          <a:noFill/>
-          <a:ln/>
-        </p:spPr>
-        <p:txBody>
-          <a:bodyPr wrap="square" lIns="0" tIns="0" rIns="0" bIns="0" rtlCol="0" anchor="t"/>
-          <a:lstStyle/>
-          <a:p>
-            <a:pPr algn="ctr" indent="0" marL="0">
-              <a:buNone/>
-            </a:pPr>
-            <a:r>
-              <a:rPr lang="en-US" sz="1150" b="1" dirty="0">
-                <a:solidFill>
-                  <a:srgbClr val="FFFFFF"/>
-                </a:solidFill>
-                <a:latin typeface="Arial" pitchFamily="34" charset="0"/>
-                <a:ea typeface="Arial" pitchFamily="34" charset="-122"/>
-                <a:cs typeface="Arial" pitchFamily="34" charset="-120"/>
-              </a:rPr>
-              <a:t>CHAPTER 07</a:t>
-            </a:r>
-            <a:endParaRPr lang="en-US" sz="1150" dirty="0"/>
-          </a:p>
-        </p:txBody>
-      </p:sp>
       <p:pic>
         <p:nvPicPr>
-          <p:cNvPr id="5" name="Image 0" descr="/Users/danwahlin/.copilot/session-state/56a7a0da-def8-48d4-b5e8-0ac3878cb8dd/files/slides-build/icons/FaGithub-1F2328.png">
-            <a:hlinkClick r:id="rId2" tooltip="https://github.com/github/copilot-app-for-beginners/tree/main/07-automations"/>
-          </p:cNvPr>
+          <p:cNvPr id="2" name="Image 0" descr="/Users/danwahlin/.copilot/session-state/56a7a0da-def8-48d4-b5e8-0ac3878cb8dd/files/slides-build/img/grad-corner.png">    </p:cNvPr>
           <p:cNvPicPr>
             <a:picLocks noChangeAspect="1"/>
           </p:cNvPicPr>
@@ -13505,6 +13304,103 @@
         </p:blipFill>
         <p:spPr>
           <a:xfrm>
+            <a:off x="6349901" y="0"/>
+            <a:ext cx="2793950" cy="1308050"/>
+          </a:xfrm>
+          <a:prstGeom prst="rect">
+            <a:avLst/>
+          </a:prstGeom>
+        </p:spPr>
+      </p:pic>
+      <p:sp>
+        <p:nvSpPr>
+          <p:cNvPr id="3" name="Text 0"/>
+          <p:cNvSpPr/>
+          <p:nvPr/>
+        </p:nvSpPr>
+        <p:spPr>
+          <a:xfrm>
+            <a:off x="7340501" y="177701"/>
+            <a:ext cx="1168301" cy="279350"/>
+          </a:xfrm>
+          <a:prstGeom prst="roundRect">
+            <a:avLst>
+              <a:gd name="adj" fmla="val 22731"/>
+            </a:avLst>
+          </a:prstGeom>
+          <a:solidFill>
+            <a:srgbClr val="1A7F37"/>
+          </a:solidFill>
+          <a:ln/>
+        </p:spPr>
+        <p:txBody>
+          <a:bodyPr wrap="square" rtlCol="0" anchor="ctr"/>
+          <a:lstStyle/>
+          <a:p>
+            <a:pPr indent="0" marL="0">
+              <a:buNone/>
+            </a:pPr>
+            <a:endParaRPr lang="en-US" dirty="0"/>
+          </a:p>
+        </p:txBody>
+      </p:sp>
+      <p:sp>
+        <p:nvSpPr>
+          <p:cNvPr id="4" name="Text 1"/>
+          <p:cNvSpPr/>
+          <p:nvPr/>
+        </p:nvSpPr>
+        <p:spPr>
+          <a:xfrm>
+            <a:off x="7461041" y="231577"/>
+            <a:ext cx="927071" cy="171450"/>
+          </a:xfrm>
+          <a:prstGeom prst="rect">
+            <a:avLst/>
+          </a:prstGeom>
+          <a:noFill/>
+          <a:ln/>
+        </p:spPr>
+        <p:txBody>
+          <a:bodyPr wrap="square" lIns="0" tIns="0" rIns="0" bIns="0" rtlCol="0" anchor="t"/>
+          <a:lstStyle/>
+          <a:p>
+            <a:pPr algn="ctr" indent="0" marL="0">
+              <a:buNone/>
+            </a:pPr>
+            <a:r>
+              <a:rPr lang="en-US" sz="1150" b="1" dirty="0">
+                <a:solidFill>
+                  <a:srgbClr val="FFFFFF"/>
+                </a:solidFill>
+                <a:latin typeface="Arial" pitchFamily="34" charset="0"/>
+                <a:ea typeface="Arial" pitchFamily="34" charset="-122"/>
+                <a:cs typeface="Arial" pitchFamily="34" charset="-120"/>
+              </a:rPr>
+              <a:t>CHAPTER 07</a:t>
+            </a:r>
+            <a:endParaRPr lang="en-US" sz="1150" dirty="0"/>
+          </a:p>
+        </p:txBody>
+      </p:sp>
+      <p:pic>
+        <p:nvPicPr>
+          <p:cNvPr id="5" name="Image 1" descr="/Users/danwahlin/.copilot/session-state/56a7a0da-def8-48d4-b5e8-0ac3878cb8dd/files/slides-build/icons/FaGithub-1F2328.png">
+            <a:hlinkClick r:id="rId3" tooltip="https://github.com/github/copilot-app-for-beginners/tree/main/07-automations"/>
+          </p:cNvPr>
+          <p:cNvPicPr>
+            <a:picLocks noChangeAspect="1"/>
+          </p:cNvPicPr>
+          <p:nvPr/>
+        </p:nvPicPr>
+        <p:blipFill>
+          <a:blip r:embed="rId2"/>
+          <a:stretch>
+            <a:fillRect/>
+          </a:stretch>
+        </p:blipFill>
+        <p:spPr>
+          <a:xfrm>
             <a:off x="8610600" y="165050"/>
             <a:ext cx="304800" cy="304800"/>
           </a:xfrm>
@@ -13515,7 +13411,7 @@
       </p:pic>
       <p:sp>
         <p:nvSpPr>
-          <p:cNvPr id="6" name="Text 3"/>
+          <p:cNvPr id="6" name="Text 2"/>
           <p:cNvSpPr/>
           <p:nvPr/>
         </p:nvSpPr>
@@ -13554,7 +13450,7 @@
       </p:sp>
       <p:sp>
         <p:nvSpPr>
-          <p:cNvPr id="7" name="Text 4"/>
+          <p:cNvPr id="7" name="Text 3"/>
           <p:cNvSpPr/>
           <p:nvPr/>
         </p:nvSpPr>
@@ -13599,7 +13495,7 @@
       </p:sp>
       <p:sp>
         <p:nvSpPr>
-          <p:cNvPr id="8" name="Text 5"/>
+          <p:cNvPr id="8" name="Text 4"/>
           <p:cNvSpPr/>
           <p:nvPr/>
         </p:nvSpPr>
@@ -13764,7 +13660,7 @@
       </p:sp>
       <p:sp>
         <p:nvSpPr>
-          <p:cNvPr id="9" name="Text 6"/>
+          <p:cNvPr id="9" name="Text 5"/>
           <p:cNvSpPr/>
           <p:nvPr/>
         </p:nvSpPr>
@@ -13807,14 +13703,14 @@
       </p:sp>
       <p:pic>
         <p:nvPicPr>
-          <p:cNvPr id="10" name="Image 1" descr="/Users/danwahlin/.copilot/session-state/56a7a0da-def8-48d4-b5e8-0ac3878cb8dd/files/slides-build/img/07-new-automation-crop.png">    </p:cNvPr>
+          <p:cNvPr id="10" name="Image 2" descr="/Users/danwahlin/.copilot/session-state/56a7a0da-def8-48d4-b5e8-0ac3878cb8dd/files/slides-build/img/07-new-automation-crop.png">    </p:cNvPr>
           <p:cNvPicPr>
             <a:picLocks noChangeAspect="1"/>
           </p:cNvPicPr>
           <p:nvPr/>
         </p:nvPicPr>
         <p:blipFill>
-          <a:blip r:embed="rId3"/>
+          <a:blip r:embed="rId4"/>
           <a:stretch>
             <a:fillRect/>
           </a:stretch>
@@ -13831,7 +13727,7 @@
       </p:pic>
       <p:sp>
         <p:nvSpPr>
-          <p:cNvPr id="11" name="Text 7"/>
+          <p:cNvPr id="11" name="Text 6"/>
           <p:cNvSpPr/>
           <p:nvPr/>
         </p:nvSpPr>
@@ -13863,7 +13759,7 @@
       </p:sp>
       <p:sp>
         <p:nvSpPr>
-          <p:cNvPr id="12" name="Text 8"/>
+          <p:cNvPr id="12" name="Text 7"/>
           <p:cNvSpPr/>
           <p:nvPr/>
         </p:nvSpPr>
@@ -13902,7 +13798,7 @@
       </p:sp>
       <p:sp>
         <p:nvSpPr>
-          <p:cNvPr id="13" name="Text 9"/>
+          <p:cNvPr id="13" name="Text 8"/>
           <p:cNvSpPr/>
           <p:nvPr/>
         </p:nvSpPr>
@@ -13944,7 +13840,7 @@
       </p:sp>
       <p:sp>
         <p:nvSpPr>
-          <p:cNvPr id="14" name="Text 10"/>
+          <p:cNvPr id="14" name="Text 9"/>
           <p:cNvSpPr/>
           <p:nvPr/>
         </p:nvSpPr>
@@ -13986,7 +13882,7 @@
       </p:sp>
       <p:sp>
         <p:nvSpPr>
-          <p:cNvPr id="15" name="Text 11"/>
+          <p:cNvPr id="15" name="Text 10"/>
           <p:cNvSpPr/>
           <p:nvPr/>
         </p:nvSpPr>
@@ -14018,7 +13914,7 @@
       </p:sp>
       <p:sp>
         <p:nvSpPr>
-          <p:cNvPr id="16" name="Text 12"/>
+          <p:cNvPr id="16" name="Text 11"/>
           <p:cNvSpPr/>
           <p:nvPr/>
         </p:nvSpPr>
@@ -14057,7 +13953,7 @@
       </p:sp>
       <p:sp>
         <p:nvSpPr>
-          <p:cNvPr id="17" name="Text 13"/>
+          <p:cNvPr id="17" name="Text 12"/>
           <p:cNvSpPr/>
           <p:nvPr/>
         </p:nvSpPr>
@@ -14099,7 +13995,7 @@
       </p:sp>
       <p:sp>
         <p:nvSpPr>
-          <p:cNvPr id="18" name="Text 14"/>
+          <p:cNvPr id="18" name="Text 13"/>
           <p:cNvSpPr/>
           <p:nvPr/>
         </p:nvSpPr>
@@ -14141,7 +14037,7 @@
       </p:sp>
       <p:sp>
         <p:nvSpPr>
-          <p:cNvPr id="19" name="Text 15"/>
+          <p:cNvPr id="19" name="Text 14"/>
           <p:cNvSpPr/>
           <p:nvPr/>
         </p:nvSpPr>
@@ -14173,7 +14069,7 @@
       </p:sp>
       <p:sp>
         <p:nvSpPr>
-          <p:cNvPr id="20" name="Text 16"/>
+          <p:cNvPr id="20" name="Text 15"/>
           <p:cNvSpPr/>
           <p:nvPr/>
         </p:nvSpPr>
@@ -14212,7 +14108,7 @@
       </p:sp>
       <p:sp>
         <p:nvSpPr>
-          <p:cNvPr id="21" name="Text 17"/>
+          <p:cNvPr id="21" name="Text 16"/>
           <p:cNvSpPr/>
           <p:nvPr/>
         </p:nvSpPr>
@@ -14254,7 +14150,7 @@
       </p:sp>
       <p:sp>
         <p:nvSpPr>
-          <p:cNvPr id="22" name="Text 18"/>
+          <p:cNvPr id="22" name="Text 17"/>
           <p:cNvSpPr/>
           <p:nvPr/>
         </p:nvSpPr>
@@ -14296,7 +14192,7 @@
       </p:sp>
       <p:sp>
         <p:nvSpPr>
-          <p:cNvPr id="23" name="Text 19"/>
+          <p:cNvPr id="23" name="Text 18"/>
           <p:cNvSpPr/>
           <p:nvPr/>
         </p:nvSpPr>
@@ -14328,7 +14224,7 @@
       </p:sp>
       <p:sp>
         <p:nvSpPr>
-          <p:cNvPr id="24" name="Text 20"/>
+          <p:cNvPr id="24" name="Text 19"/>
           <p:cNvSpPr/>
           <p:nvPr/>
         </p:nvSpPr>
@@ -14367,7 +14263,7 @@
       </p:sp>
       <p:sp>
         <p:nvSpPr>
-          <p:cNvPr id="25" name="Text 21"/>
+          <p:cNvPr id="25" name="Text 20"/>
           <p:cNvSpPr/>
           <p:nvPr/>
         </p:nvSpPr>
@@ -14409,7 +14305,7 @@
       </p:sp>
       <p:sp>
         <p:nvSpPr>
-          <p:cNvPr id="26" name="Text 22"/>
+          <p:cNvPr id="26" name="Text 21"/>
           <p:cNvSpPr/>
           <p:nvPr/>
         </p:nvSpPr>
@@ -14515,112 +14411,9 @@
           <a:chExt cx="0" cy="0"/>
         </a:xfrm>
       </p:grpSpPr>
-      <p:sp>
-        <p:nvSpPr>
-          <p:cNvPr id="2" name="Text 0"/>
-          <p:cNvSpPr/>
-          <p:nvPr/>
-        </p:nvSpPr>
-        <p:spPr>
-          <a:xfrm>
-            <a:off x="0" y="0"/>
-            <a:ext cx="9144000" cy="76200"/>
-          </a:xfrm>
-          <a:prstGeom prst="rect">
-            <a:avLst/>
-          </a:prstGeom>
-          <a:solidFill>
-            <a:srgbClr val="8250DF"/>
-          </a:solidFill>
-          <a:ln/>
-        </p:spPr>
-        <p:txBody>
-          <a:bodyPr wrap="square" rtlCol="0" anchor="ctr"/>
-          <a:lstStyle/>
-          <a:p>
-            <a:pPr indent="0" marL="0">
-              <a:buNone/>
-            </a:pPr>
-            <a:endParaRPr lang="en-US" dirty="0"/>
-          </a:p>
-        </p:txBody>
-      </p:sp>
-      <p:sp>
-        <p:nvSpPr>
-          <p:cNvPr id="3" name="Text 1"/>
-          <p:cNvSpPr/>
-          <p:nvPr/>
-        </p:nvSpPr>
-        <p:spPr>
-          <a:xfrm>
-            <a:off x="7340501" y="177701"/>
-            <a:ext cx="1168301" cy="279350"/>
-          </a:xfrm>
-          <a:prstGeom prst="roundRect">
-            <a:avLst>
-              <a:gd name="adj" fmla="val 22731"/>
-            </a:avLst>
-          </a:prstGeom>
-          <a:solidFill>
-            <a:srgbClr val="1A7F37"/>
-          </a:solidFill>
-          <a:ln/>
-        </p:spPr>
-        <p:txBody>
-          <a:bodyPr wrap="square" rtlCol="0" anchor="ctr"/>
-          <a:lstStyle/>
-          <a:p>
-            <a:pPr indent="0" marL="0">
-              <a:buNone/>
-            </a:pPr>
-            <a:endParaRPr lang="en-US" dirty="0"/>
-          </a:p>
-        </p:txBody>
-      </p:sp>
-      <p:sp>
-        <p:nvSpPr>
-          <p:cNvPr id="4" name="Text 2"/>
-          <p:cNvSpPr/>
-          <p:nvPr/>
-        </p:nvSpPr>
-        <p:spPr>
-          <a:xfrm>
-            <a:off x="7461041" y="231577"/>
-            <a:ext cx="927071" cy="171450"/>
-          </a:xfrm>
-          <a:prstGeom prst="rect">
-            <a:avLst/>
-          </a:prstGeom>
-          <a:noFill/>
-          <a:ln/>
-        </p:spPr>
-        <p:txBody>
-          <a:bodyPr wrap="square" lIns="0" tIns="0" rIns="0" bIns="0" rtlCol="0" anchor="t"/>
-          <a:lstStyle/>
-          <a:p>
-            <a:pPr algn="ctr" indent="0" marL="0">
-              <a:buNone/>
-            </a:pPr>
-            <a:r>
-              <a:rPr lang="en-US" sz="1150" b="1" dirty="0">
-                <a:solidFill>
-                  <a:srgbClr val="FFFFFF"/>
-                </a:solidFill>
-                <a:latin typeface="Arial" pitchFamily="34" charset="0"/>
-                <a:ea typeface="Arial" pitchFamily="34" charset="-122"/>
-                <a:cs typeface="Arial" pitchFamily="34" charset="-120"/>
-              </a:rPr>
-              <a:t>CHAPTER 07</a:t>
-            </a:r>
-            <a:endParaRPr lang="en-US" sz="1150" dirty="0"/>
-          </a:p>
-        </p:txBody>
-      </p:sp>
       <p:pic>
         <p:nvPicPr>
-          <p:cNvPr id="5" name="Image 0" descr="/Users/danwahlin/.copilot/session-state/56a7a0da-def8-48d4-b5e8-0ac3878cb8dd/files/slides-build/icons/FaGithub-1F2328.png">
-            <a:hlinkClick r:id="rId2" tooltip="https://github.com/github/copilot-app-for-beginners/tree/main/07-automations"/>
-          </p:cNvPr>
+          <p:cNvPr id="2" name="Image 0" descr="/Users/danwahlin/.copilot/session-state/56a7a0da-def8-48d4-b5e8-0ac3878cb8dd/files/slides-build/img/grad-corner.png">    </p:cNvPr>
           <p:cNvPicPr>
             <a:picLocks noChangeAspect="1"/>
           </p:cNvPicPr>
@@ -14634,6 +14427,103 @@
         </p:blipFill>
         <p:spPr>
           <a:xfrm>
+            <a:off x="6349901" y="0"/>
+            <a:ext cx="2793950" cy="1308050"/>
+          </a:xfrm>
+          <a:prstGeom prst="rect">
+            <a:avLst/>
+          </a:prstGeom>
+        </p:spPr>
+      </p:pic>
+      <p:sp>
+        <p:nvSpPr>
+          <p:cNvPr id="3" name="Text 0"/>
+          <p:cNvSpPr/>
+          <p:nvPr/>
+        </p:nvSpPr>
+        <p:spPr>
+          <a:xfrm>
+            <a:off x="7340501" y="177701"/>
+            <a:ext cx="1168301" cy="279350"/>
+          </a:xfrm>
+          <a:prstGeom prst="roundRect">
+            <a:avLst>
+              <a:gd name="adj" fmla="val 22731"/>
+            </a:avLst>
+          </a:prstGeom>
+          <a:solidFill>
+            <a:srgbClr val="1A7F37"/>
+          </a:solidFill>
+          <a:ln/>
+        </p:spPr>
+        <p:txBody>
+          <a:bodyPr wrap="square" rtlCol="0" anchor="ctr"/>
+          <a:lstStyle/>
+          <a:p>
+            <a:pPr indent="0" marL="0">
+              <a:buNone/>
+            </a:pPr>
+            <a:endParaRPr lang="en-US" dirty="0"/>
+          </a:p>
+        </p:txBody>
+      </p:sp>
+      <p:sp>
+        <p:nvSpPr>
+          <p:cNvPr id="4" name="Text 1"/>
+          <p:cNvSpPr/>
+          <p:nvPr/>
+        </p:nvSpPr>
+        <p:spPr>
+          <a:xfrm>
+            <a:off x="7461041" y="231577"/>
+            <a:ext cx="927071" cy="171450"/>
+          </a:xfrm>
+          <a:prstGeom prst="rect">
+            <a:avLst/>
+          </a:prstGeom>
+          <a:noFill/>
+          <a:ln/>
+        </p:spPr>
+        <p:txBody>
+          <a:bodyPr wrap="square" lIns="0" tIns="0" rIns="0" bIns="0" rtlCol="0" anchor="t"/>
+          <a:lstStyle/>
+          <a:p>
+            <a:pPr algn="ctr" indent="0" marL="0">
+              <a:buNone/>
+            </a:pPr>
+            <a:r>
+              <a:rPr lang="en-US" sz="1150" b="1" dirty="0">
+                <a:solidFill>
+                  <a:srgbClr val="FFFFFF"/>
+                </a:solidFill>
+                <a:latin typeface="Arial" pitchFamily="34" charset="0"/>
+                <a:ea typeface="Arial" pitchFamily="34" charset="-122"/>
+                <a:cs typeface="Arial" pitchFamily="34" charset="-120"/>
+              </a:rPr>
+              <a:t>CHAPTER 07</a:t>
+            </a:r>
+            <a:endParaRPr lang="en-US" sz="1150" dirty="0"/>
+          </a:p>
+        </p:txBody>
+      </p:sp>
+      <p:pic>
+        <p:nvPicPr>
+          <p:cNvPr id="5" name="Image 1" descr="/Users/danwahlin/.copilot/session-state/56a7a0da-def8-48d4-b5e8-0ac3878cb8dd/files/slides-build/icons/FaGithub-1F2328.png">
+            <a:hlinkClick r:id="rId3" tooltip="https://github.com/github/copilot-app-for-beginners/tree/main/07-automations"/>
+          </p:cNvPr>
+          <p:cNvPicPr>
+            <a:picLocks noChangeAspect="1"/>
+          </p:cNvPicPr>
+          <p:nvPr/>
+        </p:nvPicPr>
+        <p:blipFill>
+          <a:blip r:embed="rId2"/>
+          <a:stretch>
+            <a:fillRect/>
+          </a:stretch>
+        </p:blipFill>
+        <p:spPr>
+          <a:xfrm>
             <a:off x="8610600" y="165050"/>
             <a:ext cx="304800" cy="304800"/>
           </a:xfrm>
@@ -14644,7 +14534,7 @@
       </p:pic>
       <p:sp>
         <p:nvSpPr>
-          <p:cNvPr id="6" name="Text 3"/>
+          <p:cNvPr id="6" name="Text 2"/>
           <p:cNvSpPr/>
           <p:nvPr/>
         </p:nvSpPr>
@@ -14683,7 +14573,7 @@
       </p:sp>
       <p:sp>
         <p:nvSpPr>
-          <p:cNvPr id="7" name="Text 4"/>
+          <p:cNvPr id="7" name="Text 3"/>
           <p:cNvSpPr/>
           <p:nvPr/>
         </p:nvSpPr>
@@ -14728,7 +14618,7 @@
       </p:sp>
       <p:sp>
         <p:nvSpPr>
-          <p:cNvPr id="8" name="Text 5"/>
+          <p:cNvPr id="8" name="Text 4"/>
           <p:cNvSpPr/>
           <p:nvPr/>
         </p:nvSpPr>
@@ -14773,7 +14663,7 @@
       </p:sp>
       <p:sp>
         <p:nvSpPr>
-          <p:cNvPr id="9" name="Text 6"/>
+          <p:cNvPr id="9" name="Text 5"/>
           <p:cNvSpPr/>
           <p:nvPr/>
         </p:nvSpPr>
@@ -14809,7 +14699,7 @@
       </p:sp>
       <p:sp>
         <p:nvSpPr>
-          <p:cNvPr id="10" name="Text 7"/>
+          <p:cNvPr id="10" name="Text 6"/>
           <p:cNvSpPr/>
           <p:nvPr/>
         </p:nvSpPr>
@@ -14839,7 +14729,7 @@
       </p:sp>
       <p:sp>
         <p:nvSpPr>
-          <p:cNvPr id="11" name="Shape 8"/>
+          <p:cNvPr id="11" name="Shape 7"/>
           <p:cNvSpPr/>
           <p:nvPr/>
         </p:nvSpPr>
@@ -14862,7 +14752,7 @@
       </p:sp>
       <p:sp>
         <p:nvSpPr>
-          <p:cNvPr id="12" name="Text 9"/>
+          <p:cNvPr id="12" name="Text 8"/>
           <p:cNvSpPr/>
           <p:nvPr/>
         </p:nvSpPr>
@@ -14904,7 +14794,7 @@
       </p:sp>
       <p:sp>
         <p:nvSpPr>
-          <p:cNvPr id="13" name="Text 10"/>
+          <p:cNvPr id="13" name="Text 9"/>
           <p:cNvSpPr/>
           <p:nvPr/>
         </p:nvSpPr>
@@ -14946,7 +14836,7 @@
       </p:sp>
       <p:sp>
         <p:nvSpPr>
-          <p:cNvPr id="14" name="Text 11"/>
+          <p:cNvPr id="14" name="Text 10"/>
           <p:cNvSpPr/>
           <p:nvPr/>
         </p:nvSpPr>
@@ -14988,7 +14878,7 @@
       </p:sp>
       <p:sp>
         <p:nvSpPr>
-          <p:cNvPr id="15" name="Shape 12"/>
+          <p:cNvPr id="15" name="Shape 11"/>
           <p:cNvSpPr/>
           <p:nvPr/>
         </p:nvSpPr>
@@ -15011,7 +14901,7 @@
       </p:sp>
       <p:sp>
         <p:nvSpPr>
-          <p:cNvPr id="16" name="Text 13"/>
+          <p:cNvPr id="16" name="Text 12"/>
           <p:cNvSpPr/>
           <p:nvPr/>
         </p:nvSpPr>
@@ -15053,7 +14943,7 @@
       </p:sp>
       <p:sp>
         <p:nvSpPr>
-          <p:cNvPr id="17" name="Text 14"/>
+          <p:cNvPr id="17" name="Text 13"/>
           <p:cNvSpPr/>
           <p:nvPr/>
         </p:nvSpPr>
@@ -15095,7 +14985,7 @@
       </p:sp>
       <p:sp>
         <p:nvSpPr>
-          <p:cNvPr id="18" name="Text 15"/>
+          <p:cNvPr id="18" name="Text 14"/>
           <p:cNvSpPr/>
           <p:nvPr/>
         </p:nvSpPr>
@@ -15137,7 +15027,7 @@
       </p:sp>
       <p:sp>
         <p:nvSpPr>
-          <p:cNvPr id="19" name="Shape 16"/>
+          <p:cNvPr id="19" name="Shape 15"/>
           <p:cNvSpPr/>
           <p:nvPr/>
         </p:nvSpPr>
@@ -15160,7 +15050,7 @@
       </p:sp>
       <p:sp>
         <p:nvSpPr>
-          <p:cNvPr id="20" name="Text 17"/>
+          <p:cNvPr id="20" name="Text 16"/>
           <p:cNvSpPr/>
           <p:nvPr/>
         </p:nvSpPr>
@@ -15202,7 +15092,7 @@
       </p:sp>
       <p:sp>
         <p:nvSpPr>
-          <p:cNvPr id="21" name="Text 18"/>
+          <p:cNvPr id="21" name="Text 17"/>
           <p:cNvSpPr/>
           <p:nvPr/>
         </p:nvSpPr>
@@ -15244,7 +15134,7 @@
       </p:sp>
       <p:sp>
         <p:nvSpPr>
-          <p:cNvPr id="22" name="Text 19"/>
+          <p:cNvPr id="22" name="Text 18"/>
           <p:cNvSpPr/>
           <p:nvPr/>
         </p:nvSpPr>
@@ -15286,7 +15176,7 @@
       </p:sp>
       <p:sp>
         <p:nvSpPr>
-          <p:cNvPr id="23" name="Text 20"/>
+          <p:cNvPr id="23" name="Text 19"/>
           <p:cNvSpPr/>
           <p:nvPr/>
         </p:nvSpPr>
@@ -15328,7 +15218,7 @@
       </p:sp>
       <p:sp>
         <p:nvSpPr>
-          <p:cNvPr id="24" name="Text 21"/>
+          <p:cNvPr id="24" name="Text 20"/>
           <p:cNvSpPr/>
           <p:nvPr/>
         </p:nvSpPr>
@@ -15370,7 +15260,7 @@
       </p:sp>
       <p:sp>
         <p:nvSpPr>
-          <p:cNvPr id="25" name="Text 22"/>
+          <p:cNvPr id="25" name="Text 21"/>
           <p:cNvSpPr/>
           <p:nvPr/>
         </p:nvSpPr>

--- a/slides/07-automations.pptx
+++ b/slides/07-automations.pptx
@@ -2733,12 +2733,12 @@
         </p:nvSpPr>
         <p:spPr>
           <a:xfrm>
-            <a:off x="1437531" y="1450777"/>
-            <a:ext cx="1950690" cy="2990850"/>
+            <a:off x="1302395" y="1450777"/>
+            <a:ext cx="2221111" cy="2990850"/>
           </a:xfrm>
           <a:prstGeom prst="roundRect">
             <a:avLst>
-              <a:gd name="adj" fmla="val 3906"/>
+              <a:gd name="adj" fmla="val 3431"/>
             </a:avLst>
           </a:prstGeom>
           <a:solidFill>
@@ -2784,8 +2784,8 @@
         </p:blipFill>
         <p:spPr>
           <a:xfrm>
-            <a:off x="1485156" y="1498402"/>
-            <a:ext cx="1855440" cy="2895600"/>
+            <a:off x="1350020" y="1498402"/>
+            <a:ext cx="2125861" cy="2895600"/>
           </a:xfrm>
           <a:prstGeom prst="rect">
             <a:avLst/>

--- a/slides/07-automations.pptx
+++ b/slides/07-automations.pptx
@@ -2212,7 +2212,7 @@
       </p:grpSpPr>
       <p:pic>
         <p:nvPicPr>
-          <p:cNvPr id="2" name="Image 0" descr="/Users/danwahlin/.copilot/session-state/56a7a0da-def8-48d4-b5e8-0ac3878cb8dd/files/slides-build/img/grad-title.jpg">    </p:cNvPr>
+          <p:cNvPr id="2" name="Image 0" descr="/Users/danwahlin/.copilot/session-state/56a7a0da-def8-48d4-b5e8-0ac3878cb8dd/files/slides-build/img/grad-title-pattern.jpg">    </p:cNvPr>
           <p:cNvPicPr>
             <a:picLocks noChangeAspect="1"/>
           </p:cNvPicPr>
@@ -2522,7 +2522,7 @@
       </p:grpSpPr>
       <p:pic>
         <p:nvPicPr>
-          <p:cNvPr id="2" name="Image 0" descr="/Users/danwahlin/.copilot/session-state/56a7a0da-def8-48d4-b5e8-0ac3878cb8dd/files/slides-build/img/grad-corner.png">    </p:cNvPr>
+          <p:cNvPr id="2" name="Image 0" descr="/Users/danwahlin/.copilot/session-state/56a7a0da-def8-48d4-b5e8-0ac3878cb8dd/files/slides-build/img/grad-corner-pattern.png">    </p:cNvPr>
           <p:cNvPicPr>
             <a:picLocks noChangeAspect="1"/>
           </p:cNvPicPr>
@@ -3662,7 +3662,7 @@
       </p:sp>
       <p:pic>
         <p:nvPicPr>
-          <p:cNvPr id="5" name="Image 0" descr="/Users/danwahlin/.copilot/session-state/56a7a0da-def8-48d4-b5e8-0ac3878cb8dd/files/slides-build/img/grad-corner.png">    </p:cNvPr>
+          <p:cNvPr id="5" name="Image 0" descr="/Users/danwahlin/.copilot/session-state/56a7a0da-def8-48d4-b5e8-0ac3878cb8dd/files/slides-build/img/grad-corner-pattern.png">    </p:cNvPr>
           <p:cNvPicPr>
             <a:picLocks noChangeAspect="1"/>
           </p:cNvPicPr>
@@ -3973,7 +3973,7 @@
       </p:grpSpPr>
       <p:pic>
         <p:nvPicPr>
-          <p:cNvPr id="2" name="Image 0" descr="/Users/danwahlin/.copilot/session-state/56a7a0da-def8-48d4-b5e8-0ac3878cb8dd/files/slides-build/img/grad-corner.png">    </p:cNvPr>
+          <p:cNvPr id="2" name="Image 0" descr="/Users/danwahlin/.copilot/session-state/56a7a0da-def8-48d4-b5e8-0ac3878cb8dd/files/slides-build/img/grad-corner-pattern.png">    </p:cNvPr>
           <p:cNvPicPr>
             <a:picLocks noChangeAspect="1"/>
           </p:cNvPicPr>
@@ -5116,7 +5116,7 @@
       </p:grpSpPr>
       <p:pic>
         <p:nvPicPr>
-          <p:cNvPr id="2" name="Image 0" descr="/Users/danwahlin/.copilot/session-state/56a7a0da-def8-48d4-b5e8-0ac3878cb8dd/files/slides-build/img/grad-corner.png">    </p:cNvPr>
+          <p:cNvPr id="2" name="Image 0" descr="/Users/danwahlin/.copilot/session-state/56a7a0da-def8-48d4-b5e8-0ac3878cb8dd/files/slides-build/img/grad-corner-pattern.png">    </p:cNvPr>
           <p:cNvPicPr>
             <a:picLocks noChangeAspect="1"/>
           </p:cNvPicPr>
@@ -5990,7 +5990,7 @@
       </p:grpSpPr>
       <p:pic>
         <p:nvPicPr>
-          <p:cNvPr id="2" name="Image 0" descr="/Users/danwahlin/.copilot/session-state/56a7a0da-def8-48d4-b5e8-0ac3878cb8dd/files/slides-build/img/grad-corner.png">    </p:cNvPr>
+          <p:cNvPr id="2" name="Image 0" descr="/Users/danwahlin/.copilot/session-state/56a7a0da-def8-48d4-b5e8-0ac3878cb8dd/files/slides-build/img/grad-corner-pattern.png">    </p:cNvPr>
           <p:cNvPicPr>
             <a:picLocks noChangeAspect="1"/>
           </p:cNvPicPr>
@@ -7128,7 +7128,7 @@
       </p:grpSpPr>
       <p:pic>
         <p:nvPicPr>
-          <p:cNvPr id="2" name="Image 0" descr="/Users/danwahlin/.copilot/session-state/56a7a0da-def8-48d4-b5e8-0ac3878cb8dd/files/slides-build/img/grad-corner.png">    </p:cNvPr>
+          <p:cNvPr id="2" name="Image 0" descr="/Users/danwahlin/.copilot/session-state/56a7a0da-def8-48d4-b5e8-0ac3878cb8dd/files/slides-build/img/grad-corner-pattern.png">    </p:cNvPr>
           <p:cNvPicPr>
             <a:picLocks noChangeAspect="1"/>
           </p:cNvPicPr>
@@ -7920,7 +7920,7 @@
       </p:grpSpPr>
       <p:pic>
         <p:nvPicPr>
-          <p:cNvPr id="2" name="Image 0" descr="/Users/danwahlin/.copilot/session-state/56a7a0da-def8-48d4-b5e8-0ac3878cb8dd/files/slides-build/img/grad-corner.png">    </p:cNvPr>
+          <p:cNvPr id="2" name="Image 0" descr="/Users/danwahlin/.copilot/session-state/56a7a0da-def8-48d4-b5e8-0ac3878cb8dd/files/slides-build/img/grad-corner-pattern.png">    </p:cNvPr>
           <p:cNvPicPr>
             <a:picLocks noChangeAspect="1"/>
           </p:cNvPicPr>
@@ -9015,7 +9015,7 @@
       </p:grpSpPr>
       <p:pic>
         <p:nvPicPr>
-          <p:cNvPr id="2" name="Image 0" descr="/Users/danwahlin/.copilot/session-state/56a7a0da-def8-48d4-b5e8-0ac3878cb8dd/files/slides-build/img/grad-corner.png">    </p:cNvPr>
+          <p:cNvPr id="2" name="Image 0" descr="/Users/danwahlin/.copilot/session-state/56a7a0da-def8-48d4-b5e8-0ac3878cb8dd/files/slides-build/img/grad-corner-pattern.png">    </p:cNvPr>
           <p:cNvPicPr>
             <a:picLocks noChangeAspect="1"/>
           </p:cNvPicPr>
@@ -10086,7 +10086,7 @@
       </p:sp>
       <p:pic>
         <p:nvPicPr>
-          <p:cNvPr id="5" name="Image 0" descr="/Users/danwahlin/.copilot/session-state/56a7a0da-def8-48d4-b5e8-0ac3878cb8dd/files/slides-build/img/grad-corner.png">    </p:cNvPr>
+          <p:cNvPr id="5" name="Image 0" descr="/Users/danwahlin/.copilot/session-state/56a7a0da-def8-48d4-b5e8-0ac3878cb8dd/files/slides-build/img/grad-corner-pattern.png">    </p:cNvPr>
           <p:cNvPicPr>
             <a:picLocks noChangeAspect="1"/>
           </p:cNvPicPr>
@@ -10397,7 +10397,7 @@
       </p:grpSpPr>
       <p:pic>
         <p:nvPicPr>
-          <p:cNvPr id="2" name="Image 0" descr="/Users/danwahlin/.copilot/session-state/56a7a0da-def8-48d4-b5e8-0ac3878cb8dd/files/slides-build/img/grad-corner.png">    </p:cNvPr>
+          <p:cNvPr id="2" name="Image 0" descr="/Users/danwahlin/.copilot/session-state/56a7a0da-def8-48d4-b5e8-0ac3878cb8dd/files/slides-build/img/grad-corner-pattern.png">    </p:cNvPr>
           <p:cNvPicPr>
             <a:picLocks noChangeAspect="1"/>
           </p:cNvPicPr>
@@ -11324,7 +11324,7 @@
       </p:grpSpPr>
       <p:pic>
         <p:nvPicPr>
-          <p:cNvPr id="2" name="Image 0" descr="/Users/danwahlin/.copilot/session-state/56a7a0da-def8-48d4-b5e8-0ac3878cb8dd/files/slides-build/img/grad-corner.png">    </p:cNvPr>
+          <p:cNvPr id="2" name="Image 0" descr="/Users/danwahlin/.copilot/session-state/56a7a0da-def8-48d4-b5e8-0ac3878cb8dd/files/slides-build/img/grad-corner-pattern.png">    </p:cNvPr>
           <p:cNvPicPr>
             <a:picLocks noChangeAspect="1"/>
           </p:cNvPicPr>
@@ -12176,7 +12176,7 @@
       </p:grpSpPr>
       <p:pic>
         <p:nvPicPr>
-          <p:cNvPr id="2" name="Image 0" descr="/Users/danwahlin/.copilot/session-state/56a7a0da-def8-48d4-b5e8-0ac3878cb8dd/files/slides-build/img/grad-corner.png">    </p:cNvPr>
+          <p:cNvPr id="2" name="Image 0" descr="/Users/danwahlin/.copilot/session-state/56a7a0da-def8-48d4-b5e8-0ac3878cb8dd/files/slides-build/img/grad-corner-pattern.png">    </p:cNvPr>
           <p:cNvPicPr>
             <a:picLocks noChangeAspect="1"/>
           </p:cNvPicPr>
@@ -12979,7 +12979,7 @@
       </p:sp>
       <p:pic>
         <p:nvPicPr>
-          <p:cNvPr id="5" name="Image 0" descr="/Users/danwahlin/.copilot/session-state/56a7a0da-def8-48d4-b5e8-0ac3878cb8dd/files/slides-build/img/grad-corner.png">    </p:cNvPr>
+          <p:cNvPr id="5" name="Image 0" descr="/Users/danwahlin/.copilot/session-state/56a7a0da-def8-48d4-b5e8-0ac3878cb8dd/files/slides-build/img/grad-corner-pattern.png">    </p:cNvPr>
           <p:cNvPicPr>
             <a:picLocks noChangeAspect="1"/>
           </p:cNvPicPr>
@@ -13290,7 +13290,7 @@
       </p:grpSpPr>
       <p:pic>
         <p:nvPicPr>
-          <p:cNvPr id="2" name="Image 0" descr="/Users/danwahlin/.copilot/session-state/56a7a0da-def8-48d4-b5e8-0ac3878cb8dd/files/slides-build/img/grad-corner.png">    </p:cNvPr>
+          <p:cNvPr id="2" name="Image 0" descr="/Users/danwahlin/.copilot/session-state/56a7a0da-def8-48d4-b5e8-0ac3878cb8dd/files/slides-build/img/grad-corner-pattern.png">    </p:cNvPr>
           <p:cNvPicPr>
             <a:picLocks noChangeAspect="1"/>
           </p:cNvPicPr>
@@ -14413,7 +14413,7 @@
       </p:grpSpPr>
       <p:pic>
         <p:nvPicPr>
-          <p:cNvPr id="2" name="Image 0" descr="/Users/danwahlin/.copilot/session-state/56a7a0da-def8-48d4-b5e8-0ac3878cb8dd/files/slides-build/img/grad-corner.png">    </p:cNvPr>
+          <p:cNvPr id="2" name="Image 0" descr="/Users/danwahlin/.copilot/session-state/56a7a0da-def8-48d4-b5e8-0ac3878cb8dd/files/slides-build/img/grad-corner-pattern.png">    </p:cNvPr>
           <p:cNvPicPr>
             <a:picLocks noChangeAspect="1"/>
           </p:cNvPicPr>

--- a/slides/07-automations.pptx
+++ b/slides/07-automations.pptx
@@ -2212,7 +2212,13 @@
       </p:grpSpPr>
       <p:pic>
         <p:nvPicPr>
-          <p:cNvPr id="2" name="Image 0" descr="/Users/danwahlin/.copilot/session-state/56a7a0da-def8-48d4-b5e8-0ac3878cb8dd/files/slides-build/img/grad-title-pattern.jpg">    </p:cNvPr>
+          <p:cNvPr id="2" name="Image 0" descr="">
+            <a:extLst>
+              <a:ext uri="{C183D7F6-B498-43B3-948B-1728B52AA6E4}">
+                <adec:decorative xmlns:adec="http://schemas.microsoft.com/office/drawing/2017/decorative" val="1"/>
+              </a:ext>
+            </a:extLst>
+          </p:cNvPr>
           <p:cNvPicPr>
             <a:picLocks noChangeAspect="1"/>
           </p:cNvPicPr>
@@ -2236,7 +2242,7 @@
       </p:pic>
       <p:pic>
         <p:nvPicPr>
-          <p:cNvPr id="3" name="Image 1" descr="/Users/danwahlin/.copilot/session-state/56a7a0da-def8-48d4-b5e8-0ac3878cb8dd/files/slides-build/icons/FaGithub-1F2328.png">
+          <p:cNvPr id="3" name="Image 1" descr="Open this chapter on GitHub">
             <a:hlinkClick r:id="rId3" tooltip="https://github.com/github/copilot-app-for-beginners/tree/main/07-automations"/>
           </p:cNvPr>
           <p:cNvPicPr>
@@ -2420,7 +2426,13 @@
       </p:sp>
       <p:pic>
         <p:nvPicPr>
-          <p:cNvPr id="8" name="Image 2" descr="/Users/danwahlin/.copilot/session-state/56a7a0da-def8-48d4-b5e8-0ac3878cb8dd/files/slides-build/icons/FaGithub-0969DA.png">    </p:cNvPr>
+          <p:cNvPr id="8" name="Image 2" descr="">
+            <a:extLst>
+              <a:ext uri="{C183D7F6-B498-43B3-948B-1728B52AA6E4}">
+                <adec:decorative xmlns:adec="http://schemas.microsoft.com/office/drawing/2017/decorative" val="1"/>
+              </a:ext>
+            </a:extLst>
+          </p:cNvPr>
           <p:cNvPicPr>
             <a:picLocks noChangeAspect="1"/>
           </p:cNvPicPr>
@@ -2522,7 +2534,13 @@
       </p:grpSpPr>
       <p:pic>
         <p:nvPicPr>
-          <p:cNvPr id="2" name="Image 0" descr="/Users/danwahlin/.copilot/session-state/56a7a0da-def8-48d4-b5e8-0ac3878cb8dd/files/slides-build/img/grad-corner-pattern.png">    </p:cNvPr>
+          <p:cNvPr id="2" name="Image 0" descr="">
+            <a:extLst>
+              <a:ext uri="{C183D7F6-B498-43B3-948B-1728B52AA6E4}">
+                <adec:decorative xmlns:adec="http://schemas.microsoft.com/office/drawing/2017/decorative" val="1"/>
+              </a:ext>
+            </a:extLst>
+          </p:cNvPr>
           <p:cNvPicPr>
             <a:picLocks noChangeAspect="1"/>
           </p:cNvPicPr>
@@ -2617,7 +2635,7 @@
       </p:sp>
       <p:pic>
         <p:nvPicPr>
-          <p:cNvPr id="5" name="Image 1" descr="/Users/danwahlin/.copilot/session-state/56a7a0da-def8-48d4-b5e8-0ac3878cb8dd/files/slides-build/icons/FaGithub-1F2328.png">
+          <p:cNvPr id="5" name="Image 1" descr="Open this chapter on GitHub">
             <a:hlinkClick r:id="rId3" tooltip="https://github.com/github/copilot-app-for-beginners/tree/main/07-automations"/>
           </p:cNvPr>
           <p:cNvPicPr>
@@ -2770,7 +2788,7 @@
       </p:sp>
       <p:pic>
         <p:nvPicPr>
-          <p:cNvPr id="9" name="Image 2" descr="/Users/danwahlin/.copilot/session-state/56a7a0da-def8-48d4-b5e8-0ac3878cb8dd/files/slides-build/img/07-triggers-crop.png">    </p:cNvPr>
+          <p:cNvPr id="9" name="Image 2" descr="Automation trigger options in the new-automation form">    </p:cNvPr>
           <p:cNvPicPr>
             <a:picLocks noChangeAspect="1"/>
           </p:cNvPicPr>
@@ -3662,7 +3680,13 @@
       </p:sp>
       <p:pic>
         <p:nvPicPr>
-          <p:cNvPr id="5" name="Image 0" descr="/Users/danwahlin/.copilot/session-state/56a7a0da-def8-48d4-b5e8-0ac3878cb8dd/files/slides-build/img/grad-corner-pattern.png">    </p:cNvPr>
+          <p:cNvPr id="5" name="Image 0" descr="">
+            <a:extLst>
+              <a:ext uri="{C183D7F6-B498-43B3-948B-1728B52AA6E4}">
+                <adec:decorative xmlns:adec="http://schemas.microsoft.com/office/drawing/2017/decorative" val="1"/>
+              </a:ext>
+            </a:extLst>
+          </p:cNvPr>
           <p:cNvPicPr>
             <a:picLocks noChangeAspect="1"/>
           </p:cNvPicPr>
@@ -3757,7 +3781,7 @@
       </p:sp>
       <p:pic>
         <p:nvPicPr>
-          <p:cNvPr id="8" name="Image 1" descr="/Users/danwahlin/.copilot/session-state/56a7a0da-def8-48d4-b5e8-0ac3878cb8dd/files/slides-build/icons/FaGithub-1F2328.png">
+          <p:cNvPr id="8" name="Image 1" descr="Open this chapter on GitHub">
             <a:hlinkClick r:id="rId3" tooltip="https://github.com/github/copilot-app-for-beginners/tree/main/07-automations"/>
           </p:cNvPr>
           <p:cNvPicPr>
@@ -3973,7 +3997,13 @@
       </p:grpSpPr>
       <p:pic>
         <p:nvPicPr>
-          <p:cNvPr id="2" name="Image 0" descr="/Users/danwahlin/.copilot/session-state/56a7a0da-def8-48d4-b5e8-0ac3878cb8dd/files/slides-build/img/grad-corner-pattern.png">    </p:cNvPr>
+          <p:cNvPr id="2" name="Image 0" descr="">
+            <a:extLst>
+              <a:ext uri="{C183D7F6-B498-43B3-948B-1728B52AA6E4}">
+                <adec:decorative xmlns:adec="http://schemas.microsoft.com/office/drawing/2017/decorative" val="1"/>
+              </a:ext>
+            </a:extLst>
+          </p:cNvPr>
           <p:cNvPicPr>
             <a:picLocks noChangeAspect="1"/>
           </p:cNvPicPr>
@@ -4068,7 +4098,7 @@
       </p:sp>
       <p:pic>
         <p:nvPicPr>
-          <p:cNvPr id="5" name="Image 1" descr="/Users/danwahlin/.copilot/session-state/56a7a0da-def8-48d4-b5e8-0ac3878cb8dd/files/slides-build/icons/FaGithub-1F2328.png">
+          <p:cNvPr id="5" name="Image 1" descr="Open this chapter on GitHub">
             <a:hlinkClick r:id="rId3" tooltip="https://github.com/github/copilot-app-for-beginners/tree/main/07-automations"/>
           </p:cNvPr>
           <p:cNvPicPr>
@@ -4984,7 +5014,13 @@
       </p:sp>
       <p:pic>
         <p:nvPicPr>
-          <p:cNvPr id="30" name="Image 2" descr="/Users/danwahlin/.copilot/session-state/56a7a0da-def8-48d4-b5e8-0ac3878cb8dd/files/slides-build/icons/GoAlert-CF222E.png">    </p:cNvPr>
+          <p:cNvPr id="30" name="Image 2" descr="">
+            <a:extLst>
+              <a:ext uri="{C183D7F6-B498-43B3-948B-1728B52AA6E4}">
+                <adec:decorative xmlns:adec="http://schemas.microsoft.com/office/drawing/2017/decorative" val="1"/>
+              </a:ext>
+            </a:extLst>
+          </p:cNvPr>
           <p:cNvPicPr>
             <a:picLocks noChangeAspect="1"/>
           </p:cNvPicPr>
@@ -5116,7 +5152,13 @@
       </p:grpSpPr>
       <p:pic>
         <p:nvPicPr>
-          <p:cNvPr id="2" name="Image 0" descr="/Users/danwahlin/.copilot/session-state/56a7a0da-def8-48d4-b5e8-0ac3878cb8dd/files/slides-build/img/grad-corner-pattern.png">    </p:cNvPr>
+          <p:cNvPr id="2" name="Image 0" descr="">
+            <a:extLst>
+              <a:ext uri="{C183D7F6-B498-43B3-948B-1728B52AA6E4}">
+                <adec:decorative xmlns:adec="http://schemas.microsoft.com/office/drawing/2017/decorative" val="1"/>
+              </a:ext>
+            </a:extLst>
+          </p:cNvPr>
           <p:cNvPicPr>
             <a:picLocks noChangeAspect="1"/>
           </p:cNvPicPr>
@@ -5211,7 +5253,7 @@
       </p:sp>
       <p:pic>
         <p:nvPicPr>
-          <p:cNvPr id="5" name="Image 1" descr="/Users/danwahlin/.copilot/session-state/56a7a0da-def8-48d4-b5e8-0ac3878cb8dd/files/slides-build/icons/FaGithub-1F2328.png">
+          <p:cNvPr id="5" name="Image 1" descr="Open this chapter on GitHub">
             <a:hlinkClick r:id="rId3" tooltip="https://github.com/github/copilot-app-for-beginners/tree/main/07-automations"/>
           </p:cNvPr>
           <p:cNvPicPr>
@@ -5409,7 +5451,7 @@
       </p:sp>
       <p:pic>
         <p:nvPicPr>
-          <p:cNvPr id="10" name="Image 2" descr="/Users/danwahlin/.copilot/session-state/56a7a0da-def8-48d4-b5e8-0ac3878cb8dd/files/slides-build/img/07-local-vs-cloud-automations.jpg">    </p:cNvPr>
+          <p:cNvPr id="10" name="Image 2" descr="Local versus cloud automations">    </p:cNvPr>
           <p:cNvPicPr>
             <a:picLocks noChangeAspect="1"/>
           </p:cNvPicPr>
@@ -5501,7 +5543,13 @@
       </p:sp>
       <p:pic>
         <p:nvPicPr>
-          <p:cNvPr id="13" name="Image 3" descr="/Users/danwahlin/.copilot/session-state/56a7a0da-def8-48d4-b5e8-0ac3878cb8dd/files/slides-build/icons/GoShieldCheck-BC4C00.png">    </p:cNvPr>
+          <p:cNvPr id="13" name="Image 3" descr="">
+            <a:extLst>
+              <a:ext uri="{C183D7F6-B498-43B3-948B-1728B52AA6E4}">
+                <adec:decorative xmlns:adec="http://schemas.microsoft.com/office/drawing/2017/decorative" val="1"/>
+              </a:ext>
+            </a:extLst>
+          </p:cNvPr>
           <p:cNvPicPr>
             <a:picLocks noChangeAspect="1"/>
           </p:cNvPicPr>
@@ -5825,7 +5873,13 @@
       </p:sp>
       <p:pic>
         <p:nvPicPr>
-          <p:cNvPr id="22" name="Image 4" descr="/Users/danwahlin/.copilot/session-state/56a7a0da-def8-48d4-b5e8-0ac3878cb8dd/files/slides-build/icons/GoLock-1A7F37.png">    </p:cNvPr>
+          <p:cNvPr id="22" name="Image 4" descr="">
+            <a:extLst>
+              <a:ext uri="{C183D7F6-B498-43B3-948B-1728B52AA6E4}">
+                <adec:decorative xmlns:adec="http://schemas.microsoft.com/office/drawing/2017/decorative" val="1"/>
+              </a:ext>
+            </a:extLst>
+          </p:cNvPr>
           <p:cNvPicPr>
             <a:picLocks noChangeAspect="1"/>
           </p:cNvPicPr>
@@ -5934,7 +5988,7 @@
       </p:sp>
       <p:pic>
         <p:nvPicPr>
-          <p:cNvPr id="25" name="Image 5" descr="/Users/danwahlin/.copilot/session-state/56a7a0da-def8-48d4-b5e8-0ac3878cb8dd/files/slides-build/img/07-cloud-tools-crop.png">    </p:cNvPr>
+          <p:cNvPr id="25" name="Image 5" descr="Cloud automation Tools selector with Read PR, List PRs, and Search PRs selected, showing 3 tools selected while write tools such as Create PR are cleared">    </p:cNvPr>
           <p:cNvPicPr>
             <a:picLocks noChangeAspect="1"/>
           </p:cNvPicPr>
@@ -5990,7 +6044,13 @@
       </p:grpSpPr>
       <p:pic>
         <p:nvPicPr>
-          <p:cNvPr id="2" name="Image 0" descr="/Users/danwahlin/.copilot/session-state/56a7a0da-def8-48d4-b5e8-0ac3878cb8dd/files/slides-build/img/grad-corner-pattern.png">    </p:cNvPr>
+          <p:cNvPr id="2" name="Image 0" descr="">
+            <a:extLst>
+              <a:ext uri="{C183D7F6-B498-43B3-948B-1728B52AA6E4}">
+                <adec:decorative xmlns:adec="http://schemas.microsoft.com/office/drawing/2017/decorative" val="1"/>
+              </a:ext>
+            </a:extLst>
+          </p:cNvPr>
           <p:cNvPicPr>
             <a:picLocks noChangeAspect="1"/>
           </p:cNvPicPr>
@@ -6085,7 +6145,7 @@
       </p:sp>
       <p:pic>
         <p:nvPicPr>
-          <p:cNvPr id="5" name="Image 1" descr="/Users/danwahlin/.copilot/session-state/56a7a0da-def8-48d4-b5e8-0ac3878cb8dd/files/slides-build/icons/FaGithub-1F2328.png">
+          <p:cNvPr id="5" name="Image 1" descr="Open this chapter on GitHub">
             <a:hlinkClick r:id="rId3" tooltip="https://github.com/github/copilot-app-for-beginners/tree/main/07-automations"/>
           </p:cNvPr>
           <p:cNvPicPr>
@@ -6988,7 +7048,13 @@
       </p:sp>
       <p:pic>
         <p:nvPicPr>
-          <p:cNvPr id="30" name="Image 2" descr="/Users/danwahlin/.copilot/session-state/56a7a0da-def8-48d4-b5e8-0ac3878cb8dd/files/slides-build/icons/GoGoal-BC4C00.png">    </p:cNvPr>
+          <p:cNvPr id="30" name="Image 2" descr="">
+            <a:extLst>
+              <a:ext uri="{C183D7F6-B498-43B3-948B-1728B52AA6E4}">
+                <adec:decorative xmlns:adec="http://schemas.microsoft.com/office/drawing/2017/decorative" val="1"/>
+              </a:ext>
+            </a:extLst>
+          </p:cNvPr>
           <p:cNvPicPr>
             <a:picLocks noChangeAspect="1"/>
           </p:cNvPicPr>
@@ -7128,7 +7194,13 @@
       </p:grpSpPr>
       <p:pic>
         <p:nvPicPr>
-          <p:cNvPr id="2" name="Image 0" descr="/Users/danwahlin/.copilot/session-state/56a7a0da-def8-48d4-b5e8-0ac3878cb8dd/files/slides-build/img/grad-corner-pattern.png">    </p:cNvPr>
+          <p:cNvPr id="2" name="Image 0" descr="">
+            <a:extLst>
+              <a:ext uri="{C183D7F6-B498-43B3-948B-1728B52AA6E4}">
+                <adec:decorative xmlns:adec="http://schemas.microsoft.com/office/drawing/2017/decorative" val="1"/>
+              </a:ext>
+            </a:extLst>
+          </p:cNvPr>
           <p:cNvPicPr>
             <a:picLocks noChangeAspect="1"/>
           </p:cNvPicPr>
@@ -7223,7 +7295,7 @@
       </p:sp>
       <p:pic>
         <p:nvPicPr>
-          <p:cNvPr id="5" name="Image 1" descr="/Users/danwahlin/.copilot/session-state/56a7a0da-def8-48d4-b5e8-0ac3878cb8dd/files/slides-build/icons/FaGithub-1F2328.png">
+          <p:cNvPr id="5" name="Image 1" descr="Open this chapter on GitHub">
             <a:hlinkClick r:id="rId3" tooltip="https://github.com/github/copilot-app-for-beginners/tree/main/07-automations"/>
           </p:cNvPr>
           <p:cNvPicPr>
@@ -7446,7 +7518,13 @@
       </p:sp>
       <p:pic>
         <p:nvPicPr>
-          <p:cNvPr id="11" name="Image 2" descr="/Users/danwahlin/.copilot/session-state/56a7a0da-def8-48d4-b5e8-0ac3878cb8dd/files/slides-build/icons/GoChecklist-1A7F37.png">    </p:cNvPr>
+          <p:cNvPr id="11" name="Image 2" descr="">
+            <a:extLst>
+              <a:ext uri="{C183D7F6-B498-43B3-948B-1728B52AA6E4}">
+                <adec:decorative xmlns:adec="http://schemas.microsoft.com/office/drawing/2017/decorative" val="1"/>
+              </a:ext>
+            </a:extLst>
+          </p:cNvPr>
           <p:cNvPicPr>
             <a:picLocks noChangeAspect="1"/>
           </p:cNvPicPr>
@@ -7580,7 +7658,13 @@
       </p:sp>
       <p:pic>
         <p:nvPicPr>
-          <p:cNvPr id="15" name="Image 3" descr="/Users/danwahlin/.copilot/session-state/56a7a0da-def8-48d4-b5e8-0ac3878cb8dd/files/slides-build/icons/GoGitPullRequest-1A7F37.png">    </p:cNvPr>
+          <p:cNvPr id="15" name="Image 3" descr="">
+            <a:extLst>
+              <a:ext uri="{C183D7F6-B498-43B3-948B-1728B52AA6E4}">
+                <adec:decorative xmlns:adec="http://schemas.microsoft.com/office/drawing/2017/decorative" val="1"/>
+              </a:ext>
+            </a:extLst>
+          </p:cNvPr>
           <p:cNvPicPr>
             <a:picLocks noChangeAspect="1"/>
           </p:cNvPicPr>
@@ -7714,7 +7798,13 @@
       </p:sp>
       <p:pic>
         <p:nvPicPr>
-          <p:cNvPr id="19" name="Image 4" descr="/Users/danwahlin/.copilot/session-state/56a7a0da-def8-48d4-b5e8-0ac3878cb8dd/files/slides-build/icons/GoGitMerge-1A7F37.png">    </p:cNvPr>
+          <p:cNvPr id="19" name="Image 4" descr="">
+            <a:extLst>
+              <a:ext uri="{C183D7F6-B498-43B3-948B-1728B52AA6E4}">
+                <adec:decorative xmlns:adec="http://schemas.microsoft.com/office/drawing/2017/decorative" val="1"/>
+              </a:ext>
+            </a:extLst>
+          </p:cNvPr>
           <p:cNvPicPr>
             <a:picLocks noChangeAspect="1"/>
           </p:cNvPicPr>
@@ -7920,7 +8010,13 @@
       </p:grpSpPr>
       <p:pic>
         <p:nvPicPr>
-          <p:cNvPr id="2" name="Image 0" descr="/Users/danwahlin/.copilot/session-state/56a7a0da-def8-48d4-b5e8-0ac3878cb8dd/files/slides-build/img/grad-corner-pattern.png">    </p:cNvPr>
+          <p:cNvPr id="2" name="Image 0" descr="">
+            <a:extLst>
+              <a:ext uri="{C183D7F6-B498-43B3-948B-1728B52AA6E4}">
+                <adec:decorative xmlns:adec="http://schemas.microsoft.com/office/drawing/2017/decorative" val="1"/>
+              </a:ext>
+            </a:extLst>
+          </p:cNvPr>
           <p:cNvPicPr>
             <a:picLocks noChangeAspect="1"/>
           </p:cNvPicPr>
@@ -8015,7 +8111,7 @@
       </p:sp>
       <p:pic>
         <p:nvPicPr>
-          <p:cNvPr id="5" name="Image 1" descr="/Users/danwahlin/.copilot/session-state/56a7a0da-def8-48d4-b5e8-0ac3878cb8dd/files/slides-build/icons/FaGithub-1F2328.png">
+          <p:cNvPr id="5" name="Image 1" descr="Open this chapter on GitHub">
             <a:hlinkClick r:id="rId3" tooltip="https://github.com/github/copilot-app-for-beginners/tree/main/07-automations"/>
           </p:cNvPr>
           <p:cNvPicPr>
@@ -8789,7 +8885,13 @@
       </p:sp>
       <p:pic>
         <p:nvPicPr>
-          <p:cNvPr id="26" name="Image 2" descr="/Users/danwahlin/.copilot/session-state/56a7a0da-def8-48d4-b5e8-0ac3878cb8dd/files/slides-build/icons/FaGithub-0969DA.png">    </p:cNvPr>
+          <p:cNvPr id="26" name="Image 2" descr="">
+            <a:extLst>
+              <a:ext uri="{C183D7F6-B498-43B3-948B-1728B52AA6E4}">
+                <adec:decorative xmlns:adec="http://schemas.microsoft.com/office/drawing/2017/decorative" val="1"/>
+              </a:ext>
+            </a:extLst>
+          </p:cNvPr>
           <p:cNvPicPr>
             <a:picLocks noChangeAspect="1"/>
           </p:cNvPicPr>
@@ -9015,7 +9117,13 @@
       </p:grpSpPr>
       <p:pic>
         <p:nvPicPr>
-          <p:cNvPr id="2" name="Image 0" descr="/Users/danwahlin/.copilot/session-state/56a7a0da-def8-48d4-b5e8-0ac3878cb8dd/files/slides-build/img/grad-corner-pattern.png">    </p:cNvPr>
+          <p:cNvPr id="2" name="Image 0" descr="">
+            <a:extLst>
+              <a:ext uri="{C183D7F6-B498-43B3-948B-1728B52AA6E4}">
+                <adec:decorative xmlns:adec="http://schemas.microsoft.com/office/drawing/2017/decorative" val="1"/>
+              </a:ext>
+            </a:extLst>
+          </p:cNvPr>
           <p:cNvPicPr>
             <a:picLocks noChangeAspect="1"/>
           </p:cNvPicPr>
@@ -9110,7 +9218,7 @@
       </p:sp>
       <p:pic>
         <p:nvPicPr>
-          <p:cNvPr id="5" name="Image 1" descr="/Users/danwahlin/.copilot/session-state/56a7a0da-def8-48d4-b5e8-0ac3878cb8dd/files/slides-build/icons/FaGithub-1F2328.png">
+          <p:cNvPr id="5" name="Image 1" descr="Open this chapter on GitHub">
             <a:hlinkClick r:id="rId3" tooltip="https://github.com/github/copilot-app-for-beginners/tree/main/07-automations"/>
           </p:cNvPr>
           <p:cNvPicPr>
@@ -10086,7 +10194,13 @@
       </p:sp>
       <p:pic>
         <p:nvPicPr>
-          <p:cNvPr id="5" name="Image 0" descr="/Users/danwahlin/.copilot/session-state/56a7a0da-def8-48d4-b5e8-0ac3878cb8dd/files/slides-build/img/grad-corner-pattern.png">    </p:cNvPr>
+          <p:cNvPr id="5" name="Image 0" descr="">
+            <a:extLst>
+              <a:ext uri="{C183D7F6-B498-43B3-948B-1728B52AA6E4}">
+                <adec:decorative xmlns:adec="http://schemas.microsoft.com/office/drawing/2017/decorative" val="1"/>
+              </a:ext>
+            </a:extLst>
+          </p:cNvPr>
           <p:cNvPicPr>
             <a:picLocks noChangeAspect="1"/>
           </p:cNvPicPr>
@@ -10181,7 +10295,7 @@
       </p:sp>
       <p:pic>
         <p:nvPicPr>
-          <p:cNvPr id="8" name="Image 1" descr="/Users/danwahlin/.copilot/session-state/56a7a0da-def8-48d4-b5e8-0ac3878cb8dd/files/slides-build/icons/FaGithub-1F2328.png">
+          <p:cNvPr id="8" name="Image 1" descr="Open this chapter on GitHub">
             <a:hlinkClick r:id="rId3" tooltip="https://github.com/github/copilot-app-for-beginners/tree/main/07-automations"/>
           </p:cNvPr>
           <p:cNvPicPr>
@@ -10397,7 +10511,13 @@
       </p:grpSpPr>
       <p:pic>
         <p:nvPicPr>
-          <p:cNvPr id="2" name="Image 0" descr="/Users/danwahlin/.copilot/session-state/56a7a0da-def8-48d4-b5e8-0ac3878cb8dd/files/slides-build/img/grad-corner-pattern.png">    </p:cNvPr>
+          <p:cNvPr id="2" name="Image 0" descr="">
+            <a:extLst>
+              <a:ext uri="{C183D7F6-B498-43B3-948B-1728B52AA6E4}">
+                <adec:decorative xmlns:adec="http://schemas.microsoft.com/office/drawing/2017/decorative" val="1"/>
+              </a:ext>
+            </a:extLst>
+          </p:cNvPr>
           <p:cNvPicPr>
             <a:picLocks noChangeAspect="1"/>
           </p:cNvPicPr>
@@ -10492,7 +10612,7 @@
       </p:sp>
       <p:pic>
         <p:nvPicPr>
-          <p:cNvPr id="5" name="Image 1" descr="/Users/danwahlin/.copilot/session-state/56a7a0da-def8-48d4-b5e8-0ac3878cb8dd/files/slides-build/icons/FaGithub-1F2328.png">
+          <p:cNvPr id="5" name="Image 1" descr="Open this chapter on GitHub">
             <a:hlinkClick r:id="rId3" tooltip="https://github.com/github/copilot-app-for-beginners/tree/main/07-automations"/>
           </p:cNvPr>
           <p:cNvPicPr>
@@ -10690,7 +10810,7 @@
       </p:sp>
       <p:pic>
         <p:nvPicPr>
-          <p:cNvPr id="10" name="Image 2" descr="/Users/danwahlin/.copilot/session-state/56a7a0da-def8-48d4-b5e8-0ac3878cb8dd/files/slides-build/img/07-sequencer-automation.jpg">    </p:cNvPr>
+          <p:cNvPr id="10" name="Image 2" descr="Sequencer analogy for automations">    </p:cNvPr>
           <p:cNvPicPr>
             <a:picLocks noChangeAspect="1"/>
           </p:cNvPicPr>
@@ -11324,7 +11444,13 @@
       </p:grpSpPr>
       <p:pic>
         <p:nvPicPr>
-          <p:cNvPr id="2" name="Image 0" descr="/Users/danwahlin/.copilot/session-state/56a7a0da-def8-48d4-b5e8-0ac3878cb8dd/files/slides-build/img/grad-corner-pattern.png">    </p:cNvPr>
+          <p:cNvPr id="2" name="Image 0" descr="">
+            <a:extLst>
+              <a:ext uri="{C183D7F6-B498-43B3-948B-1728B52AA6E4}">
+                <adec:decorative xmlns:adec="http://schemas.microsoft.com/office/drawing/2017/decorative" val="1"/>
+              </a:ext>
+            </a:extLst>
+          </p:cNvPr>
           <p:cNvPicPr>
             <a:picLocks noChangeAspect="1"/>
           </p:cNvPicPr>
@@ -11419,7 +11545,7 @@
       </p:sp>
       <p:pic>
         <p:nvPicPr>
-          <p:cNvPr id="5" name="Image 1" descr="/Users/danwahlin/.copilot/session-state/56a7a0da-def8-48d4-b5e8-0ac3878cb8dd/files/slides-build/icons/FaGithub-1F2328.png">
+          <p:cNvPr id="5" name="Image 1" descr="Open this chapter on GitHub">
             <a:hlinkClick r:id="rId3" tooltip="https://github.com/github/copilot-app-for-beginners/tree/main/07-automations"/>
           </p:cNvPr>
           <p:cNvPicPr>
@@ -11572,7 +11698,7 @@
       </p:sp>
       <p:pic>
         <p:nvPicPr>
-          <p:cNvPr id="9" name="Image 2" descr="/Users/danwahlin/.copilot/session-state/56a7a0da-def8-48d4-b5e8-0ac3878cb8dd/files/slides-build/img/07-automation-trigger-to-run.jpg">    </p:cNvPr>
+          <p:cNvPr id="9" name="Image 2" descr="Automation trigger to agent run">    </p:cNvPr>
           <p:cNvPicPr>
             <a:picLocks noChangeAspect="1"/>
           </p:cNvPicPr>
@@ -11628,7 +11754,13 @@
       </p:sp>
       <p:pic>
         <p:nvPicPr>
-          <p:cNvPr id="11" name="Image 3" descr="/Users/danwahlin/.copilot/session-state/56a7a0da-def8-48d4-b5e8-0ac3878cb8dd/files/slides-build/icons/GoZap-0969DA.png">    </p:cNvPr>
+          <p:cNvPr id="11" name="Image 3" descr="">
+            <a:extLst>
+              <a:ext uri="{C183D7F6-B498-43B3-948B-1728B52AA6E4}">
+                <adec:decorative xmlns:adec="http://schemas.microsoft.com/office/drawing/2017/decorative" val="1"/>
+              </a:ext>
+            </a:extLst>
+          </p:cNvPr>
           <p:cNvPicPr>
             <a:picLocks noChangeAspect="1"/>
           </p:cNvPicPr>
@@ -11765,7 +11897,13 @@
       </p:sp>
       <p:pic>
         <p:nvPicPr>
-          <p:cNvPr id="15" name="Image 4" descr="/Users/danwahlin/.copilot/session-state/56a7a0da-def8-48d4-b5e8-0ac3878cb8dd/files/slides-build/icons/GoCopilot-0969DA.png">    </p:cNvPr>
+          <p:cNvPr id="15" name="Image 4" descr="">
+            <a:extLst>
+              <a:ext uri="{C183D7F6-B498-43B3-948B-1728B52AA6E4}">
+                <adec:decorative xmlns:adec="http://schemas.microsoft.com/office/drawing/2017/decorative" val="1"/>
+              </a:ext>
+            </a:extLst>
+          </p:cNvPr>
           <p:cNvPicPr>
             <a:picLocks noChangeAspect="1"/>
           </p:cNvPicPr>
@@ -11902,7 +12040,13 @@
       </p:sp>
       <p:pic>
         <p:nvPicPr>
-          <p:cNvPr id="19" name="Image 5" descr="/Users/danwahlin/.copilot/session-state/56a7a0da-def8-48d4-b5e8-0ac3878cb8dd/files/slides-build/icons/GoLock-0969DA.png">    </p:cNvPr>
+          <p:cNvPr id="19" name="Image 5" descr="">
+            <a:extLst>
+              <a:ext uri="{C183D7F6-B498-43B3-948B-1728B52AA6E4}">
+                <adec:decorative xmlns:adec="http://schemas.microsoft.com/office/drawing/2017/decorative" val="1"/>
+              </a:ext>
+            </a:extLst>
+          </p:cNvPr>
           <p:cNvPicPr>
             <a:picLocks noChangeAspect="1"/>
           </p:cNvPicPr>
@@ -12039,7 +12183,13 @@
       </p:sp>
       <p:pic>
         <p:nvPicPr>
-          <p:cNvPr id="23" name="Image 6" descr="/Users/danwahlin/.copilot/session-state/56a7a0da-def8-48d4-b5e8-0ac3878cb8dd/files/slides-build/icons/GoEye-0969DA.png">    </p:cNvPr>
+          <p:cNvPr id="23" name="Image 6" descr="">
+            <a:extLst>
+              <a:ext uri="{C183D7F6-B498-43B3-948B-1728B52AA6E4}">
+                <adec:decorative xmlns:adec="http://schemas.microsoft.com/office/drawing/2017/decorative" val="1"/>
+              </a:ext>
+            </a:extLst>
+          </p:cNvPr>
           <p:cNvPicPr>
             <a:picLocks noChangeAspect="1"/>
           </p:cNvPicPr>
@@ -12176,7 +12326,13 @@
       </p:grpSpPr>
       <p:pic>
         <p:nvPicPr>
-          <p:cNvPr id="2" name="Image 0" descr="/Users/danwahlin/.copilot/session-state/56a7a0da-def8-48d4-b5e8-0ac3878cb8dd/files/slides-build/img/grad-corner-pattern.png">    </p:cNvPr>
+          <p:cNvPr id="2" name="Image 0" descr="">
+            <a:extLst>
+              <a:ext uri="{C183D7F6-B498-43B3-948B-1728B52AA6E4}">
+                <adec:decorative xmlns:adec="http://schemas.microsoft.com/office/drawing/2017/decorative" val="1"/>
+              </a:ext>
+            </a:extLst>
+          </p:cNvPr>
           <p:cNvPicPr>
             <a:picLocks noChangeAspect="1"/>
           </p:cNvPicPr>
@@ -12271,7 +12427,7 @@
       </p:sp>
       <p:pic>
         <p:nvPicPr>
-          <p:cNvPr id="5" name="Image 1" descr="/Users/danwahlin/.copilot/session-state/56a7a0da-def8-48d4-b5e8-0ac3878cb8dd/files/slides-build/icons/FaGithub-1F2328.png">
+          <p:cNvPr id="5" name="Image 1" descr="Open this chapter on GitHub">
             <a:hlinkClick r:id="rId3" tooltip="https://github.com/github/copilot-app-for-beginners/tree/main/07-automations"/>
           </p:cNvPr>
           <p:cNvPicPr>
@@ -12469,7 +12625,7 @@
       </p:sp>
       <p:pic>
         <p:nvPicPr>
-          <p:cNvPr id="10" name="Image 2" descr="/Users/danwahlin/.copilot/session-state/56a7a0da-def8-48d4-b5e8-0ac3878cb8dd/files/slides-build/img/07-manual-first-path.jpg">    </p:cNvPr>
+          <p:cNvPr id="10" name="Image 2" descr="Start manual, then expand automations">    </p:cNvPr>
           <p:cNvPicPr>
             <a:picLocks noChangeAspect="1"/>
           </p:cNvPicPr>
@@ -12561,7 +12717,13 @@
       </p:sp>
       <p:pic>
         <p:nvPicPr>
-          <p:cNvPr id="13" name="Image 3" descr="/Users/danwahlin/.copilot/session-state/56a7a0da-def8-48d4-b5e8-0ac3878cb8dd/files/slides-build/icons/GoCheckCircle-1A7F37.png">    </p:cNvPr>
+          <p:cNvPr id="13" name="Image 3" descr="">
+            <a:extLst>
+              <a:ext uri="{C183D7F6-B498-43B3-948B-1728B52AA6E4}">
+                <adec:decorative xmlns:adec="http://schemas.microsoft.com/office/drawing/2017/decorative" val="1"/>
+              </a:ext>
+            </a:extLst>
+          </p:cNvPr>
           <p:cNvPicPr>
             <a:picLocks noChangeAspect="1"/>
           </p:cNvPicPr>
@@ -12737,7 +12899,13 @@
       </p:sp>
       <p:pic>
         <p:nvPicPr>
-          <p:cNvPr id="18" name="Image 4" descr="/Users/danwahlin/.copilot/session-state/56a7a0da-def8-48d4-b5e8-0ac3878cb8dd/files/slides-build/icons/GoX-CF222E.png">    </p:cNvPr>
+          <p:cNvPr id="18" name="Image 4" descr="">
+            <a:extLst>
+              <a:ext uri="{C183D7F6-B498-43B3-948B-1728B52AA6E4}">
+                <adec:decorative xmlns:adec="http://schemas.microsoft.com/office/drawing/2017/decorative" val="1"/>
+              </a:ext>
+            </a:extLst>
+          </p:cNvPr>
           <p:cNvPicPr>
             <a:picLocks noChangeAspect="1"/>
           </p:cNvPicPr>
@@ -12979,7 +13147,13 @@
       </p:sp>
       <p:pic>
         <p:nvPicPr>
-          <p:cNvPr id="5" name="Image 0" descr="/Users/danwahlin/.copilot/session-state/56a7a0da-def8-48d4-b5e8-0ac3878cb8dd/files/slides-build/img/grad-corner-pattern.png">    </p:cNvPr>
+          <p:cNvPr id="5" name="Image 0" descr="">
+            <a:extLst>
+              <a:ext uri="{C183D7F6-B498-43B3-948B-1728B52AA6E4}">
+                <adec:decorative xmlns:adec="http://schemas.microsoft.com/office/drawing/2017/decorative" val="1"/>
+              </a:ext>
+            </a:extLst>
+          </p:cNvPr>
           <p:cNvPicPr>
             <a:picLocks noChangeAspect="1"/>
           </p:cNvPicPr>
@@ -13074,7 +13248,7 @@
       </p:sp>
       <p:pic>
         <p:nvPicPr>
-          <p:cNvPr id="8" name="Image 1" descr="/Users/danwahlin/.copilot/session-state/56a7a0da-def8-48d4-b5e8-0ac3878cb8dd/files/slides-build/icons/FaGithub-1F2328.png">
+          <p:cNvPr id="8" name="Image 1" descr="Open this chapter on GitHub">
             <a:hlinkClick r:id="rId3" tooltip="https://github.com/github/copilot-app-for-beginners/tree/main/07-automations"/>
           </p:cNvPr>
           <p:cNvPicPr>
@@ -13290,7 +13464,13 @@
       </p:grpSpPr>
       <p:pic>
         <p:nvPicPr>
-          <p:cNvPr id="2" name="Image 0" descr="/Users/danwahlin/.copilot/session-state/56a7a0da-def8-48d4-b5e8-0ac3878cb8dd/files/slides-build/img/grad-corner-pattern.png">    </p:cNvPr>
+          <p:cNvPr id="2" name="Image 0" descr="">
+            <a:extLst>
+              <a:ext uri="{C183D7F6-B498-43B3-948B-1728B52AA6E4}">
+                <adec:decorative xmlns:adec="http://schemas.microsoft.com/office/drawing/2017/decorative" val="1"/>
+              </a:ext>
+            </a:extLst>
+          </p:cNvPr>
           <p:cNvPicPr>
             <a:picLocks noChangeAspect="1"/>
           </p:cNvPicPr>
@@ -13385,7 +13565,7 @@
       </p:sp>
       <p:pic>
         <p:nvPicPr>
-          <p:cNvPr id="5" name="Image 1" descr="/Users/danwahlin/.copilot/session-state/56a7a0da-def8-48d4-b5e8-0ac3878cb8dd/files/slides-build/icons/FaGithub-1F2328.png">
+          <p:cNvPr id="5" name="Image 1" descr="Open this chapter on GitHub">
             <a:hlinkClick r:id="rId3" tooltip="https://github.com/github/copilot-app-for-beginners/tree/main/07-automations"/>
           </p:cNvPr>
           <p:cNvPicPr>
@@ -13703,7 +13883,7 @@
       </p:sp>
       <p:pic>
         <p:nvPicPr>
-          <p:cNvPr id="10" name="Image 2" descr="/Users/danwahlin/.copilot/session-state/56a7a0da-def8-48d4-b5e8-0ac3878cb8dd/files/slides-build/img/07-new-automation-crop.png">    </p:cNvPr>
+          <p:cNvPr id="10" name="Image 2" descr="New automation form with the Manual trigger, Run in the cloud off, the course project, Current checkout, and the Create and run option open">    </p:cNvPr>
           <p:cNvPicPr>
             <a:picLocks noChangeAspect="1"/>
           </p:cNvPicPr>
@@ -14413,7 +14593,13 @@
       </p:grpSpPr>
       <p:pic>
         <p:nvPicPr>
-          <p:cNvPr id="2" name="Image 0" descr="/Users/danwahlin/.copilot/session-state/56a7a0da-def8-48d4-b5e8-0ac3878cb8dd/files/slides-build/img/grad-corner-pattern.png">    </p:cNvPr>
+          <p:cNvPr id="2" name="Image 0" descr="">
+            <a:extLst>
+              <a:ext uri="{C183D7F6-B498-43B3-948B-1728B52AA6E4}">
+                <adec:decorative xmlns:adec="http://schemas.microsoft.com/office/drawing/2017/decorative" val="1"/>
+              </a:ext>
+            </a:extLst>
+          </p:cNvPr>
           <p:cNvPicPr>
             <a:picLocks noChangeAspect="1"/>
           </p:cNvPicPr>
@@ -14508,7 +14694,7 @@
       </p:sp>
       <p:pic>
         <p:nvPicPr>
-          <p:cNvPr id="5" name="Image 1" descr="/Users/danwahlin/.copilot/session-state/56a7a0da-def8-48d4-b5e8-0ac3878cb8dd/files/slides-build/icons/FaGithub-1F2328.png">
+          <p:cNvPr id="5" name="Image 1" descr="Open this chapter on GitHub">
             <a:hlinkClick r:id="rId3" tooltip="https://github.com/github/copilot-app-for-beginners/tree/main/07-automations"/>
           </p:cNvPr>
           <p:cNvPicPr>
